--- a/docs/presentations/internal-brain-architecture-submission.pptx
+++ b/docs/presentations/internal-brain-architecture-submission.pptx
@@ -120,21 +120,21 @@
   <p:extLst>
     <p:ext uri="{521415D9-36F7-43E2-AB2F-B90AF26B5E84}">
       <p14:sectionLst xmlns:p14="http://schemas.microsoft.com/office/powerpoint/2010/main">
-        <p14:section name="Story" id="{4f9aa0fe-2b25-c09c-8479-dc04c7d0e1ac}">
+        <p14:section name="Story" id="{ba0ae32a-e19f-0afa-1995-790b1cae7571}">
           <p14:sldIdLst>
             <p14:sldId id="256"/>
             <p14:sldId id="257"/>
             <p14:sldId id="258"/>
           </p14:sldIdLst>
         </p14:section>
-        <p14:section name="Architecture" id="{bbb6af53-5bab-408c-b06f-2c9e5f996278}">
+        <p14:section name="Architecture" id="{98ea6f4d-ca77-5fc4-2c4d-dae246164f83}">
           <p14:sldIdLst>
             <p14:sldId id="259"/>
             <p14:sldId id="260"/>
             <p14:sldId id="261"/>
           </p14:sldIdLst>
         </p14:section>
-        <p14:section name="Proof" id="{4764e9f5-cae3-f122-062f-e9a455d066fa}">
+        <p14:section name="Proof" id="{894a2809-f5d6-ca2f-ef68-4f27cfa74771}">
           <p14:sldIdLst>
             <p14:sldId id="262"/>
             <p14:sldId id="263"/>
@@ -272,7 +272,7 @@
                     <c:v>Gemini Enterprise, fastest identity sync</c:v>
                   </c:pt>
                   <c:pt idx="3">
-                    <c:v>Internal Brain, confidential documents</c:v>
+                    <c:v>Brain Sauce, confidential documents</c:v>
                   </c:pt>
                 </c:lvl>
               </c:multiLvlStrCache>
@@ -2210,7 +2210,7 @@
                   <a:schemeClr val="accent6"/>
                 </a:solidFill>
               </a:rPr>
-              <a:t>The Internal Brain  ·  Tencent Cloud AI CAN DO IT Hackathon SG 2026  ·  FinTech track, Aspire case study</a:t>
+              <a:t>Brain Sauce  ·  Tencent Cloud AI CAN DO IT Hackathon SG 2026  ·  FinTech track, Aspire case study</a:t>
             </a:r>
             <a:endParaRPr lang="en-US" sz="1000" dirty="0"/>
           </a:p>
@@ -2754,7 +2754,7 @@
                   <a:schemeClr val="bg1"/>
                 </a:solidFill>
               </a:rPr>
-              <a:t>The Internal Brain</a:t>
+              <a:t>Brain Sauce</a:t>
             </a:r>
             <a:endParaRPr lang="en-US" sz="5400" dirty="0"/>
           </a:p>
@@ -3816,7 +3816,7 @@
                             <a:schemeClr val="bg1"/>
                           </a:solidFill>
                         </a:rPr>
-                        <a:t>Internal Brain</a:t>
+                        <a:t>Brain Sauce</a:t>
                       </a:r>
                       <a:endParaRPr lang="en-US" sz="1200" dirty="0"/>
                     </a:p>
@@ -19387,9 +19387,9 @@
 </file>
 
 <file path=ppt/theme/theme1.xml><?xml version="1.0" encoding="utf-8"?>
-<a:theme xmlns:a="http://schemas.openxmlformats.org/drawingml/2006/main" name="Internal Brain">
+<a:theme xmlns:a="http://schemas.openxmlformats.org/drawingml/2006/main" name="Brain Sauce">
   <a:themeElements>
-    <a:clrScheme name="Internal Brain">
+    <a:clrScheme name="Brain Sauce">
       <a:dk1>
         <a:srgbClr val="0F172A"/>
       </a:dk1>
@@ -19427,7 +19427,7 @@
         <a:srgbClr val="7C5CD6"/>
       </a:folHlink>
     </a:clrScheme>
-    <a:fontScheme name="Internal Brain">
+    <a:fontScheme name="Brain Sauce">
       <a:majorFont>
         <a:latin typeface="Calibri"/>
         <a:ea typeface=""/>

--- a/docs/presentations/internal-brain-architecture-submission.pptx
+++ b/docs/presentations/internal-brain-architecture-submission.pptx
@@ -120,21 +120,21 @@
   <p:extLst>
     <p:ext uri="{521415D9-36F7-43E2-AB2F-B90AF26B5E84}">
       <p14:sectionLst xmlns:p14="http://schemas.microsoft.com/office/powerpoint/2010/main">
-        <p14:section name="Story" id="{ba0ae32a-e19f-0afa-1995-790b1cae7571}">
+        <p14:section name="Story" id="{1e71f93e-90c2-e0a9-612b-62b38a7a010a}">
           <p14:sldIdLst>
             <p14:sldId id="256"/>
             <p14:sldId id="257"/>
             <p14:sldId id="258"/>
           </p14:sldIdLst>
         </p14:section>
-        <p14:section name="Architecture" id="{98ea6f4d-ca77-5fc4-2c4d-dae246164f83}">
+        <p14:section name="Architecture" id="{137edd0d-3154-915a-fd71-3d58a1a63343}">
           <p14:sldIdLst>
             <p14:sldId id="259"/>
             <p14:sldId id="260"/>
             <p14:sldId id="261"/>
           </p14:sldIdLst>
         </p14:section>
-        <p14:section name="Proof" id="{894a2809-f5d6-ca2f-ef68-4f27cfa74771}">
+        <p14:section name="Proof" id="{146d3468-f03c-2e23-de42-699628e2df36}">
           <p14:sldIdLst>
             <p14:sldId id="262"/>
             <p14:sldId id="263"/>
@@ -183,7 +183,7 @@
           </c:tx>
           <c:spPr>
             <a:solidFill>
-              <a:srgbClr val="475569"/>
+              <a:srgbClr val="A6A6A6"/>
             </a:solidFill>
             <a:effectLst/>
           </c:spPr>
@@ -197,7 +197,7 @@
                 <a:pPr>
                   <a:defRPr b="1" i="0" strike="noStrike" sz="1300" u="none">
                     <a:solidFill>
-                      <a:srgbClr val="0F172A"/>
+                      <a:srgbClr val="1D1D1D"/>
                     </a:solidFill>
                     <a:latin typeface="+mn-lt"/>
                   </a:defRPr>
@@ -218,7 +218,7 @@
             <c:bubble3D val="0"/>
             <c:spPr>
               <a:solidFill>
-                <a:srgbClr val="475569"/>
+                <a:srgbClr val="A6A6A6"/>
               </a:solidFill>
               <a:effectLst/>
             </c:spPr>
@@ -229,7 +229,7 @@
             <c:bubble3D val="0"/>
             <c:spPr>
               <a:solidFill>
-                <a:srgbClr val="475569"/>
+                <a:srgbClr val="A6A6A6"/>
               </a:solidFill>
               <a:effectLst/>
             </c:spPr>
@@ -240,7 +240,7 @@
             <c:bubble3D val="0"/>
             <c:spPr>
               <a:solidFill>
-                <a:srgbClr val="475569"/>
+                <a:srgbClr val="A6A6A6"/>
               </a:solidFill>
               <a:effectLst/>
             </c:spPr>
@@ -251,7 +251,7 @@
             <c:bubble3D val="0"/>
             <c:spPr>
               <a:solidFill>
-                <a:srgbClr val="0E9F8E"/>
+                <a:srgbClr val="549F58"/>
               </a:solidFill>
               <a:effectLst/>
             </c:spPr>
@@ -309,7 +309,7 @@
               <a:pPr>
                 <a:defRPr b="1" i="0" strike="noStrike" sz="1300" u="none">
                   <a:solidFill>
-                    <a:srgbClr val="0F172A"/>
+                    <a:srgbClr val="1D1D1D"/>
                   </a:solidFill>
                   <a:latin typeface="+mn-lt"/>
                 </a:defRPr>
@@ -355,7 +355,7 @@
             <a:pPr>
               <a:defRPr sz="1200" b="0" i="0" u="none" strike="noStrike">
                 <a:solidFill>
-                  <a:srgbClr val="0F172A"/>
+                  <a:srgbClr val="1D1D1D"/>
                 </a:solidFill>
                 <a:latin typeface="+mn-lt"/>
               </a:defRPr>
@@ -2052,7 +2052,7 @@
     <p:bg>
       <p:bgPr>
         <a:solidFill>
-          <a:schemeClr val="tx2"/>
+          <a:schemeClr val="bg1"/>
         </a:solidFill>
       </p:bgPr>
     </p:bg>
@@ -2094,9 +2094,9 @@
           <a:lstStyle>
             <a:lvl1pPr algn="l" indent="0" marL="0">
               <a:buNone/>
-              <a:defRPr lang="en-US" sz="5400" b="1" dirty="0">
-                <a:solidFill>
-                  <a:schemeClr val="bg1"/>
+              <a:defRPr lang="en-US" sz="6000" b="1" dirty="0">
+                <a:solidFill>
+                  <a:schemeClr val="tx2"/>
                 </a:solidFill>
               </a:defRPr>
             </a:lvl1pPr>
@@ -2105,7 +2105,7 @@
             <a:pPr algn="l" indent="0" marL="0">
               <a:buNone/>
             </a:pPr>
-            <a:endParaRPr lang="en-US" sz="5400" dirty="0"/>
+            <a:endParaRPr lang="en-US" sz="6000" dirty="0"/>
           </a:p>
         </p:txBody>
       </p:sp>
@@ -2165,7 +2165,7 @@
           <a:lstStyle>
             <a:lvl1pPr algn="l" indent="0" marL="0">
               <a:buNone/>
-              <a:defRPr lang="en-US" sz="2800" b="1" dirty="0">
+              <a:defRPr lang="en-US" sz="2600" b="1" dirty="0">
                 <a:solidFill>
                   <a:schemeClr val="tx2"/>
                 </a:solidFill>
@@ -2176,7 +2176,7 @@
             <a:pPr algn="l" indent="0" marL="0">
               <a:buNone/>
             </a:pPr>
-            <a:endParaRPr lang="en-US" sz="2800" dirty="0"/>
+            <a:endParaRPr lang="en-US" sz="2600" dirty="0"/>
           </a:p>
         </p:txBody>
       </p:sp>
@@ -2690,7 +2690,7 @@
         </p:nvSpPr>
         <p:spPr>
           <a:xfrm>
-            <a:off x="640080" y="685800"/>
+            <a:off x="640080" y="731520"/>
             <a:ext cx="3566160" cy="384048"/>
           </a:xfrm>
           <a:prstGeom prst="roundRect">
@@ -2699,7 +2699,7 @@
             </a:avLst>
           </a:prstGeom>
           <a:solidFill>
-            <a:schemeClr val="accent1"/>
+            <a:srgbClr val="EAF3EA"/>
           </a:solidFill>
           <a:ln/>
         </p:spPr>
@@ -2713,7 +2713,7 @@
             <a:r>
               <a:rPr lang="en-US" sz="1200" b="1" dirty="0">
                 <a:solidFill>
-                  <a:schemeClr val="bg1"/>
+                  <a:schemeClr val="accent1"/>
                 </a:solidFill>
               </a:rPr>
               <a:t>FINTECH TRACK  ·  ASPIRE CASE STUDY</a:t>
@@ -2749,14 +2749,14 @@
               <a:buNone/>
             </a:pPr>
             <a:r>
-              <a:rPr lang="en-US" sz="5400" b="1" dirty="0">
-                <a:solidFill>
-                  <a:schemeClr val="bg1"/>
-                </a:solidFill>
-              </a:rPr>
-              <a:t>Brain Sauce</a:t>
-            </a:r>
-            <a:endParaRPr lang="en-US" sz="5400" dirty="0"/>
+              <a:rPr lang="en-US" sz="6000" b="1" dirty="0">
+                <a:solidFill>
+                  <a:schemeClr val="tx2"/>
+                </a:solidFill>
+              </a:rPr>
+              <a:t>Brain Sauce.</a:t>
+            </a:r>
+            <a:endParaRPr lang="en-US" sz="6000" dirty="0"/>
           </a:p>
         </p:txBody>
       </p:sp>
@@ -2768,8 +2768,8 @@
         </p:nvSpPr>
         <p:spPr>
           <a:xfrm>
-            <a:off x="640080" y="2606040"/>
-            <a:ext cx="6949440" cy="1097280"/>
+            <a:off x="640080" y="2286000"/>
+            <a:ext cx="7863840" cy="914400"/>
           </a:xfrm>
           <a:prstGeom prst="rect">
             <a:avLst/>
@@ -2785,14 +2785,14 @@
               <a:buNone/>
             </a:pPr>
             <a:r>
-              <a:rPr lang="en-US" sz="2000" dirty="0">
-                <a:solidFill>
-                  <a:schemeClr val="bg2"/>
-                </a:solidFill>
-              </a:rPr>
-              <a:t>Ask one question across Confluence, Jira, Slack and Google Drive. Get an answer built only from what you are allowed to see, with the proof attached.</a:t>
-            </a:r>
-            <a:endParaRPr lang="en-US" sz="2000" dirty="0"/>
+              <a:rPr lang="en-US" sz="5400" b="1" dirty="0">
+                <a:solidFill>
+                  <a:srgbClr val="A6A6A6"/>
+                </a:solidFill>
+              </a:rPr>
+              <a:t>Answers with receipts.</a:t>
+            </a:r>
+            <a:endParaRPr lang="en-US" sz="5400" dirty="0"/>
           </a:p>
         </p:txBody>
       </p:sp>
@@ -2804,8 +2804,8 @@
         </p:nvSpPr>
         <p:spPr>
           <a:xfrm>
-            <a:off x="640080" y="3977640"/>
-            <a:ext cx="6949440" cy="731520"/>
+            <a:off x="640080" y="3520440"/>
+            <a:ext cx="6766560" cy="914400"/>
           </a:xfrm>
           <a:prstGeom prst="rect">
             <a:avLst/>
@@ -2821,25 +2821,14 @@
               <a:buNone/>
             </a:pPr>
             <a:r>
-              <a:rPr lang="en-US" sz="1400" b="1" dirty="0">
-                <a:solidFill>
-                  <a:srgbClr val="C9D8EE"/>
-                </a:solidFill>
-              </a:rPr>
-              <a:t>Challenge: </a:t>
-            </a:r>
-            <a:pPr algn="l" indent="0" marL="0">
-              <a:buNone/>
-            </a:pPr>
-            <a:r>
-              <a:rPr lang="en-US" sz="1400" dirty="0">
-                <a:solidFill>
-                  <a:srgbClr val="C9D8EE"/>
-                </a:solidFill>
-              </a:rPr>
-              <a:t>The Internal Brain: a context-aware enterprise knowledge system with RBAC, security logging and audit trail</a:t>
-            </a:r>
-            <a:endParaRPr lang="en-US" sz="1400" dirty="0"/>
+              <a:rPr lang="en-US" sz="1800" dirty="0">
+                <a:solidFill>
+                  <a:srgbClr val="666666"/>
+                </a:solidFill>
+              </a:rPr>
+              <a:t>Ask one question across Confluence, Jira, Slack and Google Drive. Get an answer built only from what you are allowed to see, with the proof attached.</a:t>
+            </a:r>
+            <a:endParaRPr lang="en-US" sz="1800" dirty="0"/>
           </a:p>
         </p:txBody>
       </p:sp>
@@ -2851,8 +2840,8 @@
         </p:nvSpPr>
         <p:spPr>
           <a:xfrm>
-            <a:off x="640080" y="5989320"/>
-            <a:ext cx="10515600" cy="365760"/>
+            <a:off x="640080" y="4572000"/>
+            <a:ext cx="6766560" cy="640080"/>
           </a:xfrm>
           <a:prstGeom prst="rect">
             <a:avLst/>
@@ -2868,20 +2857,67 @@
               <a:buNone/>
             </a:pPr>
             <a:r>
+              <a:rPr lang="en-US" sz="1300" b="1" dirty="0">
+                <a:solidFill>
+                  <a:schemeClr val="tx2"/>
+                </a:solidFill>
+              </a:rPr>
+              <a:t>Challenge: </a:t>
+            </a:r>
+            <a:pPr algn="l" indent="0" marL="0">
+              <a:buNone/>
+            </a:pPr>
+            <a:r>
               <a:rPr lang="en-US" sz="1300" dirty="0">
                 <a:solidFill>
-                  <a:srgbClr val="C9D8EE"/>
+                  <a:srgbClr val="666666"/>
+                </a:solidFill>
+              </a:rPr>
+              <a:t>The Internal Brain: a context-aware enterprise knowledge system with RBAC, security logging and audit trail</a:t>
+            </a:r>
+            <a:endParaRPr lang="en-US" sz="1300" dirty="0"/>
+          </a:p>
+        </p:txBody>
+      </p:sp>
+      <p:sp>
+        <p:nvSpPr>
+          <p:cNvPr id="7" name="text-5"/>
+          <p:cNvSpPr txBox="1"/>
+          <p:nvPr/>
+        </p:nvSpPr>
+        <p:spPr>
+          <a:xfrm>
+            <a:off x="640080" y="6035040"/>
+            <a:ext cx="10515600" cy="320040"/>
+          </a:xfrm>
+          <a:prstGeom prst="rect">
+            <a:avLst/>
+          </a:prstGeom>
+          <a:noFill/>
+          <a:ln/>
+        </p:spPr>
+        <p:txBody>
+          <a:bodyPr wrap="square" lIns="0" tIns="0" rIns="0" bIns="0" rtlCol="0" anchor="t"/>
+          <a:lstStyle/>
+          <a:p>
+            <a:pPr algn="l" indent="0" marL="0">
+              <a:buNone/>
+            </a:pPr>
+            <a:r>
+              <a:rPr lang="en-US" sz="1200" dirty="0">
+                <a:solidFill>
+                  <a:schemeClr val="accent6"/>
                 </a:solidFill>
               </a:rPr>
               <a:t>Team: Chai · Raphael · Pavan     |     Tencent Cloud AI CAN DO IT Hackathon Singapore 2026</a:t>
             </a:r>
-            <a:endParaRPr lang="en-US" sz="1300" dirty="0"/>
-          </a:p>
-        </p:txBody>
-      </p:sp>
-      <p:sp>
-        <p:nvSpPr>
-          <p:cNvPr id="7" name="icon-bg-5"/>
+            <a:endParaRPr lang="en-US" sz="1200" dirty="0"/>
+          </a:p>
+        </p:txBody>
+      </p:sp>
+      <p:sp>
+        <p:nvSpPr>
+          <p:cNvPr id="8" name="icon-bg-6"/>
           <p:cNvSpPr/>
           <p:nvPr/>
         </p:nvSpPr>
@@ -2894,14 +2930,14 @@
             <a:avLst/>
           </a:prstGeom>
           <a:solidFill>
-            <a:schemeClr val="bg1"/>
+            <a:schemeClr val="bg2"/>
           </a:solidFill>
           <a:ln/>
         </p:spPr>
       </p:sp>
       <p:pic>
         <p:nvPicPr>
-          <p:cNvPr id="8" name="icon-6" descr="preencoded.png">    </p:cNvPr>
+          <p:cNvPr id="9" name="icon-7" descr="preencoded.png">    </p:cNvPr>
           <p:cNvPicPr>
             <a:picLocks noChangeAspect="1"/>
           </p:cNvPicPr>
@@ -2915,8 +2951,8 @@
         </p:blipFill>
         <p:spPr>
           <a:xfrm>
-            <a:off x="8513064" y="1060704"/>
-            <a:ext cx="438912" cy="438912"/>
+            <a:off x="8527694" y="1075334"/>
+            <a:ext cx="409651" cy="409651"/>
           </a:xfrm>
           <a:prstGeom prst="rect">
             <a:avLst/>
@@ -2925,14 +2961,14 @@
       </p:pic>
       <p:sp>
         <p:nvSpPr>
-          <p:cNvPr id="9" name="text-7"/>
+          <p:cNvPr id="10" name="text-8"/>
           <p:cNvSpPr txBox="1"/>
           <p:nvPr/>
         </p:nvSpPr>
         <p:spPr>
           <a:xfrm>
-            <a:off x="8275320" y="1682496"/>
-            <a:ext cx="914400" cy="256032"/>
+            <a:off x="8183880" y="1682496"/>
+            <a:ext cx="1097280" cy="256032"/>
           </a:xfrm>
           <a:prstGeom prst="rect">
             <a:avLst/>
@@ -2950,7 +2986,7 @@
             <a:r>
               <a:rPr lang="en-US" sz="1100" dirty="0">
                 <a:solidFill>
-                  <a:schemeClr val="bg2"/>
+                  <a:schemeClr val="accent6"/>
                 </a:solidFill>
               </a:rPr>
               <a:t>Confluence</a:t>
@@ -2961,7 +2997,7 @@
       </p:sp>
       <p:sp>
         <p:nvSpPr>
-          <p:cNvPr id="10" name="arrow-8"/>
+          <p:cNvPr id="11" name="arrow-9"/>
           <p:cNvSpPr/>
           <p:nvPr/>
         </p:nvSpPr>
@@ -2976,7 +3012,7 @@
           <a:noFill/>
           <a:ln w="15875">
             <a:solidFill>
-              <a:srgbClr val="C9D8EE"/>
+              <a:srgbClr val="D7D7D7"/>
             </a:solidFill>
             <a:prstDash val="solid"/>
             <a:tailEnd type="triangle"/>
@@ -2985,7 +3021,7 @@
       </p:sp>
       <p:sp>
         <p:nvSpPr>
-          <p:cNvPr id="11" name="icon-bg-9"/>
+          <p:cNvPr id="12" name="icon-bg-10"/>
           <p:cNvSpPr/>
           <p:nvPr/>
         </p:nvSpPr>
@@ -2998,14 +3034,14 @@
             <a:avLst/>
           </a:prstGeom>
           <a:solidFill>
-            <a:schemeClr val="bg1"/>
+            <a:schemeClr val="bg2"/>
           </a:solidFill>
           <a:ln/>
         </p:spPr>
       </p:sp>
       <p:pic>
         <p:nvPicPr>
-          <p:cNvPr id="12" name="icon-10" descr="preencoded.png">    </p:cNvPr>
+          <p:cNvPr id="13" name="icon-11" descr="preencoded.png">    </p:cNvPr>
           <p:cNvPicPr>
             <a:picLocks noChangeAspect="1"/>
           </p:cNvPicPr>
@@ -3019,8 +3055,8 @@
         </p:blipFill>
         <p:spPr>
           <a:xfrm>
-            <a:off x="8513064" y="2139696"/>
-            <a:ext cx="438912" cy="438912"/>
+            <a:off x="8527694" y="2154326"/>
+            <a:ext cx="409651" cy="409651"/>
           </a:xfrm>
           <a:prstGeom prst="rect">
             <a:avLst/>
@@ -3029,14 +3065,14 @@
       </p:pic>
       <p:sp>
         <p:nvSpPr>
-          <p:cNvPr id="13" name="text-11"/>
+          <p:cNvPr id="14" name="text-12"/>
           <p:cNvSpPr txBox="1"/>
           <p:nvPr/>
         </p:nvSpPr>
         <p:spPr>
           <a:xfrm>
-            <a:off x="8275320" y="2761488"/>
-            <a:ext cx="914400" cy="256032"/>
+            <a:off x="8183880" y="2761488"/>
+            <a:ext cx="1097280" cy="256032"/>
           </a:xfrm>
           <a:prstGeom prst="rect">
             <a:avLst/>
@@ -3054,7 +3090,7 @@
             <a:r>
               <a:rPr lang="en-US" sz="1100" dirty="0">
                 <a:solidFill>
-                  <a:schemeClr val="bg2"/>
+                  <a:schemeClr val="accent6"/>
                 </a:solidFill>
               </a:rPr>
               <a:t>Jira</a:t>
@@ -3065,7 +3101,7 @@
       </p:sp>
       <p:sp>
         <p:nvSpPr>
-          <p:cNvPr id="14" name="arrow-12"/>
+          <p:cNvPr id="15" name="arrow-13"/>
           <p:cNvSpPr/>
           <p:nvPr/>
         </p:nvSpPr>
@@ -3080,7 +3116,7 @@
           <a:noFill/>
           <a:ln w="15875">
             <a:solidFill>
-              <a:srgbClr val="C9D8EE"/>
+              <a:srgbClr val="D7D7D7"/>
             </a:solidFill>
             <a:prstDash val="solid"/>
             <a:tailEnd type="triangle"/>
@@ -3089,7 +3125,7 @@
       </p:sp>
       <p:sp>
         <p:nvSpPr>
-          <p:cNvPr id="15" name="icon-bg-13"/>
+          <p:cNvPr id="16" name="icon-bg-14"/>
           <p:cNvSpPr/>
           <p:nvPr/>
         </p:nvSpPr>
@@ -3102,14 +3138,14 @@
             <a:avLst/>
           </a:prstGeom>
           <a:solidFill>
-            <a:schemeClr val="bg1"/>
+            <a:schemeClr val="bg2"/>
           </a:solidFill>
           <a:ln/>
         </p:spPr>
       </p:sp>
       <p:pic>
         <p:nvPicPr>
-          <p:cNvPr id="16" name="icon-14" descr="preencoded.png">    </p:cNvPr>
+          <p:cNvPr id="17" name="icon-15" descr="preencoded.png">    </p:cNvPr>
           <p:cNvPicPr>
             <a:picLocks noChangeAspect="1"/>
           </p:cNvPicPr>
@@ -3123,8 +3159,8 @@
         </p:blipFill>
         <p:spPr>
           <a:xfrm>
-            <a:off x="8513064" y="3218688"/>
-            <a:ext cx="438912" cy="438912"/>
+            <a:off x="8527694" y="3233318"/>
+            <a:ext cx="409651" cy="409651"/>
           </a:xfrm>
           <a:prstGeom prst="rect">
             <a:avLst/>
@@ -3133,14 +3169,14 @@
       </p:pic>
       <p:sp>
         <p:nvSpPr>
-          <p:cNvPr id="17" name="text-15"/>
+          <p:cNvPr id="18" name="text-16"/>
           <p:cNvSpPr txBox="1"/>
           <p:nvPr/>
         </p:nvSpPr>
         <p:spPr>
           <a:xfrm>
-            <a:off x="8275320" y="3840480"/>
-            <a:ext cx="914400" cy="256032"/>
+            <a:off x="8183880" y="3840480"/>
+            <a:ext cx="1097280" cy="256032"/>
           </a:xfrm>
           <a:prstGeom prst="rect">
             <a:avLst/>
@@ -3158,7 +3194,7 @@
             <a:r>
               <a:rPr lang="en-US" sz="1100" dirty="0">
                 <a:solidFill>
-                  <a:schemeClr val="bg2"/>
+                  <a:schemeClr val="accent6"/>
                 </a:solidFill>
               </a:rPr>
               <a:t>Slack</a:t>
@@ -3169,7 +3205,7 @@
       </p:sp>
       <p:sp>
         <p:nvSpPr>
-          <p:cNvPr id="18" name="arrow-16"/>
+          <p:cNvPr id="19" name="arrow-17"/>
           <p:cNvSpPr/>
           <p:nvPr/>
         </p:nvSpPr>
@@ -3184,7 +3220,7 @@
           <a:noFill/>
           <a:ln w="15875">
             <a:solidFill>
-              <a:srgbClr val="C9D8EE"/>
+              <a:srgbClr val="D7D7D7"/>
             </a:solidFill>
             <a:prstDash val="solid"/>
             <a:tailEnd type="triangle"/>
@@ -3193,7 +3229,7 @@
       </p:sp>
       <p:sp>
         <p:nvSpPr>
-          <p:cNvPr id="19" name="icon-bg-17"/>
+          <p:cNvPr id="20" name="icon-bg-18"/>
           <p:cNvSpPr/>
           <p:nvPr/>
         </p:nvSpPr>
@@ -3206,14 +3242,14 @@
             <a:avLst/>
           </a:prstGeom>
           <a:solidFill>
-            <a:schemeClr val="bg1"/>
+            <a:schemeClr val="bg2"/>
           </a:solidFill>
           <a:ln/>
         </p:spPr>
       </p:sp>
       <p:pic>
         <p:nvPicPr>
-          <p:cNvPr id="20" name="icon-18" descr="preencoded.png">    </p:cNvPr>
+          <p:cNvPr id="21" name="icon-19" descr="preencoded.png">    </p:cNvPr>
           <p:cNvPicPr>
             <a:picLocks noChangeAspect="1"/>
           </p:cNvPicPr>
@@ -3227,8 +3263,8 @@
         </p:blipFill>
         <p:spPr>
           <a:xfrm>
-            <a:off x="8513064" y="4297680"/>
-            <a:ext cx="438912" cy="438912"/>
+            <a:off x="8527694" y="4312310"/>
+            <a:ext cx="409651" cy="409651"/>
           </a:xfrm>
           <a:prstGeom prst="rect">
             <a:avLst/>
@@ -3237,14 +3273,14 @@
       </p:pic>
       <p:sp>
         <p:nvSpPr>
-          <p:cNvPr id="21" name="text-19"/>
+          <p:cNvPr id="22" name="text-20"/>
           <p:cNvSpPr txBox="1"/>
           <p:nvPr/>
         </p:nvSpPr>
         <p:spPr>
           <a:xfrm>
-            <a:off x="8275320" y="4919472"/>
-            <a:ext cx="914400" cy="256032"/>
+            <a:off x="8183880" y="4919472"/>
+            <a:ext cx="1097280" cy="256032"/>
           </a:xfrm>
           <a:prstGeom prst="rect">
             <a:avLst/>
@@ -3262,7 +3298,7 @@
             <a:r>
               <a:rPr lang="en-US" sz="1100" dirty="0">
                 <a:solidFill>
-                  <a:schemeClr val="bg2"/>
+                  <a:schemeClr val="accent6"/>
                 </a:solidFill>
               </a:rPr>
               <a:t>Google Drive</a:t>
@@ -3273,7 +3309,7 @@
       </p:sp>
       <p:sp>
         <p:nvSpPr>
-          <p:cNvPr id="22" name="arrow-20"/>
+          <p:cNvPr id="23" name="arrow-21"/>
           <p:cNvSpPr/>
           <p:nvPr/>
         </p:nvSpPr>
@@ -3288,7 +3324,7 @@
           <a:noFill/>
           <a:ln w="15875">
             <a:solidFill>
-              <a:srgbClr val="C9D8EE"/>
+              <a:srgbClr val="D7D7D7"/>
             </a:solidFill>
             <a:prstDash val="solid"/>
             <a:tailEnd type="triangle"/>
@@ -3297,7 +3333,7 @@
       </p:sp>
       <p:sp>
         <p:nvSpPr>
-          <p:cNvPr id="23" name="icon-bg-21"/>
+          <p:cNvPr id="24" name="icon-bg-22"/>
           <p:cNvSpPr/>
           <p:nvPr/>
         </p:nvSpPr>
@@ -3310,14 +3346,14 @@
             <a:avLst/>
           </a:prstGeom>
           <a:solidFill>
-            <a:schemeClr val="accent1"/>
+            <a:srgbClr val="549F58"/>
           </a:solidFill>
           <a:ln/>
         </p:spPr>
       </p:sp>
       <p:pic>
         <p:nvPicPr>
-          <p:cNvPr id="24" name="icon-22" descr="preencoded.png">    </p:cNvPr>
+          <p:cNvPr id="25" name="icon-23" descr="preencoded.png">    </p:cNvPr>
           <p:cNvPicPr>
             <a:picLocks noChangeAspect="1"/>
           </p:cNvPicPr>
@@ -3341,7 +3377,7 @@
       </p:pic>
       <p:sp>
         <p:nvSpPr>
-          <p:cNvPr id="25" name="text-23"/>
+          <p:cNvPr id="26" name="text-24"/>
           <p:cNvSpPr txBox="1"/>
           <p:nvPr/>
         </p:nvSpPr>
@@ -3366,7 +3402,7 @@
             <a:r>
               <a:rPr lang="en-US" sz="1200" b="1" dirty="0">
                 <a:solidFill>
-                  <a:schemeClr val="bg1"/>
+                  <a:schemeClr val="tx2"/>
                 </a:solidFill>
               </a:rPr>
               <a:t>Governed answer</a:t>
@@ -3377,7 +3413,7 @@
       </p:sp>
       <p:sp>
         <p:nvSpPr>
-          <p:cNvPr id="26" name="text-24"/>
+          <p:cNvPr id="27" name="text-25"/>
           <p:cNvSpPr txBox="1"/>
           <p:nvPr/>
         </p:nvSpPr>
@@ -3402,7 +3438,7 @@
             <a:r>
               <a:rPr lang="en-US" sz="1000" dirty="0">
                 <a:solidFill>
-                  <a:srgbClr val="C9D8EE"/>
+                  <a:schemeClr val="accent6"/>
                 </a:solidFill>
               </a:rPr>
               <a:t>permitted · fresh · grounded · audited</a:t>
@@ -3463,20 +3499,31 @@
               <a:buNone/>
             </a:pPr>
             <a:r>
-              <a:rPr lang="en-US" sz="2800" b="1" dirty="0">
+              <a:rPr lang="en-US" sz="2600" b="1" dirty="0">
                 <a:solidFill>
                   <a:schemeClr val="tx2"/>
                 </a:solidFill>
               </a:rPr>
-              <a:t>Same foundation as Glean and Copilot, plus what they don't document</a:t>
-            </a:r>
-            <a:endParaRPr lang="en-US" sz="2800" dirty="0"/>
+              <a:t>Glean and Copilot's foundation,</a:t>
+            </a:r>
+            <a:pPr algn="l" indent="0" marL="0">
+              <a:buNone/>
+            </a:pPr>
+            <a:r>
+              <a:rPr lang="en-US" sz="2600" b="1" dirty="0">
+                <a:solidFill>
+                  <a:srgbClr val="8C8C8C"/>
+                </a:solidFill>
+              </a:rPr>
+              <a:t> plus what they don't document</a:t>
+            </a:r>
+            <a:endParaRPr lang="en-US" sz="2600" dirty="0"/>
           </a:p>
         </p:txBody>
       </p:sp>
       <p:graphicFrame>
         <p:nvGraphicFramePr>
-          <p:cNvPr id="11" name="comparison-table-268"/>
+          <p:cNvPr id="11" name="comparison-table-279"/>
           <p:cNvGraphicFramePr>
             <a:graphicFrameLocks noGrp="1"/>
           </p:cNvGraphicFramePr>
@@ -3519,7 +3566,7 @@
                   <a:tcPr marL="73152" marR="73152" marT="45720" marB="45720" anchor="ctr">
                     <a:lnL w="9525" cap="flat" cmpd="sng" algn="ctr">
                       <a:solidFill>
-                        <a:srgbClr val="CBD5E1"/>
+                        <a:srgbClr val="D7D7D7"/>
                       </a:solidFill>
                       <a:prstDash val="solid"/>
                       <a:round/>
@@ -3528,7 +3575,7 @@
                     </a:lnL>
                     <a:lnR w="9525" cap="flat" cmpd="sng" algn="ctr">
                       <a:solidFill>
-                        <a:srgbClr val="CBD5E1"/>
+                        <a:srgbClr val="D7D7D7"/>
                       </a:solidFill>
                       <a:prstDash val="solid"/>
                       <a:round/>
@@ -3537,7 +3584,7 @@
                     </a:lnR>
                     <a:lnT w="9525" cap="flat" cmpd="sng" algn="ctr">
                       <a:solidFill>
-                        <a:srgbClr val="CBD5E1"/>
+                        <a:srgbClr val="D7D7D7"/>
                       </a:solidFill>
                       <a:prstDash val="solid"/>
                       <a:round/>
@@ -3546,7 +3593,7 @@
                     </a:lnT>
                     <a:lnB w="9525" cap="flat" cmpd="sng" algn="ctr">
                       <a:solidFill>
-                        <a:srgbClr val="CBD5E1"/>
+                        <a:srgbClr val="D7D7D7"/>
                       </a:solidFill>
                       <a:prstDash val="solid"/>
                       <a:round/>
@@ -3580,7 +3627,7 @@
                   <a:tcPr marL="73152" marR="73152" marT="45720" marB="45720" anchor="ctr">
                     <a:lnL w="9525" cap="flat" cmpd="sng" algn="ctr">
                       <a:solidFill>
-                        <a:srgbClr val="CBD5E1"/>
+                        <a:srgbClr val="D7D7D7"/>
                       </a:solidFill>
                       <a:prstDash val="solid"/>
                       <a:round/>
@@ -3589,7 +3636,7 @@
                     </a:lnL>
                     <a:lnR w="9525" cap="flat" cmpd="sng" algn="ctr">
                       <a:solidFill>
-                        <a:srgbClr val="CBD5E1"/>
+                        <a:srgbClr val="D7D7D7"/>
                       </a:solidFill>
                       <a:prstDash val="solid"/>
                       <a:round/>
@@ -3598,7 +3645,7 @@
                     </a:lnR>
                     <a:lnT w="9525" cap="flat" cmpd="sng" algn="ctr">
                       <a:solidFill>
-                        <a:srgbClr val="CBD5E1"/>
+                        <a:srgbClr val="D7D7D7"/>
                       </a:solidFill>
                       <a:prstDash val="solid"/>
                       <a:round/>
@@ -3607,7 +3654,7 @@
                     </a:lnT>
                     <a:lnB w="9525" cap="flat" cmpd="sng" algn="ctr">
                       <a:solidFill>
-                        <a:srgbClr val="CBD5E1"/>
+                        <a:srgbClr val="D7D7D7"/>
                       </a:solidFill>
                       <a:prstDash val="solid"/>
                       <a:round/>
@@ -3641,7 +3688,7 @@
                   <a:tcPr marL="73152" marR="73152" marT="45720" marB="45720" anchor="ctr">
                     <a:lnL w="9525" cap="flat" cmpd="sng" algn="ctr">
                       <a:solidFill>
-                        <a:srgbClr val="CBD5E1"/>
+                        <a:srgbClr val="D7D7D7"/>
                       </a:solidFill>
                       <a:prstDash val="solid"/>
                       <a:round/>
@@ -3650,7 +3697,7 @@
                     </a:lnL>
                     <a:lnR w="9525" cap="flat" cmpd="sng" algn="ctr">
                       <a:solidFill>
-                        <a:srgbClr val="CBD5E1"/>
+                        <a:srgbClr val="D7D7D7"/>
                       </a:solidFill>
                       <a:prstDash val="solid"/>
                       <a:round/>
@@ -3659,7 +3706,7 @@
                     </a:lnR>
                     <a:lnT w="9525" cap="flat" cmpd="sng" algn="ctr">
                       <a:solidFill>
-                        <a:srgbClr val="CBD5E1"/>
+                        <a:srgbClr val="D7D7D7"/>
                       </a:solidFill>
                       <a:prstDash val="solid"/>
                       <a:round/>
@@ -3668,7 +3715,7 @@
                     </a:lnT>
                     <a:lnB w="9525" cap="flat" cmpd="sng" algn="ctr">
                       <a:solidFill>
-                        <a:srgbClr val="CBD5E1"/>
+                        <a:srgbClr val="D7D7D7"/>
                       </a:solidFill>
                       <a:prstDash val="solid"/>
                       <a:round/>
@@ -3702,7 +3749,7 @@
                   <a:tcPr marL="73152" marR="73152" marT="45720" marB="45720" anchor="ctr">
                     <a:lnL w="9525" cap="flat" cmpd="sng" algn="ctr">
                       <a:solidFill>
-                        <a:srgbClr val="CBD5E1"/>
+                        <a:srgbClr val="D7D7D7"/>
                       </a:solidFill>
                       <a:prstDash val="solid"/>
                       <a:round/>
@@ -3711,7 +3758,7 @@
                     </a:lnL>
                     <a:lnR w="9525" cap="flat" cmpd="sng" algn="ctr">
                       <a:solidFill>
-                        <a:srgbClr val="CBD5E1"/>
+                        <a:srgbClr val="D7D7D7"/>
                       </a:solidFill>
                       <a:prstDash val="solid"/>
                       <a:round/>
@@ -3720,7 +3767,7 @@
                     </a:lnR>
                     <a:lnT w="9525" cap="flat" cmpd="sng" algn="ctr">
                       <a:solidFill>
-                        <a:srgbClr val="CBD5E1"/>
+                        <a:srgbClr val="D7D7D7"/>
                       </a:solidFill>
                       <a:prstDash val="solid"/>
                       <a:round/>
@@ -3729,7 +3776,7 @@
                     </a:lnT>
                     <a:lnB w="9525" cap="flat" cmpd="sng" algn="ctr">
                       <a:solidFill>
-                        <a:srgbClr val="CBD5E1"/>
+                        <a:srgbClr val="D7D7D7"/>
                       </a:solidFill>
                       <a:prstDash val="solid"/>
                       <a:round/>
@@ -3763,7 +3810,7 @@
                   <a:tcPr marL="73152" marR="73152" marT="45720" marB="45720" anchor="ctr">
                     <a:lnL w="9525" cap="flat" cmpd="sng" algn="ctr">
                       <a:solidFill>
-                        <a:srgbClr val="CBD5E1"/>
+                        <a:srgbClr val="D7D7D7"/>
                       </a:solidFill>
                       <a:prstDash val="solid"/>
                       <a:round/>
@@ -3772,7 +3819,7 @@
                     </a:lnL>
                     <a:lnR w="9525" cap="flat" cmpd="sng" algn="ctr">
                       <a:solidFill>
-                        <a:srgbClr val="CBD5E1"/>
+                        <a:srgbClr val="D7D7D7"/>
                       </a:solidFill>
                       <a:prstDash val="solid"/>
                       <a:round/>
@@ -3781,7 +3828,7 @@
                     </a:lnR>
                     <a:lnT w="9525" cap="flat" cmpd="sng" algn="ctr">
                       <a:solidFill>
-                        <a:srgbClr val="CBD5E1"/>
+                        <a:srgbClr val="D7D7D7"/>
                       </a:solidFill>
                       <a:prstDash val="solid"/>
                       <a:round/>
@@ -3790,7 +3837,7 @@
                     </a:lnT>
                     <a:lnB w="9525" cap="flat" cmpd="sng" algn="ctr">
                       <a:solidFill>
-                        <a:srgbClr val="CBD5E1"/>
+                        <a:srgbClr val="D7D7D7"/>
                       </a:solidFill>
                       <a:prstDash val="solid"/>
                       <a:round/>
@@ -3824,7 +3871,7 @@
                   <a:tcPr marL="73152" marR="73152" marT="45720" marB="45720" anchor="ctr">
                     <a:lnL w="9525" cap="flat" cmpd="sng" algn="ctr">
                       <a:solidFill>
-                        <a:srgbClr val="CBD5E1"/>
+                        <a:srgbClr val="D7D7D7"/>
                       </a:solidFill>
                       <a:prstDash val="solid"/>
                       <a:round/>
@@ -3833,7 +3880,7 @@
                     </a:lnL>
                     <a:lnR w="9525" cap="flat" cmpd="sng" algn="ctr">
                       <a:solidFill>
-                        <a:srgbClr val="CBD5E1"/>
+                        <a:srgbClr val="D7D7D7"/>
                       </a:solidFill>
                       <a:prstDash val="solid"/>
                       <a:round/>
@@ -3842,7 +3889,7 @@
                     </a:lnR>
                     <a:lnT w="9525" cap="flat" cmpd="sng" algn="ctr">
                       <a:solidFill>
-                        <a:srgbClr val="CBD5E1"/>
+                        <a:srgbClr val="D7D7D7"/>
                       </a:solidFill>
                       <a:prstDash val="solid"/>
                       <a:round/>
@@ -3851,7 +3898,7 @@
                     </a:lnT>
                     <a:lnB w="9525" cap="flat" cmpd="sng" algn="ctr">
                       <a:solidFill>
-                        <a:srgbClr val="CBD5E1"/>
+                        <a:srgbClr val="D7D7D7"/>
                       </a:solidFill>
                       <a:prstDash val="solid"/>
                       <a:round/>
@@ -3887,7 +3934,7 @@
                   <a:tcPr marL="73152" marR="73152" marT="45720" marB="45720" anchor="ctr">
                     <a:lnL w="9525" cap="flat" cmpd="sng" algn="ctr">
                       <a:solidFill>
-                        <a:srgbClr val="CBD5E1"/>
+                        <a:srgbClr val="D7D7D7"/>
                       </a:solidFill>
                       <a:prstDash val="solid"/>
                       <a:round/>
@@ -3896,7 +3943,7 @@
                     </a:lnL>
                     <a:lnR w="9525" cap="flat" cmpd="sng" algn="ctr">
                       <a:solidFill>
-                        <a:srgbClr val="CBD5E1"/>
+                        <a:srgbClr val="D7D7D7"/>
                       </a:solidFill>
                       <a:prstDash val="solid"/>
                       <a:round/>
@@ -3905,7 +3952,7 @@
                     </a:lnR>
                     <a:lnT w="9525" cap="flat" cmpd="sng" algn="ctr">
                       <a:solidFill>
-                        <a:srgbClr val="CBD5E1"/>
+                        <a:srgbClr val="D7D7D7"/>
                       </a:solidFill>
                       <a:prstDash val="solid"/>
                       <a:round/>
@@ -3914,7 +3961,7 @@
                     </a:lnT>
                     <a:lnB w="9525" cap="flat" cmpd="sng" algn="ctr">
                       <a:solidFill>
-                        <a:srgbClr val="CBD5E1"/>
+                        <a:srgbClr val="D7D7D7"/>
                       </a:solidFill>
                       <a:prstDash val="solid"/>
                       <a:round/>
@@ -3948,7 +3995,7 @@
                   <a:tcPr marL="73152" marR="73152" marT="45720" marB="45720" anchor="ctr">
                     <a:lnL w="9525" cap="flat" cmpd="sng" algn="ctr">
                       <a:solidFill>
-                        <a:srgbClr val="CBD5E1"/>
+                        <a:srgbClr val="D7D7D7"/>
                       </a:solidFill>
                       <a:prstDash val="solid"/>
                       <a:round/>
@@ -3957,7 +4004,7 @@
                     </a:lnL>
                     <a:lnR w="9525" cap="flat" cmpd="sng" algn="ctr">
                       <a:solidFill>
-                        <a:srgbClr val="CBD5E1"/>
+                        <a:srgbClr val="D7D7D7"/>
                       </a:solidFill>
                       <a:prstDash val="solid"/>
                       <a:round/>
@@ -3966,7 +4013,7 @@
                     </a:lnR>
                     <a:lnT w="9525" cap="flat" cmpd="sng" algn="ctr">
                       <a:solidFill>
-                        <a:srgbClr val="CBD5E1"/>
+                        <a:srgbClr val="D7D7D7"/>
                       </a:solidFill>
                       <a:prstDash val="solid"/>
                       <a:round/>
@@ -3975,7 +4022,7 @@
                     </a:lnT>
                     <a:lnB w="9525" cap="flat" cmpd="sng" algn="ctr">
                       <a:solidFill>
-                        <a:srgbClr val="CBD5E1"/>
+                        <a:srgbClr val="D7D7D7"/>
                       </a:solidFill>
                       <a:prstDash val="solid"/>
                       <a:round/>
@@ -4009,7 +4056,7 @@
                   <a:tcPr marL="73152" marR="73152" marT="45720" marB="45720" anchor="ctr">
                     <a:lnL w="9525" cap="flat" cmpd="sng" algn="ctr">
                       <a:solidFill>
-                        <a:srgbClr val="CBD5E1"/>
+                        <a:srgbClr val="D7D7D7"/>
                       </a:solidFill>
                       <a:prstDash val="solid"/>
                       <a:round/>
@@ -4018,7 +4065,7 @@
                     </a:lnL>
                     <a:lnR w="9525" cap="flat" cmpd="sng" algn="ctr">
                       <a:solidFill>
-                        <a:srgbClr val="CBD5E1"/>
+                        <a:srgbClr val="D7D7D7"/>
                       </a:solidFill>
                       <a:prstDash val="solid"/>
                       <a:round/>
@@ -4027,7 +4074,7 @@
                     </a:lnR>
                     <a:lnT w="9525" cap="flat" cmpd="sng" algn="ctr">
                       <a:solidFill>
-                        <a:srgbClr val="CBD5E1"/>
+                        <a:srgbClr val="D7D7D7"/>
                       </a:solidFill>
                       <a:prstDash val="solid"/>
                       <a:round/>
@@ -4036,7 +4083,7 @@
                     </a:lnT>
                     <a:lnB w="9525" cap="flat" cmpd="sng" algn="ctr">
                       <a:solidFill>
-                        <a:srgbClr val="CBD5E1"/>
+                        <a:srgbClr val="D7D7D7"/>
                       </a:solidFill>
                       <a:prstDash val="solid"/>
                       <a:round/>
@@ -4070,7 +4117,7 @@
                   <a:tcPr marL="73152" marR="73152" marT="45720" marB="45720" anchor="ctr">
                     <a:lnL w="9525" cap="flat" cmpd="sng" algn="ctr">
                       <a:solidFill>
-                        <a:srgbClr val="CBD5E1"/>
+                        <a:srgbClr val="D7D7D7"/>
                       </a:solidFill>
                       <a:prstDash val="solid"/>
                       <a:round/>
@@ -4079,7 +4126,7 @@
                     </a:lnL>
                     <a:lnR w="9525" cap="flat" cmpd="sng" algn="ctr">
                       <a:solidFill>
-                        <a:srgbClr val="CBD5E1"/>
+                        <a:srgbClr val="D7D7D7"/>
                       </a:solidFill>
                       <a:prstDash val="solid"/>
                       <a:round/>
@@ -4088,7 +4135,7 @@
                     </a:lnR>
                     <a:lnT w="9525" cap="flat" cmpd="sng" algn="ctr">
                       <a:solidFill>
-                        <a:srgbClr val="CBD5E1"/>
+                        <a:srgbClr val="D7D7D7"/>
                       </a:solidFill>
                       <a:prstDash val="solid"/>
                       <a:round/>
@@ -4097,7 +4144,7 @@
                     </a:lnT>
                     <a:lnB w="9525" cap="flat" cmpd="sng" algn="ctr">
                       <a:solidFill>
-                        <a:srgbClr val="CBD5E1"/>
+                        <a:srgbClr val="D7D7D7"/>
                       </a:solidFill>
                       <a:prstDash val="solid"/>
                       <a:round/>
@@ -4131,7 +4178,7 @@
                   <a:tcPr marL="73152" marR="73152" marT="45720" marB="45720" anchor="ctr">
                     <a:lnL w="9525" cap="flat" cmpd="sng" algn="ctr">
                       <a:solidFill>
-                        <a:srgbClr val="CBD5E1"/>
+                        <a:srgbClr val="D7D7D7"/>
                       </a:solidFill>
                       <a:prstDash val="solid"/>
                       <a:round/>
@@ -4140,7 +4187,7 @@
                     </a:lnL>
                     <a:lnR w="9525" cap="flat" cmpd="sng" algn="ctr">
                       <a:solidFill>
-                        <a:srgbClr val="CBD5E1"/>
+                        <a:srgbClr val="D7D7D7"/>
                       </a:solidFill>
                       <a:prstDash val="solid"/>
                       <a:round/>
@@ -4149,7 +4196,7 @@
                     </a:lnR>
                     <a:lnT w="9525" cap="flat" cmpd="sng" algn="ctr">
                       <a:solidFill>
-                        <a:srgbClr val="CBD5E1"/>
+                        <a:srgbClr val="D7D7D7"/>
                       </a:solidFill>
                       <a:prstDash val="solid"/>
                       <a:round/>
@@ -4158,7 +4205,7 @@
                     </a:lnT>
                     <a:lnB w="9525" cap="flat" cmpd="sng" algn="ctr">
                       <a:solidFill>
-                        <a:srgbClr val="CBD5E1"/>
+                        <a:srgbClr val="D7D7D7"/>
                       </a:solidFill>
                       <a:prstDash val="solid"/>
                       <a:round/>
@@ -4192,7 +4239,7 @@
                   <a:tcPr marL="73152" marR="73152" marT="45720" marB="45720" anchor="ctr">
                     <a:lnL w="9525" cap="flat" cmpd="sng" algn="ctr">
                       <a:solidFill>
-                        <a:srgbClr val="CBD5E1"/>
+                        <a:srgbClr val="D7D7D7"/>
                       </a:solidFill>
                       <a:prstDash val="solid"/>
                       <a:round/>
@@ -4201,7 +4248,7 @@
                     </a:lnL>
                     <a:lnR w="9525" cap="flat" cmpd="sng" algn="ctr">
                       <a:solidFill>
-                        <a:srgbClr val="CBD5E1"/>
+                        <a:srgbClr val="D7D7D7"/>
                       </a:solidFill>
                       <a:prstDash val="solid"/>
                       <a:round/>
@@ -4210,7 +4257,7 @@
                     </a:lnR>
                     <a:lnT w="9525" cap="flat" cmpd="sng" algn="ctr">
                       <a:solidFill>
-                        <a:srgbClr val="CBD5E1"/>
+                        <a:srgbClr val="D7D7D7"/>
                       </a:solidFill>
                       <a:prstDash val="solid"/>
                       <a:round/>
@@ -4219,7 +4266,7 @@
                     </a:lnT>
                     <a:lnB w="9525" cap="flat" cmpd="sng" algn="ctr">
                       <a:solidFill>
-                        <a:srgbClr val="CBD5E1"/>
+                        <a:srgbClr val="D7D7D7"/>
                       </a:solidFill>
                       <a:prstDash val="solid"/>
                       <a:round/>
@@ -4227,7 +4274,7 @@
                       <a:tailEnd type="none" w="med" len="med"/>
                     </a:lnB>
                     <a:solidFill>
-                      <a:srgbClr val="E3F5F2"/>
+                      <a:srgbClr val="EAF3EA"/>
                     </a:solidFill>
                   </a:tcPr>
                 </a:tc>
@@ -4255,7 +4302,7 @@
                   <a:tcPr marL="73152" marR="73152" marT="45720" marB="45720" anchor="ctr">
                     <a:lnL w="9525" cap="flat" cmpd="sng" algn="ctr">
                       <a:solidFill>
-                        <a:srgbClr val="CBD5E1"/>
+                        <a:srgbClr val="D7D7D7"/>
                       </a:solidFill>
                       <a:prstDash val="solid"/>
                       <a:round/>
@@ -4264,7 +4311,7 @@
                     </a:lnL>
                     <a:lnR w="9525" cap="flat" cmpd="sng" algn="ctr">
                       <a:solidFill>
-                        <a:srgbClr val="CBD5E1"/>
+                        <a:srgbClr val="D7D7D7"/>
                       </a:solidFill>
                       <a:prstDash val="solid"/>
                       <a:round/>
@@ -4273,7 +4320,7 @@
                     </a:lnR>
                     <a:lnT w="9525" cap="flat" cmpd="sng" algn="ctr">
                       <a:solidFill>
-                        <a:srgbClr val="CBD5E1"/>
+                        <a:srgbClr val="D7D7D7"/>
                       </a:solidFill>
                       <a:prstDash val="solid"/>
                       <a:round/>
@@ -4282,7 +4329,7 @@
                     </a:lnT>
                     <a:lnB w="9525" cap="flat" cmpd="sng" algn="ctr">
                       <a:solidFill>
-                        <a:srgbClr val="CBD5E1"/>
+                        <a:srgbClr val="D7D7D7"/>
                       </a:solidFill>
                       <a:prstDash val="solid"/>
                       <a:round/>
@@ -4316,7 +4363,7 @@
                   <a:tcPr marL="73152" marR="73152" marT="45720" marB="45720" anchor="ctr">
                     <a:lnL w="9525" cap="flat" cmpd="sng" algn="ctr">
                       <a:solidFill>
-                        <a:srgbClr val="CBD5E1"/>
+                        <a:srgbClr val="D7D7D7"/>
                       </a:solidFill>
                       <a:prstDash val="solid"/>
                       <a:round/>
@@ -4325,7 +4372,7 @@
                     </a:lnL>
                     <a:lnR w="9525" cap="flat" cmpd="sng" algn="ctr">
                       <a:solidFill>
-                        <a:srgbClr val="CBD5E1"/>
+                        <a:srgbClr val="D7D7D7"/>
                       </a:solidFill>
                       <a:prstDash val="solid"/>
                       <a:round/>
@@ -4334,7 +4381,7 @@
                     </a:lnR>
                     <a:lnT w="9525" cap="flat" cmpd="sng" algn="ctr">
                       <a:solidFill>
-                        <a:srgbClr val="CBD5E1"/>
+                        <a:srgbClr val="D7D7D7"/>
                       </a:solidFill>
                       <a:prstDash val="solid"/>
                       <a:round/>
@@ -4343,7 +4390,7 @@
                     </a:lnT>
                     <a:lnB w="9525" cap="flat" cmpd="sng" algn="ctr">
                       <a:solidFill>
-                        <a:srgbClr val="CBD5E1"/>
+                        <a:srgbClr val="D7D7D7"/>
                       </a:solidFill>
                       <a:prstDash val="solid"/>
                       <a:round/>
@@ -4377,7 +4424,7 @@
                   <a:tcPr marL="73152" marR="73152" marT="45720" marB="45720" anchor="ctr">
                     <a:lnL w="9525" cap="flat" cmpd="sng" algn="ctr">
                       <a:solidFill>
-                        <a:srgbClr val="CBD5E1"/>
+                        <a:srgbClr val="D7D7D7"/>
                       </a:solidFill>
                       <a:prstDash val="solid"/>
                       <a:round/>
@@ -4386,7 +4433,7 @@
                     </a:lnL>
                     <a:lnR w="9525" cap="flat" cmpd="sng" algn="ctr">
                       <a:solidFill>
-                        <a:srgbClr val="CBD5E1"/>
+                        <a:srgbClr val="D7D7D7"/>
                       </a:solidFill>
                       <a:prstDash val="solid"/>
                       <a:round/>
@@ -4395,7 +4442,7 @@
                     </a:lnR>
                     <a:lnT w="9525" cap="flat" cmpd="sng" algn="ctr">
                       <a:solidFill>
-                        <a:srgbClr val="CBD5E1"/>
+                        <a:srgbClr val="D7D7D7"/>
                       </a:solidFill>
                       <a:prstDash val="solid"/>
                       <a:round/>
@@ -4404,7 +4451,7 @@
                     </a:lnT>
                     <a:lnB w="9525" cap="flat" cmpd="sng" algn="ctr">
                       <a:solidFill>
-                        <a:srgbClr val="CBD5E1"/>
+                        <a:srgbClr val="D7D7D7"/>
                       </a:solidFill>
                       <a:prstDash val="solid"/>
                       <a:round/>
@@ -4438,7 +4485,7 @@
                   <a:tcPr marL="73152" marR="73152" marT="45720" marB="45720" anchor="ctr">
                     <a:lnL w="9525" cap="flat" cmpd="sng" algn="ctr">
                       <a:solidFill>
-                        <a:srgbClr val="CBD5E1"/>
+                        <a:srgbClr val="D7D7D7"/>
                       </a:solidFill>
                       <a:prstDash val="solid"/>
                       <a:round/>
@@ -4447,7 +4494,7 @@
                     </a:lnL>
                     <a:lnR w="9525" cap="flat" cmpd="sng" algn="ctr">
                       <a:solidFill>
-                        <a:srgbClr val="CBD5E1"/>
+                        <a:srgbClr val="D7D7D7"/>
                       </a:solidFill>
                       <a:prstDash val="solid"/>
                       <a:round/>
@@ -4456,7 +4503,7 @@
                     </a:lnR>
                     <a:lnT w="9525" cap="flat" cmpd="sng" algn="ctr">
                       <a:solidFill>
-                        <a:srgbClr val="CBD5E1"/>
+                        <a:srgbClr val="D7D7D7"/>
                       </a:solidFill>
                       <a:prstDash val="solid"/>
                       <a:round/>
@@ -4465,7 +4512,7 @@
                     </a:lnT>
                     <a:lnB w="9525" cap="flat" cmpd="sng" algn="ctr">
                       <a:solidFill>
-                        <a:srgbClr val="CBD5E1"/>
+                        <a:srgbClr val="D7D7D7"/>
                       </a:solidFill>
                       <a:prstDash val="solid"/>
                       <a:round/>
@@ -4499,7 +4546,7 @@
                   <a:tcPr marL="73152" marR="73152" marT="45720" marB="45720" anchor="ctr">
                     <a:lnL w="9525" cap="flat" cmpd="sng" algn="ctr">
                       <a:solidFill>
-                        <a:srgbClr val="CBD5E1"/>
+                        <a:srgbClr val="D7D7D7"/>
                       </a:solidFill>
                       <a:prstDash val="solid"/>
                       <a:round/>
@@ -4508,7 +4555,7 @@
                     </a:lnL>
                     <a:lnR w="9525" cap="flat" cmpd="sng" algn="ctr">
                       <a:solidFill>
-                        <a:srgbClr val="CBD5E1"/>
+                        <a:srgbClr val="D7D7D7"/>
                       </a:solidFill>
                       <a:prstDash val="solid"/>
                       <a:round/>
@@ -4517,7 +4564,7 @@
                     </a:lnR>
                     <a:lnT w="9525" cap="flat" cmpd="sng" algn="ctr">
                       <a:solidFill>
-                        <a:srgbClr val="CBD5E1"/>
+                        <a:srgbClr val="D7D7D7"/>
                       </a:solidFill>
                       <a:prstDash val="solid"/>
                       <a:round/>
@@ -4526,7 +4573,7 @@
                     </a:lnT>
                     <a:lnB w="9525" cap="flat" cmpd="sng" algn="ctr">
                       <a:solidFill>
-                        <a:srgbClr val="CBD5E1"/>
+                        <a:srgbClr val="D7D7D7"/>
                       </a:solidFill>
                       <a:prstDash val="solid"/>
                       <a:round/>
@@ -4560,7 +4607,7 @@
                   <a:tcPr marL="73152" marR="73152" marT="45720" marB="45720" anchor="ctr">
                     <a:lnL w="9525" cap="flat" cmpd="sng" algn="ctr">
                       <a:solidFill>
-                        <a:srgbClr val="CBD5E1"/>
+                        <a:srgbClr val="D7D7D7"/>
                       </a:solidFill>
                       <a:prstDash val="solid"/>
                       <a:round/>
@@ -4569,7 +4616,7 @@
                     </a:lnL>
                     <a:lnR w="9525" cap="flat" cmpd="sng" algn="ctr">
                       <a:solidFill>
-                        <a:srgbClr val="CBD5E1"/>
+                        <a:srgbClr val="D7D7D7"/>
                       </a:solidFill>
                       <a:prstDash val="solid"/>
                       <a:round/>
@@ -4578,7 +4625,7 @@
                     </a:lnR>
                     <a:lnT w="9525" cap="flat" cmpd="sng" algn="ctr">
                       <a:solidFill>
-                        <a:srgbClr val="CBD5E1"/>
+                        <a:srgbClr val="D7D7D7"/>
                       </a:solidFill>
                       <a:prstDash val="solid"/>
                       <a:round/>
@@ -4587,7 +4634,7 @@
                     </a:lnT>
                     <a:lnB w="9525" cap="flat" cmpd="sng" algn="ctr">
                       <a:solidFill>
-                        <a:srgbClr val="CBD5E1"/>
+                        <a:srgbClr val="D7D7D7"/>
                       </a:solidFill>
                       <a:prstDash val="solid"/>
                       <a:round/>
@@ -4595,7 +4642,7 @@
                       <a:tailEnd type="none" w="med" len="med"/>
                     </a:lnB>
                     <a:solidFill>
-                      <a:srgbClr val="E3F5F2"/>
+                      <a:srgbClr val="EAF3EA"/>
                     </a:solidFill>
                   </a:tcPr>
                 </a:tc>
@@ -4623,7 +4670,7 @@
                   <a:tcPr marL="73152" marR="73152" marT="45720" marB="45720" anchor="ctr">
                     <a:lnL w="9525" cap="flat" cmpd="sng" algn="ctr">
                       <a:solidFill>
-                        <a:srgbClr val="CBD5E1"/>
+                        <a:srgbClr val="D7D7D7"/>
                       </a:solidFill>
                       <a:prstDash val="solid"/>
                       <a:round/>
@@ -4632,7 +4679,7 @@
                     </a:lnL>
                     <a:lnR w="9525" cap="flat" cmpd="sng" algn="ctr">
                       <a:solidFill>
-                        <a:srgbClr val="CBD5E1"/>
+                        <a:srgbClr val="D7D7D7"/>
                       </a:solidFill>
                       <a:prstDash val="solid"/>
                       <a:round/>
@@ -4641,7 +4688,7 @@
                     </a:lnR>
                     <a:lnT w="9525" cap="flat" cmpd="sng" algn="ctr">
                       <a:solidFill>
-                        <a:srgbClr val="CBD5E1"/>
+                        <a:srgbClr val="D7D7D7"/>
                       </a:solidFill>
                       <a:prstDash val="solid"/>
                       <a:round/>
@@ -4650,7 +4697,7 @@
                     </a:lnT>
                     <a:lnB w="9525" cap="flat" cmpd="sng" algn="ctr">
                       <a:solidFill>
-                        <a:srgbClr val="CBD5E1"/>
+                        <a:srgbClr val="D7D7D7"/>
                       </a:solidFill>
                       <a:prstDash val="solid"/>
                       <a:round/>
@@ -4684,7 +4731,7 @@
                   <a:tcPr marL="73152" marR="73152" marT="45720" marB="45720" anchor="ctr">
                     <a:lnL w="9525" cap="flat" cmpd="sng" algn="ctr">
                       <a:solidFill>
-                        <a:srgbClr val="CBD5E1"/>
+                        <a:srgbClr val="D7D7D7"/>
                       </a:solidFill>
                       <a:prstDash val="solid"/>
                       <a:round/>
@@ -4693,7 +4740,7 @@
                     </a:lnL>
                     <a:lnR w="9525" cap="flat" cmpd="sng" algn="ctr">
                       <a:solidFill>
-                        <a:srgbClr val="CBD5E1"/>
+                        <a:srgbClr val="D7D7D7"/>
                       </a:solidFill>
                       <a:prstDash val="solid"/>
                       <a:round/>
@@ -4702,7 +4749,7 @@
                     </a:lnR>
                     <a:lnT w="9525" cap="flat" cmpd="sng" algn="ctr">
                       <a:solidFill>
-                        <a:srgbClr val="CBD5E1"/>
+                        <a:srgbClr val="D7D7D7"/>
                       </a:solidFill>
                       <a:prstDash val="solid"/>
                       <a:round/>
@@ -4711,7 +4758,7 @@
                     </a:lnT>
                     <a:lnB w="9525" cap="flat" cmpd="sng" algn="ctr">
                       <a:solidFill>
-                        <a:srgbClr val="CBD5E1"/>
+                        <a:srgbClr val="D7D7D7"/>
                       </a:solidFill>
                       <a:prstDash val="solid"/>
                       <a:round/>
@@ -4745,7 +4792,7 @@
                   <a:tcPr marL="73152" marR="73152" marT="45720" marB="45720" anchor="ctr">
                     <a:lnL w="9525" cap="flat" cmpd="sng" algn="ctr">
                       <a:solidFill>
-                        <a:srgbClr val="CBD5E1"/>
+                        <a:srgbClr val="D7D7D7"/>
                       </a:solidFill>
                       <a:prstDash val="solid"/>
                       <a:round/>
@@ -4754,7 +4801,7 @@
                     </a:lnL>
                     <a:lnR w="9525" cap="flat" cmpd="sng" algn="ctr">
                       <a:solidFill>
-                        <a:srgbClr val="CBD5E1"/>
+                        <a:srgbClr val="D7D7D7"/>
                       </a:solidFill>
                       <a:prstDash val="solid"/>
                       <a:round/>
@@ -4763,7 +4810,7 @@
                     </a:lnR>
                     <a:lnT w="9525" cap="flat" cmpd="sng" algn="ctr">
                       <a:solidFill>
-                        <a:srgbClr val="CBD5E1"/>
+                        <a:srgbClr val="D7D7D7"/>
                       </a:solidFill>
                       <a:prstDash val="solid"/>
                       <a:round/>
@@ -4772,7 +4819,7 @@
                     </a:lnT>
                     <a:lnB w="9525" cap="flat" cmpd="sng" algn="ctr">
                       <a:solidFill>
-                        <a:srgbClr val="CBD5E1"/>
+                        <a:srgbClr val="D7D7D7"/>
                       </a:solidFill>
                       <a:prstDash val="solid"/>
                       <a:round/>
@@ -4806,7 +4853,7 @@
                   <a:tcPr marL="73152" marR="73152" marT="45720" marB="45720" anchor="ctr">
                     <a:lnL w="9525" cap="flat" cmpd="sng" algn="ctr">
                       <a:solidFill>
-                        <a:srgbClr val="CBD5E1"/>
+                        <a:srgbClr val="D7D7D7"/>
                       </a:solidFill>
                       <a:prstDash val="solid"/>
                       <a:round/>
@@ -4815,7 +4862,7 @@
                     </a:lnL>
                     <a:lnR w="9525" cap="flat" cmpd="sng" algn="ctr">
                       <a:solidFill>
-                        <a:srgbClr val="CBD5E1"/>
+                        <a:srgbClr val="D7D7D7"/>
                       </a:solidFill>
                       <a:prstDash val="solid"/>
                       <a:round/>
@@ -4824,7 +4871,7 @@
                     </a:lnR>
                     <a:lnT w="9525" cap="flat" cmpd="sng" algn="ctr">
                       <a:solidFill>
-                        <a:srgbClr val="CBD5E1"/>
+                        <a:srgbClr val="D7D7D7"/>
                       </a:solidFill>
                       <a:prstDash val="solid"/>
                       <a:round/>
@@ -4833,7 +4880,7 @@
                     </a:lnT>
                     <a:lnB w="9525" cap="flat" cmpd="sng" algn="ctr">
                       <a:solidFill>
-                        <a:srgbClr val="CBD5E1"/>
+                        <a:srgbClr val="D7D7D7"/>
                       </a:solidFill>
                       <a:prstDash val="solid"/>
                       <a:round/>
@@ -4867,7 +4914,7 @@
                   <a:tcPr marL="73152" marR="73152" marT="45720" marB="45720" anchor="ctr">
                     <a:lnL w="9525" cap="flat" cmpd="sng" algn="ctr">
                       <a:solidFill>
-                        <a:srgbClr val="CBD5E1"/>
+                        <a:srgbClr val="D7D7D7"/>
                       </a:solidFill>
                       <a:prstDash val="solid"/>
                       <a:round/>
@@ -4876,7 +4923,7 @@
                     </a:lnL>
                     <a:lnR w="9525" cap="flat" cmpd="sng" algn="ctr">
                       <a:solidFill>
-                        <a:srgbClr val="CBD5E1"/>
+                        <a:srgbClr val="D7D7D7"/>
                       </a:solidFill>
                       <a:prstDash val="solid"/>
                       <a:round/>
@@ -4885,7 +4932,7 @@
                     </a:lnR>
                     <a:lnT w="9525" cap="flat" cmpd="sng" algn="ctr">
                       <a:solidFill>
-                        <a:srgbClr val="CBD5E1"/>
+                        <a:srgbClr val="D7D7D7"/>
                       </a:solidFill>
                       <a:prstDash val="solid"/>
                       <a:round/>
@@ -4894,7 +4941,7 @@
                     </a:lnT>
                     <a:lnB w="9525" cap="flat" cmpd="sng" algn="ctr">
                       <a:solidFill>
-                        <a:srgbClr val="CBD5E1"/>
+                        <a:srgbClr val="D7D7D7"/>
                       </a:solidFill>
                       <a:prstDash val="solid"/>
                       <a:round/>
@@ -4928,7 +4975,7 @@
                   <a:tcPr marL="73152" marR="73152" marT="45720" marB="45720" anchor="ctr">
                     <a:lnL w="9525" cap="flat" cmpd="sng" algn="ctr">
                       <a:solidFill>
-                        <a:srgbClr val="CBD5E1"/>
+                        <a:srgbClr val="D7D7D7"/>
                       </a:solidFill>
                       <a:prstDash val="solid"/>
                       <a:round/>
@@ -4937,7 +4984,7 @@
                     </a:lnL>
                     <a:lnR w="9525" cap="flat" cmpd="sng" algn="ctr">
                       <a:solidFill>
-                        <a:srgbClr val="CBD5E1"/>
+                        <a:srgbClr val="D7D7D7"/>
                       </a:solidFill>
                       <a:prstDash val="solid"/>
                       <a:round/>
@@ -4946,7 +4993,7 @@
                     </a:lnR>
                     <a:lnT w="9525" cap="flat" cmpd="sng" algn="ctr">
                       <a:solidFill>
-                        <a:srgbClr val="CBD5E1"/>
+                        <a:srgbClr val="D7D7D7"/>
                       </a:solidFill>
                       <a:prstDash val="solid"/>
                       <a:round/>
@@ -4955,7 +5002,7 @@
                     </a:lnT>
                     <a:lnB w="9525" cap="flat" cmpd="sng" algn="ctr">
                       <a:solidFill>
-                        <a:srgbClr val="CBD5E1"/>
+                        <a:srgbClr val="D7D7D7"/>
                       </a:solidFill>
                       <a:prstDash val="solid"/>
                       <a:round/>
@@ -4963,7 +5010,7 @@
                       <a:tailEnd type="none" w="med" len="med"/>
                     </a:lnB>
                     <a:solidFill>
-                      <a:srgbClr val="E3F5F2"/>
+                      <a:srgbClr val="EAF3EA"/>
                     </a:solidFill>
                   </a:tcPr>
                 </a:tc>
@@ -4991,7 +5038,7 @@
                   <a:tcPr marL="73152" marR="73152" marT="45720" marB="45720" anchor="ctr">
                     <a:lnL w="9525" cap="flat" cmpd="sng" algn="ctr">
                       <a:solidFill>
-                        <a:srgbClr val="CBD5E1"/>
+                        <a:srgbClr val="D7D7D7"/>
                       </a:solidFill>
                       <a:prstDash val="solid"/>
                       <a:round/>
@@ -5000,7 +5047,7 @@
                     </a:lnL>
                     <a:lnR w="9525" cap="flat" cmpd="sng" algn="ctr">
                       <a:solidFill>
-                        <a:srgbClr val="CBD5E1"/>
+                        <a:srgbClr val="D7D7D7"/>
                       </a:solidFill>
                       <a:prstDash val="solid"/>
                       <a:round/>
@@ -5009,7 +5056,7 @@
                     </a:lnR>
                     <a:lnT w="9525" cap="flat" cmpd="sng" algn="ctr">
                       <a:solidFill>
-                        <a:srgbClr val="CBD5E1"/>
+                        <a:srgbClr val="D7D7D7"/>
                       </a:solidFill>
                       <a:prstDash val="solid"/>
                       <a:round/>
@@ -5018,7 +5065,7 @@
                     </a:lnT>
                     <a:lnB w="9525" cap="flat" cmpd="sng" algn="ctr">
                       <a:solidFill>
-                        <a:srgbClr val="CBD5E1"/>
+                        <a:srgbClr val="D7D7D7"/>
                       </a:solidFill>
                       <a:prstDash val="solid"/>
                       <a:round/>
@@ -5052,7 +5099,7 @@
                   <a:tcPr marL="73152" marR="73152" marT="45720" marB="45720" anchor="ctr">
                     <a:lnL w="9525" cap="flat" cmpd="sng" algn="ctr">
                       <a:solidFill>
-                        <a:srgbClr val="CBD5E1"/>
+                        <a:srgbClr val="D7D7D7"/>
                       </a:solidFill>
                       <a:prstDash val="solid"/>
                       <a:round/>
@@ -5061,7 +5108,7 @@
                     </a:lnL>
                     <a:lnR w="9525" cap="flat" cmpd="sng" algn="ctr">
                       <a:solidFill>
-                        <a:srgbClr val="CBD5E1"/>
+                        <a:srgbClr val="D7D7D7"/>
                       </a:solidFill>
                       <a:prstDash val="solid"/>
                       <a:round/>
@@ -5070,7 +5117,7 @@
                     </a:lnR>
                     <a:lnT w="9525" cap="flat" cmpd="sng" algn="ctr">
                       <a:solidFill>
-                        <a:srgbClr val="CBD5E1"/>
+                        <a:srgbClr val="D7D7D7"/>
                       </a:solidFill>
                       <a:prstDash val="solid"/>
                       <a:round/>
@@ -5079,7 +5126,7 @@
                     </a:lnT>
                     <a:lnB w="9525" cap="flat" cmpd="sng" algn="ctr">
                       <a:solidFill>
-                        <a:srgbClr val="CBD5E1"/>
+                        <a:srgbClr val="D7D7D7"/>
                       </a:solidFill>
                       <a:prstDash val="solid"/>
                       <a:round/>
@@ -5113,7 +5160,7 @@
                   <a:tcPr marL="73152" marR="73152" marT="45720" marB="45720" anchor="ctr">
                     <a:lnL w="9525" cap="flat" cmpd="sng" algn="ctr">
                       <a:solidFill>
-                        <a:srgbClr val="CBD5E1"/>
+                        <a:srgbClr val="D7D7D7"/>
                       </a:solidFill>
                       <a:prstDash val="solid"/>
                       <a:round/>
@@ -5122,7 +5169,7 @@
                     </a:lnL>
                     <a:lnR w="9525" cap="flat" cmpd="sng" algn="ctr">
                       <a:solidFill>
-                        <a:srgbClr val="CBD5E1"/>
+                        <a:srgbClr val="D7D7D7"/>
                       </a:solidFill>
                       <a:prstDash val="solid"/>
                       <a:round/>
@@ -5131,7 +5178,7 @@
                     </a:lnR>
                     <a:lnT w="9525" cap="flat" cmpd="sng" algn="ctr">
                       <a:solidFill>
-                        <a:srgbClr val="CBD5E1"/>
+                        <a:srgbClr val="D7D7D7"/>
                       </a:solidFill>
                       <a:prstDash val="solid"/>
                       <a:round/>
@@ -5140,7 +5187,7 @@
                     </a:lnT>
                     <a:lnB w="9525" cap="flat" cmpd="sng" algn="ctr">
                       <a:solidFill>
-                        <a:srgbClr val="CBD5E1"/>
+                        <a:srgbClr val="D7D7D7"/>
                       </a:solidFill>
                       <a:prstDash val="solid"/>
                       <a:round/>
@@ -5174,7 +5221,7 @@
                   <a:tcPr marL="73152" marR="73152" marT="45720" marB="45720" anchor="ctr">
                     <a:lnL w="9525" cap="flat" cmpd="sng" algn="ctr">
                       <a:solidFill>
-                        <a:srgbClr val="CBD5E1"/>
+                        <a:srgbClr val="D7D7D7"/>
                       </a:solidFill>
                       <a:prstDash val="solid"/>
                       <a:round/>
@@ -5183,7 +5230,7 @@
                     </a:lnL>
                     <a:lnR w="9525" cap="flat" cmpd="sng" algn="ctr">
                       <a:solidFill>
-                        <a:srgbClr val="CBD5E1"/>
+                        <a:srgbClr val="D7D7D7"/>
                       </a:solidFill>
                       <a:prstDash val="solid"/>
                       <a:round/>
@@ -5192,7 +5239,7 @@
                     </a:lnR>
                     <a:lnT w="9525" cap="flat" cmpd="sng" algn="ctr">
                       <a:solidFill>
-                        <a:srgbClr val="CBD5E1"/>
+                        <a:srgbClr val="D7D7D7"/>
                       </a:solidFill>
                       <a:prstDash val="solid"/>
                       <a:round/>
@@ -5201,7 +5248,7 @@
                     </a:lnT>
                     <a:lnB w="9525" cap="flat" cmpd="sng" algn="ctr">
                       <a:solidFill>
-                        <a:srgbClr val="CBD5E1"/>
+                        <a:srgbClr val="D7D7D7"/>
                       </a:solidFill>
                       <a:prstDash val="solid"/>
                       <a:round/>
@@ -5235,7 +5282,7 @@
                   <a:tcPr marL="73152" marR="73152" marT="45720" marB="45720" anchor="ctr">
                     <a:lnL w="9525" cap="flat" cmpd="sng" algn="ctr">
                       <a:solidFill>
-                        <a:srgbClr val="CBD5E1"/>
+                        <a:srgbClr val="D7D7D7"/>
                       </a:solidFill>
                       <a:prstDash val="solid"/>
                       <a:round/>
@@ -5244,7 +5291,7 @@
                     </a:lnL>
                     <a:lnR w="9525" cap="flat" cmpd="sng" algn="ctr">
                       <a:solidFill>
-                        <a:srgbClr val="CBD5E1"/>
+                        <a:srgbClr val="D7D7D7"/>
                       </a:solidFill>
                       <a:prstDash val="solid"/>
                       <a:round/>
@@ -5253,7 +5300,7 @@
                     </a:lnR>
                     <a:lnT w="9525" cap="flat" cmpd="sng" algn="ctr">
                       <a:solidFill>
-                        <a:srgbClr val="CBD5E1"/>
+                        <a:srgbClr val="D7D7D7"/>
                       </a:solidFill>
                       <a:prstDash val="solid"/>
                       <a:round/>
@@ -5262,7 +5309,7 @@
                     </a:lnT>
                     <a:lnB w="9525" cap="flat" cmpd="sng" algn="ctr">
                       <a:solidFill>
-                        <a:srgbClr val="CBD5E1"/>
+                        <a:srgbClr val="D7D7D7"/>
                       </a:solidFill>
                       <a:prstDash val="solid"/>
                       <a:round/>
@@ -5296,7 +5343,7 @@
                   <a:tcPr marL="73152" marR="73152" marT="45720" marB="45720" anchor="ctr">
                     <a:lnL w="9525" cap="flat" cmpd="sng" algn="ctr">
                       <a:solidFill>
-                        <a:srgbClr val="CBD5E1"/>
+                        <a:srgbClr val="D7D7D7"/>
                       </a:solidFill>
                       <a:prstDash val="solid"/>
                       <a:round/>
@@ -5305,7 +5352,7 @@
                     </a:lnL>
                     <a:lnR w="9525" cap="flat" cmpd="sng" algn="ctr">
                       <a:solidFill>
-                        <a:srgbClr val="CBD5E1"/>
+                        <a:srgbClr val="D7D7D7"/>
                       </a:solidFill>
                       <a:prstDash val="solid"/>
                       <a:round/>
@@ -5314,7 +5361,7 @@
                     </a:lnR>
                     <a:lnT w="9525" cap="flat" cmpd="sng" algn="ctr">
                       <a:solidFill>
-                        <a:srgbClr val="CBD5E1"/>
+                        <a:srgbClr val="D7D7D7"/>
                       </a:solidFill>
                       <a:prstDash val="solid"/>
                       <a:round/>
@@ -5323,7 +5370,7 @@
                     </a:lnT>
                     <a:lnB w="9525" cap="flat" cmpd="sng" algn="ctr">
                       <a:solidFill>
-                        <a:srgbClr val="CBD5E1"/>
+                        <a:srgbClr val="D7D7D7"/>
                       </a:solidFill>
                       <a:prstDash val="solid"/>
                       <a:round/>
@@ -5331,7 +5378,7 @@
                       <a:tailEnd type="none" w="med" len="med"/>
                     </a:lnB>
                     <a:solidFill>
-                      <a:srgbClr val="E3F5F2"/>
+                      <a:srgbClr val="EAF3EA"/>
                     </a:solidFill>
                   </a:tcPr>
                 </a:tc>
@@ -5359,7 +5406,7 @@
                   <a:tcPr marL="73152" marR="73152" marT="45720" marB="45720" anchor="ctr">
                     <a:lnL w="9525" cap="flat" cmpd="sng" algn="ctr">
                       <a:solidFill>
-                        <a:srgbClr val="CBD5E1"/>
+                        <a:srgbClr val="D7D7D7"/>
                       </a:solidFill>
                       <a:prstDash val="solid"/>
                       <a:round/>
@@ -5368,7 +5415,7 @@
                     </a:lnL>
                     <a:lnR w="9525" cap="flat" cmpd="sng" algn="ctr">
                       <a:solidFill>
-                        <a:srgbClr val="CBD5E1"/>
+                        <a:srgbClr val="D7D7D7"/>
                       </a:solidFill>
                       <a:prstDash val="solid"/>
                       <a:round/>
@@ -5377,7 +5424,7 @@
                     </a:lnR>
                     <a:lnT w="9525" cap="flat" cmpd="sng" algn="ctr">
                       <a:solidFill>
-                        <a:srgbClr val="CBD5E1"/>
+                        <a:srgbClr val="D7D7D7"/>
                       </a:solidFill>
                       <a:prstDash val="solid"/>
                       <a:round/>
@@ -5386,7 +5433,7 @@
                     </a:lnT>
                     <a:lnB w="9525" cap="flat" cmpd="sng" algn="ctr">
                       <a:solidFill>
-                        <a:srgbClr val="CBD5E1"/>
+                        <a:srgbClr val="D7D7D7"/>
                       </a:solidFill>
                       <a:prstDash val="solid"/>
                       <a:round/>
@@ -5420,7 +5467,7 @@
                   <a:tcPr marL="73152" marR="73152" marT="45720" marB="45720" anchor="ctr">
                     <a:lnL w="9525" cap="flat" cmpd="sng" algn="ctr">
                       <a:solidFill>
-                        <a:srgbClr val="CBD5E1"/>
+                        <a:srgbClr val="D7D7D7"/>
                       </a:solidFill>
                       <a:prstDash val="solid"/>
                       <a:round/>
@@ -5429,7 +5476,7 @@
                     </a:lnL>
                     <a:lnR w="9525" cap="flat" cmpd="sng" algn="ctr">
                       <a:solidFill>
-                        <a:srgbClr val="CBD5E1"/>
+                        <a:srgbClr val="D7D7D7"/>
                       </a:solidFill>
                       <a:prstDash val="solid"/>
                       <a:round/>
@@ -5438,7 +5485,7 @@
                     </a:lnR>
                     <a:lnT w="9525" cap="flat" cmpd="sng" algn="ctr">
                       <a:solidFill>
-                        <a:srgbClr val="CBD5E1"/>
+                        <a:srgbClr val="D7D7D7"/>
                       </a:solidFill>
                       <a:prstDash val="solid"/>
                       <a:round/>
@@ -5447,7 +5494,7 @@
                     </a:lnT>
                     <a:lnB w="9525" cap="flat" cmpd="sng" algn="ctr">
                       <a:solidFill>
-                        <a:srgbClr val="CBD5E1"/>
+                        <a:srgbClr val="D7D7D7"/>
                       </a:solidFill>
                       <a:prstDash val="solid"/>
                       <a:round/>
@@ -5481,7 +5528,7 @@
                   <a:tcPr marL="73152" marR="73152" marT="45720" marB="45720" anchor="ctr">
                     <a:lnL w="9525" cap="flat" cmpd="sng" algn="ctr">
                       <a:solidFill>
-                        <a:srgbClr val="CBD5E1"/>
+                        <a:srgbClr val="D7D7D7"/>
                       </a:solidFill>
                       <a:prstDash val="solid"/>
                       <a:round/>
@@ -5490,7 +5537,7 @@
                     </a:lnL>
                     <a:lnR w="9525" cap="flat" cmpd="sng" algn="ctr">
                       <a:solidFill>
-                        <a:srgbClr val="CBD5E1"/>
+                        <a:srgbClr val="D7D7D7"/>
                       </a:solidFill>
                       <a:prstDash val="solid"/>
                       <a:round/>
@@ -5499,7 +5546,7 @@
                     </a:lnR>
                     <a:lnT w="9525" cap="flat" cmpd="sng" algn="ctr">
                       <a:solidFill>
-                        <a:srgbClr val="CBD5E1"/>
+                        <a:srgbClr val="D7D7D7"/>
                       </a:solidFill>
                       <a:prstDash val="solid"/>
                       <a:round/>
@@ -5508,7 +5555,7 @@
                     </a:lnT>
                     <a:lnB w="9525" cap="flat" cmpd="sng" algn="ctr">
                       <a:solidFill>
-                        <a:srgbClr val="CBD5E1"/>
+                        <a:srgbClr val="D7D7D7"/>
                       </a:solidFill>
                       <a:prstDash val="solid"/>
                       <a:round/>
@@ -5542,7 +5589,7 @@
                   <a:tcPr marL="73152" marR="73152" marT="45720" marB="45720" anchor="ctr">
                     <a:lnL w="9525" cap="flat" cmpd="sng" algn="ctr">
                       <a:solidFill>
-                        <a:srgbClr val="CBD5E1"/>
+                        <a:srgbClr val="D7D7D7"/>
                       </a:solidFill>
                       <a:prstDash val="solid"/>
                       <a:round/>
@@ -5551,7 +5598,7 @@
                     </a:lnL>
                     <a:lnR w="9525" cap="flat" cmpd="sng" algn="ctr">
                       <a:solidFill>
-                        <a:srgbClr val="CBD5E1"/>
+                        <a:srgbClr val="D7D7D7"/>
                       </a:solidFill>
                       <a:prstDash val="solid"/>
                       <a:round/>
@@ -5560,7 +5607,7 @@
                     </a:lnR>
                     <a:lnT w="9525" cap="flat" cmpd="sng" algn="ctr">
                       <a:solidFill>
-                        <a:srgbClr val="CBD5E1"/>
+                        <a:srgbClr val="D7D7D7"/>
                       </a:solidFill>
                       <a:prstDash val="solid"/>
                       <a:round/>
@@ -5569,7 +5616,7 @@
                     </a:lnT>
                     <a:lnB w="9525" cap="flat" cmpd="sng" algn="ctr">
                       <a:solidFill>
-                        <a:srgbClr val="CBD5E1"/>
+                        <a:srgbClr val="D7D7D7"/>
                       </a:solidFill>
                       <a:prstDash val="solid"/>
                       <a:round/>
@@ -5603,7 +5650,7 @@
                   <a:tcPr marL="73152" marR="73152" marT="45720" marB="45720" anchor="ctr">
                     <a:lnL w="9525" cap="flat" cmpd="sng" algn="ctr">
                       <a:solidFill>
-                        <a:srgbClr val="CBD5E1"/>
+                        <a:srgbClr val="D7D7D7"/>
                       </a:solidFill>
                       <a:prstDash val="solid"/>
                       <a:round/>
@@ -5612,7 +5659,7 @@
                     </a:lnL>
                     <a:lnR w="9525" cap="flat" cmpd="sng" algn="ctr">
                       <a:solidFill>
-                        <a:srgbClr val="CBD5E1"/>
+                        <a:srgbClr val="D7D7D7"/>
                       </a:solidFill>
                       <a:prstDash val="solid"/>
                       <a:round/>
@@ -5621,7 +5668,7 @@
                     </a:lnR>
                     <a:lnT w="9525" cap="flat" cmpd="sng" algn="ctr">
                       <a:solidFill>
-                        <a:srgbClr val="CBD5E1"/>
+                        <a:srgbClr val="D7D7D7"/>
                       </a:solidFill>
                       <a:prstDash val="solid"/>
                       <a:round/>
@@ -5630,7 +5677,7 @@
                     </a:lnT>
                     <a:lnB w="9525" cap="flat" cmpd="sng" algn="ctr">
                       <a:solidFill>
-                        <a:srgbClr val="CBD5E1"/>
+                        <a:srgbClr val="D7D7D7"/>
                       </a:solidFill>
                       <a:prstDash val="solid"/>
                       <a:round/>
@@ -5664,7 +5711,7 @@
                   <a:tcPr marL="73152" marR="73152" marT="45720" marB="45720" anchor="ctr">
                     <a:lnL w="9525" cap="flat" cmpd="sng" algn="ctr">
                       <a:solidFill>
-                        <a:srgbClr val="CBD5E1"/>
+                        <a:srgbClr val="D7D7D7"/>
                       </a:solidFill>
                       <a:prstDash val="solid"/>
                       <a:round/>
@@ -5673,7 +5720,7 @@
                     </a:lnL>
                     <a:lnR w="9525" cap="flat" cmpd="sng" algn="ctr">
                       <a:solidFill>
-                        <a:srgbClr val="CBD5E1"/>
+                        <a:srgbClr val="D7D7D7"/>
                       </a:solidFill>
                       <a:prstDash val="solid"/>
                       <a:round/>
@@ -5682,7 +5729,7 @@
                     </a:lnR>
                     <a:lnT w="9525" cap="flat" cmpd="sng" algn="ctr">
                       <a:solidFill>
-                        <a:srgbClr val="CBD5E1"/>
+                        <a:srgbClr val="D7D7D7"/>
                       </a:solidFill>
                       <a:prstDash val="solid"/>
                       <a:round/>
@@ -5691,7 +5738,7 @@
                     </a:lnT>
                     <a:lnB w="9525" cap="flat" cmpd="sng" algn="ctr">
                       <a:solidFill>
-                        <a:srgbClr val="CBD5E1"/>
+                        <a:srgbClr val="D7D7D7"/>
                       </a:solidFill>
                       <a:prstDash val="solid"/>
                       <a:round/>
@@ -5699,7 +5746,7 @@
                       <a:tailEnd type="none" w="med" len="med"/>
                     </a:lnB>
                     <a:solidFill>
-                      <a:srgbClr val="E3F5F2"/>
+                      <a:srgbClr val="EAF3EA"/>
                     </a:solidFill>
                   </a:tcPr>
                 </a:tc>
@@ -5727,7 +5774,7 @@
                   <a:tcPr marL="73152" marR="73152" marT="45720" marB="45720" anchor="ctr">
                     <a:lnL w="9525" cap="flat" cmpd="sng" algn="ctr">
                       <a:solidFill>
-                        <a:srgbClr val="CBD5E1"/>
+                        <a:srgbClr val="D7D7D7"/>
                       </a:solidFill>
                       <a:prstDash val="solid"/>
                       <a:round/>
@@ -5736,7 +5783,7 @@
                     </a:lnL>
                     <a:lnR w="9525" cap="flat" cmpd="sng" algn="ctr">
                       <a:solidFill>
-                        <a:srgbClr val="CBD5E1"/>
+                        <a:srgbClr val="D7D7D7"/>
                       </a:solidFill>
                       <a:prstDash val="solid"/>
                       <a:round/>
@@ -5745,7 +5792,7 @@
                     </a:lnR>
                     <a:lnT w="9525" cap="flat" cmpd="sng" algn="ctr">
                       <a:solidFill>
-                        <a:srgbClr val="CBD5E1"/>
+                        <a:srgbClr val="D7D7D7"/>
                       </a:solidFill>
                       <a:prstDash val="solid"/>
                       <a:round/>
@@ -5754,7 +5801,7 @@
                     </a:lnT>
                     <a:lnB w="9525" cap="flat" cmpd="sng" algn="ctr">
                       <a:solidFill>
-                        <a:srgbClr val="CBD5E1"/>
+                        <a:srgbClr val="D7D7D7"/>
                       </a:solidFill>
                       <a:prstDash val="solid"/>
                       <a:round/>
@@ -5788,7 +5835,7 @@
                   <a:tcPr marL="73152" marR="73152" marT="45720" marB="45720" anchor="ctr">
                     <a:lnL w="9525" cap="flat" cmpd="sng" algn="ctr">
                       <a:solidFill>
-                        <a:srgbClr val="CBD5E1"/>
+                        <a:srgbClr val="D7D7D7"/>
                       </a:solidFill>
                       <a:prstDash val="solid"/>
                       <a:round/>
@@ -5797,7 +5844,7 @@
                     </a:lnL>
                     <a:lnR w="9525" cap="flat" cmpd="sng" algn="ctr">
                       <a:solidFill>
-                        <a:srgbClr val="CBD5E1"/>
+                        <a:srgbClr val="D7D7D7"/>
                       </a:solidFill>
                       <a:prstDash val="solid"/>
                       <a:round/>
@@ -5806,7 +5853,7 @@
                     </a:lnR>
                     <a:lnT w="9525" cap="flat" cmpd="sng" algn="ctr">
                       <a:solidFill>
-                        <a:srgbClr val="CBD5E1"/>
+                        <a:srgbClr val="D7D7D7"/>
                       </a:solidFill>
                       <a:prstDash val="solid"/>
                       <a:round/>
@@ -5815,7 +5862,7 @@
                     </a:lnT>
                     <a:lnB w="9525" cap="flat" cmpd="sng" algn="ctr">
                       <a:solidFill>
-                        <a:srgbClr val="CBD5E1"/>
+                        <a:srgbClr val="D7D7D7"/>
                       </a:solidFill>
                       <a:prstDash val="solid"/>
                       <a:round/>
@@ -5849,7 +5896,7 @@
                   <a:tcPr marL="73152" marR="73152" marT="45720" marB="45720" anchor="ctr">
                     <a:lnL w="9525" cap="flat" cmpd="sng" algn="ctr">
                       <a:solidFill>
-                        <a:srgbClr val="CBD5E1"/>
+                        <a:srgbClr val="D7D7D7"/>
                       </a:solidFill>
                       <a:prstDash val="solid"/>
                       <a:round/>
@@ -5858,7 +5905,7 @@
                     </a:lnL>
                     <a:lnR w="9525" cap="flat" cmpd="sng" algn="ctr">
                       <a:solidFill>
-                        <a:srgbClr val="CBD5E1"/>
+                        <a:srgbClr val="D7D7D7"/>
                       </a:solidFill>
                       <a:prstDash val="solid"/>
                       <a:round/>
@@ -5867,7 +5914,7 @@
                     </a:lnR>
                     <a:lnT w="9525" cap="flat" cmpd="sng" algn="ctr">
                       <a:solidFill>
-                        <a:srgbClr val="CBD5E1"/>
+                        <a:srgbClr val="D7D7D7"/>
                       </a:solidFill>
                       <a:prstDash val="solid"/>
                       <a:round/>
@@ -5876,7 +5923,7 @@
                     </a:lnT>
                     <a:lnB w="9525" cap="flat" cmpd="sng" algn="ctr">
                       <a:solidFill>
-                        <a:srgbClr val="CBD5E1"/>
+                        <a:srgbClr val="D7D7D7"/>
                       </a:solidFill>
                       <a:prstDash val="solid"/>
                       <a:round/>
@@ -5910,7 +5957,7 @@
                   <a:tcPr marL="73152" marR="73152" marT="45720" marB="45720" anchor="ctr">
                     <a:lnL w="9525" cap="flat" cmpd="sng" algn="ctr">
                       <a:solidFill>
-                        <a:srgbClr val="CBD5E1"/>
+                        <a:srgbClr val="D7D7D7"/>
                       </a:solidFill>
                       <a:prstDash val="solid"/>
                       <a:round/>
@@ -5919,7 +5966,7 @@
                     </a:lnL>
                     <a:lnR w="9525" cap="flat" cmpd="sng" algn="ctr">
                       <a:solidFill>
-                        <a:srgbClr val="CBD5E1"/>
+                        <a:srgbClr val="D7D7D7"/>
                       </a:solidFill>
                       <a:prstDash val="solid"/>
                       <a:round/>
@@ -5928,7 +5975,7 @@
                     </a:lnR>
                     <a:lnT w="9525" cap="flat" cmpd="sng" algn="ctr">
                       <a:solidFill>
-                        <a:srgbClr val="CBD5E1"/>
+                        <a:srgbClr val="D7D7D7"/>
                       </a:solidFill>
                       <a:prstDash val="solid"/>
                       <a:round/>
@@ -5937,7 +5984,7 @@
                     </a:lnT>
                     <a:lnB w="9525" cap="flat" cmpd="sng" algn="ctr">
                       <a:solidFill>
-                        <a:srgbClr val="CBD5E1"/>
+                        <a:srgbClr val="D7D7D7"/>
                       </a:solidFill>
                       <a:prstDash val="solid"/>
                       <a:round/>
@@ -5971,7 +6018,7 @@
                   <a:tcPr marL="73152" marR="73152" marT="45720" marB="45720" anchor="ctr">
                     <a:lnL w="9525" cap="flat" cmpd="sng" algn="ctr">
                       <a:solidFill>
-                        <a:srgbClr val="CBD5E1"/>
+                        <a:srgbClr val="D7D7D7"/>
                       </a:solidFill>
                       <a:prstDash val="solid"/>
                       <a:round/>
@@ -5980,7 +6027,7 @@
                     </a:lnL>
                     <a:lnR w="9525" cap="flat" cmpd="sng" algn="ctr">
                       <a:solidFill>
-                        <a:srgbClr val="CBD5E1"/>
+                        <a:srgbClr val="D7D7D7"/>
                       </a:solidFill>
                       <a:prstDash val="solid"/>
                       <a:round/>
@@ -5989,7 +6036,7 @@
                     </a:lnR>
                     <a:lnT w="9525" cap="flat" cmpd="sng" algn="ctr">
                       <a:solidFill>
-                        <a:srgbClr val="CBD5E1"/>
+                        <a:srgbClr val="D7D7D7"/>
                       </a:solidFill>
                       <a:prstDash val="solid"/>
                       <a:round/>
@@ -5998,7 +6045,7 @@
                     </a:lnT>
                     <a:lnB w="9525" cap="flat" cmpd="sng" algn="ctr">
                       <a:solidFill>
-                        <a:srgbClr val="CBD5E1"/>
+                        <a:srgbClr val="D7D7D7"/>
                       </a:solidFill>
                       <a:prstDash val="solid"/>
                       <a:round/>
@@ -6032,7 +6079,7 @@
                   <a:tcPr marL="73152" marR="73152" marT="45720" marB="45720" anchor="ctr">
                     <a:lnL w="9525" cap="flat" cmpd="sng" algn="ctr">
                       <a:solidFill>
-                        <a:srgbClr val="CBD5E1"/>
+                        <a:srgbClr val="D7D7D7"/>
                       </a:solidFill>
                       <a:prstDash val="solid"/>
                       <a:round/>
@@ -6041,7 +6088,7 @@
                     </a:lnL>
                     <a:lnR w="9525" cap="flat" cmpd="sng" algn="ctr">
                       <a:solidFill>
-                        <a:srgbClr val="CBD5E1"/>
+                        <a:srgbClr val="D7D7D7"/>
                       </a:solidFill>
                       <a:prstDash val="solid"/>
                       <a:round/>
@@ -6050,7 +6097,7 @@
                     </a:lnR>
                     <a:lnT w="9525" cap="flat" cmpd="sng" algn="ctr">
                       <a:solidFill>
-                        <a:srgbClr val="CBD5E1"/>
+                        <a:srgbClr val="D7D7D7"/>
                       </a:solidFill>
                       <a:prstDash val="solid"/>
                       <a:round/>
@@ -6059,7 +6106,7 @@
                     </a:lnT>
                     <a:lnB w="9525" cap="flat" cmpd="sng" algn="ctr">
                       <a:solidFill>
-                        <a:srgbClr val="CBD5E1"/>
+                        <a:srgbClr val="D7D7D7"/>
                       </a:solidFill>
                       <a:prstDash val="solid"/>
                       <a:round/>
@@ -6067,7 +6114,7 @@
                       <a:tailEnd type="none" w="med" len="med"/>
                     </a:lnB>
                     <a:solidFill>
-                      <a:srgbClr val="E3F5F2"/>
+                      <a:srgbClr val="EAF3EA"/>
                     </a:solidFill>
                   </a:tcPr>
                 </a:tc>
@@ -6078,7 +6125,7 @@
       </p:graphicFrame>
       <p:sp>
         <p:nvSpPr>
-          <p:cNvPr id="4" name="text-269"/>
+          <p:cNvPr id="4" name="text-280"/>
           <p:cNvSpPr txBox="1"/>
           <p:nvPr/>
         </p:nvSpPr>
@@ -6209,20 +6256,31 @@
               <a:buNone/>
             </a:pPr>
             <a:r>
-              <a:rPr lang="en-US" sz="2800" b="1" dirty="0">
+              <a:rPr lang="en-US" sz="2600" b="1" dirty="0">
                 <a:solidFill>
                   <a:schemeClr val="tx2"/>
                 </a:solidFill>
               </a:rPr>
-              <a:t>A revocation at the source is enforced within 5 minutes</a:t>
-            </a:r>
-            <a:endParaRPr lang="en-US" sz="2800" dirty="0"/>
+              <a:t>A revocation at the source</a:t>
+            </a:r>
+            <a:pPr algn="l" indent="0" marL="0">
+              <a:buNone/>
+            </a:pPr>
+            <a:r>
+              <a:rPr lang="en-US" sz="2600" b="1" dirty="0">
+                <a:solidFill>
+                  <a:srgbClr val="8C8C8C"/>
+                </a:solidFill>
+              </a:rPr>
+              <a:t> is enforced within 5 minutes</a:t>
+            </a:r>
+            <a:endParaRPr lang="en-US" sz="2600" dirty="0"/>
           </a:p>
         </p:txBody>
       </p:sp>
       <p:graphicFrame>
         <p:nvGraphicFramePr>
-          <p:cNvPr id="3" name="revocation-chart-270" descr=""/>
+          <p:cNvPr id="3" name="revocation-chart-281" descr=""/>
           <p:cNvGraphicFramePr/>
           <p:nvPr/>
         </p:nvGraphicFramePr>
@@ -6238,7 +6296,7 @@
       </p:graphicFrame>
       <p:sp>
         <p:nvSpPr>
-          <p:cNvPr id="4" name="text-271"/>
+          <p:cNvPr id="4" name="text-282"/>
           <p:cNvSpPr txBox="1"/>
           <p:nvPr/>
         </p:nvSpPr>
@@ -6274,7 +6332,7 @@
       </p:sp>
       <p:sp>
         <p:nvSpPr>
-          <p:cNvPr id="5" name="chart-notes-272"/>
+          <p:cNvPr id="5" name="chart-notes-283"/>
           <p:cNvSpPr/>
           <p:nvPr/>
         </p:nvSpPr>
@@ -6285,7 +6343,7 @@
           </a:xfrm>
           <a:prstGeom prst="roundRect">
             <a:avLst>
-              <a:gd name="adj" fmla="val 2319"/>
+              <a:gd name="adj" fmla="val 1449"/>
             </a:avLst>
           </a:prstGeom>
           <a:solidFill>
@@ -6296,7 +6354,7 @@
       </p:sp>
       <p:sp>
         <p:nvSpPr>
-          <p:cNvPr id="6" name="text-273"/>
+          <p:cNvPr id="6" name="text-284"/>
           <p:cNvSpPr txBox="1"/>
           <p:nvPr/>
         </p:nvSpPr>
@@ -6416,7 +6474,7 @@
       </p:sp>
       <p:sp>
         <p:nvSpPr>
-          <p:cNvPr id="7" name="text-274"/>
+          <p:cNvPr id="7" name="text-285"/>
           <p:cNvSpPr txBox="1"/>
           <p:nvPr/>
         </p:nvSpPr>
@@ -6547,20 +6605,31 @@
               <a:buNone/>
             </a:pPr>
             <a:r>
-              <a:rPr lang="en-US" sz="2800" b="1" dirty="0">
+              <a:rPr lang="en-US" sz="2600" b="1" dirty="0">
                 <a:solidFill>
                   <a:schemeClr val="tx2"/>
                 </a:solidFill>
               </a:rPr>
-              <a:t>Design trade-offs we chose deliberately</a:t>
-            </a:r>
-            <a:endParaRPr lang="en-US" sz="2800" dirty="0"/>
+              <a:t>Design trade-offs</a:t>
+            </a:r>
+            <a:pPr algn="l" indent="0" marL="0">
+              <a:buNone/>
+            </a:pPr>
+            <a:r>
+              <a:rPr lang="en-US" sz="2600" b="1" dirty="0">
+                <a:solidFill>
+                  <a:srgbClr val="8C8C8C"/>
+                </a:solidFill>
+              </a:rPr>
+              <a:t> we chose deliberately</a:t>
+            </a:r>
+            <a:endParaRPr lang="en-US" sz="2600" dirty="0"/>
           </a:p>
         </p:txBody>
       </p:sp>
       <p:graphicFrame>
         <p:nvGraphicFramePr>
-          <p:cNvPr id="13" name="tradeoff-table-275"/>
+          <p:cNvPr id="13" name="tradeoff-table-286"/>
           <p:cNvGraphicFramePr>
             <a:graphicFrameLocks noGrp="1"/>
           </p:cNvGraphicFramePr>
@@ -6608,7 +6677,7 @@
                   <a:tcPr marL="109728" marR="109728" marT="54864" marB="54864" anchor="ctr">
                     <a:lnL w="9525" cap="flat" cmpd="sng" algn="ctr">
                       <a:solidFill>
-                        <a:srgbClr val="CBD5E1"/>
+                        <a:srgbClr val="D7D7D7"/>
                       </a:solidFill>
                       <a:prstDash val="solid"/>
                       <a:round/>
@@ -6617,7 +6686,7 @@
                     </a:lnL>
                     <a:lnR w="9525" cap="flat" cmpd="sng" algn="ctr">
                       <a:solidFill>
-                        <a:srgbClr val="CBD5E1"/>
+                        <a:srgbClr val="D7D7D7"/>
                       </a:solidFill>
                       <a:prstDash val="solid"/>
                       <a:round/>
@@ -6626,7 +6695,7 @@
                     </a:lnR>
                     <a:lnT w="9525" cap="flat" cmpd="sng" algn="ctr">
                       <a:solidFill>
-                        <a:srgbClr val="CBD5E1"/>
+                        <a:srgbClr val="D7D7D7"/>
                       </a:solidFill>
                       <a:prstDash val="solid"/>
                       <a:round/>
@@ -6635,7 +6704,7 @@
                     </a:lnT>
                     <a:lnB w="9525" cap="flat" cmpd="sng" algn="ctr">
                       <a:solidFill>
-                        <a:srgbClr val="CBD5E1"/>
+                        <a:srgbClr val="D7D7D7"/>
                       </a:solidFill>
                       <a:prstDash val="solid"/>
                       <a:round/>
@@ -6669,7 +6738,7 @@
                   <a:tcPr marL="109728" marR="109728" marT="54864" marB="54864" anchor="ctr">
                     <a:lnL w="9525" cap="flat" cmpd="sng" algn="ctr">
                       <a:solidFill>
-                        <a:srgbClr val="CBD5E1"/>
+                        <a:srgbClr val="D7D7D7"/>
                       </a:solidFill>
                       <a:prstDash val="solid"/>
                       <a:round/>
@@ -6678,7 +6747,7 @@
                     </a:lnL>
                     <a:lnR w="9525" cap="flat" cmpd="sng" algn="ctr">
                       <a:solidFill>
-                        <a:srgbClr val="CBD5E1"/>
+                        <a:srgbClr val="D7D7D7"/>
                       </a:solidFill>
                       <a:prstDash val="solid"/>
                       <a:round/>
@@ -6687,7 +6756,7 @@
                     </a:lnR>
                     <a:lnT w="9525" cap="flat" cmpd="sng" algn="ctr">
                       <a:solidFill>
-                        <a:srgbClr val="CBD5E1"/>
+                        <a:srgbClr val="D7D7D7"/>
                       </a:solidFill>
                       <a:prstDash val="solid"/>
                       <a:round/>
@@ -6696,7 +6765,7 @@
                     </a:lnT>
                     <a:lnB w="9525" cap="flat" cmpd="sng" algn="ctr">
                       <a:solidFill>
-                        <a:srgbClr val="CBD5E1"/>
+                        <a:srgbClr val="D7D7D7"/>
                       </a:solidFill>
                       <a:prstDash val="solid"/>
                       <a:round/>
@@ -6730,7 +6799,7 @@
                   <a:tcPr marL="109728" marR="109728" marT="54864" marB="54864" anchor="ctr">
                     <a:lnL w="9525" cap="flat" cmpd="sng" algn="ctr">
                       <a:solidFill>
-                        <a:srgbClr val="CBD5E1"/>
+                        <a:srgbClr val="D7D7D7"/>
                       </a:solidFill>
                       <a:prstDash val="solid"/>
                       <a:round/>
@@ -6739,7 +6808,7 @@
                     </a:lnL>
                     <a:lnR w="9525" cap="flat" cmpd="sng" algn="ctr">
                       <a:solidFill>
-                        <a:srgbClr val="CBD5E1"/>
+                        <a:srgbClr val="D7D7D7"/>
                       </a:solidFill>
                       <a:prstDash val="solid"/>
                       <a:round/>
@@ -6748,7 +6817,7 @@
                     </a:lnR>
                     <a:lnT w="9525" cap="flat" cmpd="sng" algn="ctr">
                       <a:solidFill>
-                        <a:srgbClr val="CBD5E1"/>
+                        <a:srgbClr val="D7D7D7"/>
                       </a:solidFill>
                       <a:prstDash val="solid"/>
                       <a:round/>
@@ -6757,7 +6826,7 @@
                     </a:lnT>
                     <a:lnB w="9525" cap="flat" cmpd="sng" algn="ctr">
                       <a:solidFill>
-                        <a:srgbClr val="CBD5E1"/>
+                        <a:srgbClr val="D7D7D7"/>
                       </a:solidFill>
                       <a:prstDash val="solid"/>
                       <a:round/>
@@ -6793,7 +6862,7 @@
                   <a:tcPr marL="109728" marR="109728" marT="54864" marB="54864" anchor="ctr">
                     <a:lnL w="9525" cap="flat" cmpd="sng" algn="ctr">
                       <a:solidFill>
-                        <a:srgbClr val="CBD5E1"/>
+                        <a:srgbClr val="D7D7D7"/>
                       </a:solidFill>
                       <a:prstDash val="solid"/>
                       <a:round/>
@@ -6802,7 +6871,7 @@
                     </a:lnL>
                     <a:lnR w="9525" cap="flat" cmpd="sng" algn="ctr">
                       <a:solidFill>
-                        <a:srgbClr val="CBD5E1"/>
+                        <a:srgbClr val="D7D7D7"/>
                       </a:solidFill>
                       <a:prstDash val="solid"/>
                       <a:round/>
@@ -6811,7 +6880,7 @@
                     </a:lnR>
                     <a:lnT w="9525" cap="flat" cmpd="sng" algn="ctr">
                       <a:solidFill>
-                        <a:srgbClr val="CBD5E1"/>
+                        <a:srgbClr val="D7D7D7"/>
                       </a:solidFill>
                       <a:prstDash val="solid"/>
                       <a:round/>
@@ -6820,7 +6889,7 @@
                     </a:lnT>
                     <a:lnB w="9525" cap="flat" cmpd="sng" algn="ctr">
                       <a:solidFill>
-                        <a:srgbClr val="CBD5E1"/>
+                        <a:srgbClr val="D7D7D7"/>
                       </a:solidFill>
                       <a:prstDash val="solid"/>
                       <a:round/>
@@ -6854,7 +6923,7 @@
                   <a:tcPr marL="109728" marR="109728" marT="54864" marB="54864" anchor="ctr">
                     <a:lnL w="9525" cap="flat" cmpd="sng" algn="ctr">
                       <a:solidFill>
-                        <a:srgbClr val="CBD5E1"/>
+                        <a:srgbClr val="D7D7D7"/>
                       </a:solidFill>
                       <a:prstDash val="solid"/>
                       <a:round/>
@@ -6863,7 +6932,7 @@
                     </a:lnL>
                     <a:lnR w="9525" cap="flat" cmpd="sng" algn="ctr">
                       <a:solidFill>
-                        <a:srgbClr val="CBD5E1"/>
+                        <a:srgbClr val="D7D7D7"/>
                       </a:solidFill>
                       <a:prstDash val="solid"/>
                       <a:round/>
@@ -6872,7 +6941,7 @@
                     </a:lnR>
                     <a:lnT w="9525" cap="flat" cmpd="sng" algn="ctr">
                       <a:solidFill>
-                        <a:srgbClr val="CBD5E1"/>
+                        <a:srgbClr val="D7D7D7"/>
                       </a:solidFill>
                       <a:prstDash val="solid"/>
                       <a:round/>
@@ -6881,7 +6950,7 @@
                     </a:lnT>
                     <a:lnB w="9525" cap="flat" cmpd="sng" algn="ctr">
                       <a:solidFill>
-                        <a:srgbClr val="CBD5E1"/>
+                        <a:srgbClr val="D7D7D7"/>
                       </a:solidFill>
                       <a:prstDash val="solid"/>
                       <a:round/>
@@ -6915,7 +6984,7 @@
                   <a:tcPr marL="109728" marR="109728" marT="54864" marB="54864" anchor="ctr">
                     <a:lnL w="9525" cap="flat" cmpd="sng" algn="ctr">
                       <a:solidFill>
-                        <a:srgbClr val="CBD5E1"/>
+                        <a:srgbClr val="D7D7D7"/>
                       </a:solidFill>
                       <a:prstDash val="solid"/>
                       <a:round/>
@@ -6924,7 +6993,7 @@
                     </a:lnL>
                     <a:lnR w="9525" cap="flat" cmpd="sng" algn="ctr">
                       <a:solidFill>
-                        <a:srgbClr val="CBD5E1"/>
+                        <a:srgbClr val="D7D7D7"/>
                       </a:solidFill>
                       <a:prstDash val="solid"/>
                       <a:round/>
@@ -6933,7 +7002,7 @@
                     </a:lnR>
                     <a:lnT w="9525" cap="flat" cmpd="sng" algn="ctr">
                       <a:solidFill>
-                        <a:srgbClr val="CBD5E1"/>
+                        <a:srgbClr val="D7D7D7"/>
                       </a:solidFill>
                       <a:prstDash val="solid"/>
                       <a:round/>
@@ -6942,7 +7011,7 @@
                     </a:lnT>
                     <a:lnB w="9525" cap="flat" cmpd="sng" algn="ctr">
                       <a:solidFill>
-                        <a:srgbClr val="CBD5E1"/>
+                        <a:srgbClr val="D7D7D7"/>
                       </a:solidFill>
                       <a:prstDash val="solid"/>
                       <a:round/>
@@ -6978,7 +7047,7 @@
                   <a:tcPr marL="109728" marR="109728" marT="54864" marB="54864" anchor="ctr">
                     <a:lnL w="9525" cap="flat" cmpd="sng" algn="ctr">
                       <a:solidFill>
-                        <a:srgbClr val="CBD5E1"/>
+                        <a:srgbClr val="D7D7D7"/>
                       </a:solidFill>
                       <a:prstDash val="solid"/>
                       <a:round/>
@@ -6987,7 +7056,7 @@
                     </a:lnL>
                     <a:lnR w="9525" cap="flat" cmpd="sng" algn="ctr">
                       <a:solidFill>
-                        <a:srgbClr val="CBD5E1"/>
+                        <a:srgbClr val="D7D7D7"/>
                       </a:solidFill>
                       <a:prstDash val="solid"/>
                       <a:round/>
@@ -6996,7 +7065,7 @@
                     </a:lnR>
                     <a:lnT w="9525" cap="flat" cmpd="sng" algn="ctr">
                       <a:solidFill>
-                        <a:srgbClr val="CBD5E1"/>
+                        <a:srgbClr val="D7D7D7"/>
                       </a:solidFill>
                       <a:prstDash val="solid"/>
                       <a:round/>
@@ -7005,7 +7074,7 @@
                     </a:lnT>
                     <a:lnB w="9525" cap="flat" cmpd="sng" algn="ctr">
                       <a:solidFill>
-                        <a:srgbClr val="CBD5E1"/>
+                        <a:srgbClr val="D7D7D7"/>
                       </a:solidFill>
                       <a:prstDash val="solid"/>
                       <a:round/>
@@ -7039,7 +7108,7 @@
                   <a:tcPr marL="109728" marR="109728" marT="54864" marB="54864" anchor="ctr">
                     <a:lnL w="9525" cap="flat" cmpd="sng" algn="ctr">
                       <a:solidFill>
-                        <a:srgbClr val="CBD5E1"/>
+                        <a:srgbClr val="D7D7D7"/>
                       </a:solidFill>
                       <a:prstDash val="solid"/>
                       <a:round/>
@@ -7048,7 +7117,7 @@
                     </a:lnL>
                     <a:lnR w="9525" cap="flat" cmpd="sng" algn="ctr">
                       <a:solidFill>
-                        <a:srgbClr val="CBD5E1"/>
+                        <a:srgbClr val="D7D7D7"/>
                       </a:solidFill>
                       <a:prstDash val="solid"/>
                       <a:round/>
@@ -7057,7 +7126,7 @@
                     </a:lnR>
                     <a:lnT w="9525" cap="flat" cmpd="sng" algn="ctr">
                       <a:solidFill>
-                        <a:srgbClr val="CBD5E1"/>
+                        <a:srgbClr val="D7D7D7"/>
                       </a:solidFill>
                       <a:prstDash val="solid"/>
                       <a:round/>
@@ -7066,7 +7135,7 @@
                     </a:lnT>
                     <a:lnB w="9525" cap="flat" cmpd="sng" algn="ctr">
                       <a:solidFill>
-                        <a:srgbClr val="CBD5E1"/>
+                        <a:srgbClr val="D7D7D7"/>
                       </a:solidFill>
                       <a:prstDash val="solid"/>
                       <a:round/>
@@ -7100,7 +7169,7 @@
                   <a:tcPr marL="109728" marR="109728" marT="54864" marB="54864" anchor="ctr">
                     <a:lnL w="9525" cap="flat" cmpd="sng" algn="ctr">
                       <a:solidFill>
-                        <a:srgbClr val="CBD5E1"/>
+                        <a:srgbClr val="D7D7D7"/>
                       </a:solidFill>
                       <a:prstDash val="solid"/>
                       <a:round/>
@@ -7109,7 +7178,7 @@
                     </a:lnL>
                     <a:lnR w="9525" cap="flat" cmpd="sng" algn="ctr">
                       <a:solidFill>
-                        <a:srgbClr val="CBD5E1"/>
+                        <a:srgbClr val="D7D7D7"/>
                       </a:solidFill>
                       <a:prstDash val="solid"/>
                       <a:round/>
@@ -7118,7 +7187,7 @@
                     </a:lnR>
                     <a:lnT w="9525" cap="flat" cmpd="sng" algn="ctr">
                       <a:solidFill>
-                        <a:srgbClr val="CBD5E1"/>
+                        <a:srgbClr val="D7D7D7"/>
                       </a:solidFill>
                       <a:prstDash val="solid"/>
                       <a:round/>
@@ -7127,7 +7196,7 @@
                     </a:lnT>
                     <a:lnB w="9525" cap="flat" cmpd="sng" algn="ctr">
                       <a:solidFill>
-                        <a:srgbClr val="CBD5E1"/>
+                        <a:srgbClr val="D7D7D7"/>
                       </a:solidFill>
                       <a:prstDash val="solid"/>
                       <a:round/>
@@ -7163,7 +7232,7 @@
                   <a:tcPr marL="109728" marR="109728" marT="54864" marB="54864" anchor="ctr">
                     <a:lnL w="9525" cap="flat" cmpd="sng" algn="ctr">
                       <a:solidFill>
-                        <a:srgbClr val="CBD5E1"/>
+                        <a:srgbClr val="D7D7D7"/>
                       </a:solidFill>
                       <a:prstDash val="solid"/>
                       <a:round/>
@@ -7172,7 +7241,7 @@
                     </a:lnL>
                     <a:lnR w="9525" cap="flat" cmpd="sng" algn="ctr">
                       <a:solidFill>
-                        <a:srgbClr val="CBD5E1"/>
+                        <a:srgbClr val="D7D7D7"/>
                       </a:solidFill>
                       <a:prstDash val="solid"/>
                       <a:round/>
@@ -7181,7 +7250,7 @@
                     </a:lnR>
                     <a:lnT w="9525" cap="flat" cmpd="sng" algn="ctr">
                       <a:solidFill>
-                        <a:srgbClr val="CBD5E1"/>
+                        <a:srgbClr val="D7D7D7"/>
                       </a:solidFill>
                       <a:prstDash val="solid"/>
                       <a:round/>
@@ -7190,7 +7259,7 @@
                     </a:lnT>
                     <a:lnB w="9525" cap="flat" cmpd="sng" algn="ctr">
                       <a:solidFill>
-                        <a:srgbClr val="CBD5E1"/>
+                        <a:srgbClr val="D7D7D7"/>
                       </a:solidFill>
                       <a:prstDash val="solid"/>
                       <a:round/>
@@ -7224,7 +7293,7 @@
                   <a:tcPr marL="109728" marR="109728" marT="54864" marB="54864" anchor="ctr">
                     <a:lnL w="9525" cap="flat" cmpd="sng" algn="ctr">
                       <a:solidFill>
-                        <a:srgbClr val="CBD5E1"/>
+                        <a:srgbClr val="D7D7D7"/>
                       </a:solidFill>
                       <a:prstDash val="solid"/>
                       <a:round/>
@@ -7233,7 +7302,7 @@
                     </a:lnL>
                     <a:lnR w="9525" cap="flat" cmpd="sng" algn="ctr">
                       <a:solidFill>
-                        <a:srgbClr val="CBD5E1"/>
+                        <a:srgbClr val="D7D7D7"/>
                       </a:solidFill>
                       <a:prstDash val="solid"/>
                       <a:round/>
@@ -7242,7 +7311,7 @@
                     </a:lnR>
                     <a:lnT w="9525" cap="flat" cmpd="sng" algn="ctr">
                       <a:solidFill>
-                        <a:srgbClr val="CBD5E1"/>
+                        <a:srgbClr val="D7D7D7"/>
                       </a:solidFill>
                       <a:prstDash val="solid"/>
                       <a:round/>
@@ -7251,7 +7320,7 @@
                     </a:lnT>
                     <a:lnB w="9525" cap="flat" cmpd="sng" algn="ctr">
                       <a:solidFill>
-                        <a:srgbClr val="CBD5E1"/>
+                        <a:srgbClr val="D7D7D7"/>
                       </a:solidFill>
                       <a:prstDash val="solid"/>
                       <a:round/>
@@ -7285,7 +7354,7 @@
                   <a:tcPr marL="109728" marR="109728" marT="54864" marB="54864" anchor="ctr">
                     <a:lnL w="9525" cap="flat" cmpd="sng" algn="ctr">
                       <a:solidFill>
-                        <a:srgbClr val="CBD5E1"/>
+                        <a:srgbClr val="D7D7D7"/>
                       </a:solidFill>
                       <a:prstDash val="solid"/>
                       <a:round/>
@@ -7294,7 +7363,7 @@
                     </a:lnL>
                     <a:lnR w="9525" cap="flat" cmpd="sng" algn="ctr">
                       <a:solidFill>
-                        <a:srgbClr val="CBD5E1"/>
+                        <a:srgbClr val="D7D7D7"/>
                       </a:solidFill>
                       <a:prstDash val="solid"/>
                       <a:round/>
@@ -7303,7 +7372,7 @@
                     </a:lnR>
                     <a:lnT w="9525" cap="flat" cmpd="sng" algn="ctr">
                       <a:solidFill>
-                        <a:srgbClr val="CBD5E1"/>
+                        <a:srgbClr val="D7D7D7"/>
                       </a:solidFill>
                       <a:prstDash val="solid"/>
                       <a:round/>
@@ -7312,7 +7381,7 @@
                     </a:lnT>
                     <a:lnB w="9525" cap="flat" cmpd="sng" algn="ctr">
                       <a:solidFill>
-                        <a:srgbClr val="CBD5E1"/>
+                        <a:srgbClr val="D7D7D7"/>
                       </a:solidFill>
                       <a:prstDash val="solid"/>
                       <a:round/>
@@ -7348,7 +7417,7 @@
                   <a:tcPr marL="109728" marR="109728" marT="54864" marB="54864" anchor="ctr">
                     <a:lnL w="9525" cap="flat" cmpd="sng" algn="ctr">
                       <a:solidFill>
-                        <a:srgbClr val="CBD5E1"/>
+                        <a:srgbClr val="D7D7D7"/>
                       </a:solidFill>
                       <a:prstDash val="solid"/>
                       <a:round/>
@@ -7357,7 +7426,7 @@
                     </a:lnL>
                     <a:lnR w="9525" cap="flat" cmpd="sng" algn="ctr">
                       <a:solidFill>
-                        <a:srgbClr val="CBD5E1"/>
+                        <a:srgbClr val="D7D7D7"/>
                       </a:solidFill>
                       <a:prstDash val="solid"/>
                       <a:round/>
@@ -7366,7 +7435,7 @@
                     </a:lnR>
                     <a:lnT w="9525" cap="flat" cmpd="sng" algn="ctr">
                       <a:solidFill>
-                        <a:srgbClr val="CBD5E1"/>
+                        <a:srgbClr val="D7D7D7"/>
                       </a:solidFill>
                       <a:prstDash val="solid"/>
                       <a:round/>
@@ -7375,7 +7444,7 @@
                     </a:lnT>
                     <a:lnB w="9525" cap="flat" cmpd="sng" algn="ctr">
                       <a:solidFill>
-                        <a:srgbClr val="CBD5E1"/>
+                        <a:srgbClr val="D7D7D7"/>
                       </a:solidFill>
                       <a:prstDash val="solid"/>
                       <a:round/>
@@ -7409,7 +7478,7 @@
                   <a:tcPr marL="109728" marR="109728" marT="54864" marB="54864" anchor="ctr">
                     <a:lnL w="9525" cap="flat" cmpd="sng" algn="ctr">
                       <a:solidFill>
-                        <a:srgbClr val="CBD5E1"/>
+                        <a:srgbClr val="D7D7D7"/>
                       </a:solidFill>
                       <a:prstDash val="solid"/>
                       <a:round/>
@@ -7418,7 +7487,7 @@
                     </a:lnL>
                     <a:lnR w="9525" cap="flat" cmpd="sng" algn="ctr">
                       <a:solidFill>
-                        <a:srgbClr val="CBD5E1"/>
+                        <a:srgbClr val="D7D7D7"/>
                       </a:solidFill>
                       <a:prstDash val="solid"/>
                       <a:round/>
@@ -7427,7 +7496,7 @@
                     </a:lnR>
                     <a:lnT w="9525" cap="flat" cmpd="sng" algn="ctr">
                       <a:solidFill>
-                        <a:srgbClr val="CBD5E1"/>
+                        <a:srgbClr val="D7D7D7"/>
                       </a:solidFill>
                       <a:prstDash val="solid"/>
                       <a:round/>
@@ -7436,7 +7505,7 @@
                     </a:lnT>
                     <a:lnB w="9525" cap="flat" cmpd="sng" algn="ctr">
                       <a:solidFill>
-                        <a:srgbClr val="CBD5E1"/>
+                        <a:srgbClr val="D7D7D7"/>
                       </a:solidFill>
                       <a:prstDash val="solid"/>
                       <a:round/>
@@ -7470,7 +7539,7 @@
                   <a:tcPr marL="109728" marR="109728" marT="54864" marB="54864" anchor="ctr">
                     <a:lnL w="9525" cap="flat" cmpd="sng" algn="ctr">
                       <a:solidFill>
-                        <a:srgbClr val="CBD5E1"/>
+                        <a:srgbClr val="D7D7D7"/>
                       </a:solidFill>
                       <a:prstDash val="solid"/>
                       <a:round/>
@@ -7479,7 +7548,7 @@
                     </a:lnL>
                     <a:lnR w="9525" cap="flat" cmpd="sng" algn="ctr">
                       <a:solidFill>
-                        <a:srgbClr val="CBD5E1"/>
+                        <a:srgbClr val="D7D7D7"/>
                       </a:solidFill>
                       <a:prstDash val="solid"/>
                       <a:round/>
@@ -7488,7 +7557,7 @@
                     </a:lnR>
                     <a:lnT w="9525" cap="flat" cmpd="sng" algn="ctr">
                       <a:solidFill>
-                        <a:srgbClr val="CBD5E1"/>
+                        <a:srgbClr val="D7D7D7"/>
                       </a:solidFill>
                       <a:prstDash val="solid"/>
                       <a:round/>
@@ -7497,7 +7566,7 @@
                     </a:lnT>
                     <a:lnB w="9525" cap="flat" cmpd="sng" algn="ctr">
                       <a:solidFill>
-                        <a:srgbClr val="CBD5E1"/>
+                        <a:srgbClr val="D7D7D7"/>
                       </a:solidFill>
                       <a:prstDash val="solid"/>
                       <a:round/>
@@ -7533,7 +7602,7 @@
                   <a:tcPr marL="109728" marR="109728" marT="54864" marB="54864" anchor="ctr">
                     <a:lnL w="9525" cap="flat" cmpd="sng" algn="ctr">
                       <a:solidFill>
-                        <a:srgbClr val="CBD5E1"/>
+                        <a:srgbClr val="D7D7D7"/>
                       </a:solidFill>
                       <a:prstDash val="solid"/>
                       <a:round/>
@@ -7542,7 +7611,7 @@
                     </a:lnL>
                     <a:lnR w="9525" cap="flat" cmpd="sng" algn="ctr">
                       <a:solidFill>
-                        <a:srgbClr val="CBD5E1"/>
+                        <a:srgbClr val="D7D7D7"/>
                       </a:solidFill>
                       <a:prstDash val="solid"/>
                       <a:round/>
@@ -7551,7 +7620,7 @@
                     </a:lnR>
                     <a:lnT w="9525" cap="flat" cmpd="sng" algn="ctr">
                       <a:solidFill>
-                        <a:srgbClr val="CBD5E1"/>
+                        <a:srgbClr val="D7D7D7"/>
                       </a:solidFill>
                       <a:prstDash val="solid"/>
                       <a:round/>
@@ -7560,7 +7629,7 @@
                     </a:lnT>
                     <a:lnB w="9525" cap="flat" cmpd="sng" algn="ctr">
                       <a:solidFill>
-                        <a:srgbClr val="CBD5E1"/>
+                        <a:srgbClr val="D7D7D7"/>
                       </a:solidFill>
                       <a:prstDash val="solid"/>
                       <a:round/>
@@ -7594,7 +7663,7 @@
                   <a:tcPr marL="109728" marR="109728" marT="54864" marB="54864" anchor="ctr">
                     <a:lnL w="9525" cap="flat" cmpd="sng" algn="ctr">
                       <a:solidFill>
-                        <a:srgbClr val="CBD5E1"/>
+                        <a:srgbClr val="D7D7D7"/>
                       </a:solidFill>
                       <a:prstDash val="solid"/>
                       <a:round/>
@@ -7603,7 +7672,7 @@
                     </a:lnL>
                     <a:lnR w="9525" cap="flat" cmpd="sng" algn="ctr">
                       <a:solidFill>
-                        <a:srgbClr val="CBD5E1"/>
+                        <a:srgbClr val="D7D7D7"/>
                       </a:solidFill>
                       <a:prstDash val="solid"/>
                       <a:round/>
@@ -7612,7 +7681,7 @@
                     </a:lnR>
                     <a:lnT w="9525" cap="flat" cmpd="sng" algn="ctr">
                       <a:solidFill>
-                        <a:srgbClr val="CBD5E1"/>
+                        <a:srgbClr val="D7D7D7"/>
                       </a:solidFill>
                       <a:prstDash val="solid"/>
                       <a:round/>
@@ -7621,7 +7690,7 @@
                     </a:lnT>
                     <a:lnB w="9525" cap="flat" cmpd="sng" algn="ctr">
                       <a:solidFill>
-                        <a:srgbClr val="CBD5E1"/>
+                        <a:srgbClr val="D7D7D7"/>
                       </a:solidFill>
                       <a:prstDash val="solid"/>
                       <a:round/>
@@ -7655,7 +7724,7 @@
                   <a:tcPr marL="109728" marR="109728" marT="54864" marB="54864" anchor="ctr">
                     <a:lnL w="9525" cap="flat" cmpd="sng" algn="ctr">
                       <a:solidFill>
-                        <a:srgbClr val="CBD5E1"/>
+                        <a:srgbClr val="D7D7D7"/>
                       </a:solidFill>
                       <a:prstDash val="solid"/>
                       <a:round/>
@@ -7664,7 +7733,7 @@
                     </a:lnL>
                     <a:lnR w="9525" cap="flat" cmpd="sng" algn="ctr">
                       <a:solidFill>
-                        <a:srgbClr val="CBD5E1"/>
+                        <a:srgbClr val="D7D7D7"/>
                       </a:solidFill>
                       <a:prstDash val="solid"/>
                       <a:round/>
@@ -7673,7 +7742,7 @@
                     </a:lnR>
                     <a:lnT w="9525" cap="flat" cmpd="sng" algn="ctr">
                       <a:solidFill>
-                        <a:srgbClr val="CBD5E1"/>
+                        <a:srgbClr val="D7D7D7"/>
                       </a:solidFill>
                       <a:prstDash val="solid"/>
                       <a:round/>
@@ -7682,7 +7751,7 @@
                     </a:lnT>
                     <a:lnB w="9525" cap="flat" cmpd="sng" algn="ctr">
                       <a:solidFill>
-                        <a:srgbClr val="CBD5E1"/>
+                        <a:srgbClr val="D7D7D7"/>
                       </a:solidFill>
                       <a:prstDash val="solid"/>
                       <a:round/>
@@ -7718,7 +7787,7 @@
                   <a:tcPr marL="109728" marR="109728" marT="54864" marB="54864" anchor="ctr">
                     <a:lnL w="9525" cap="flat" cmpd="sng" algn="ctr">
                       <a:solidFill>
-                        <a:srgbClr val="CBD5E1"/>
+                        <a:srgbClr val="D7D7D7"/>
                       </a:solidFill>
                       <a:prstDash val="solid"/>
                       <a:round/>
@@ -7727,7 +7796,7 @@
                     </a:lnL>
                     <a:lnR w="9525" cap="flat" cmpd="sng" algn="ctr">
                       <a:solidFill>
-                        <a:srgbClr val="CBD5E1"/>
+                        <a:srgbClr val="D7D7D7"/>
                       </a:solidFill>
                       <a:prstDash val="solid"/>
                       <a:round/>
@@ -7736,7 +7805,7 @@
                     </a:lnR>
                     <a:lnT w="9525" cap="flat" cmpd="sng" algn="ctr">
                       <a:solidFill>
-                        <a:srgbClr val="CBD5E1"/>
+                        <a:srgbClr val="D7D7D7"/>
                       </a:solidFill>
                       <a:prstDash val="solid"/>
                       <a:round/>
@@ -7745,7 +7814,7 @@
                     </a:lnT>
                     <a:lnB w="9525" cap="flat" cmpd="sng" algn="ctr">
                       <a:solidFill>
-                        <a:srgbClr val="CBD5E1"/>
+                        <a:srgbClr val="D7D7D7"/>
                       </a:solidFill>
                       <a:prstDash val="solid"/>
                       <a:round/>
@@ -7779,7 +7848,7 @@
                   <a:tcPr marL="109728" marR="109728" marT="54864" marB="54864" anchor="ctr">
                     <a:lnL w="9525" cap="flat" cmpd="sng" algn="ctr">
                       <a:solidFill>
-                        <a:srgbClr val="CBD5E1"/>
+                        <a:srgbClr val="D7D7D7"/>
                       </a:solidFill>
                       <a:prstDash val="solid"/>
                       <a:round/>
@@ -7788,7 +7857,7 @@
                     </a:lnL>
                     <a:lnR w="9525" cap="flat" cmpd="sng" algn="ctr">
                       <a:solidFill>
-                        <a:srgbClr val="CBD5E1"/>
+                        <a:srgbClr val="D7D7D7"/>
                       </a:solidFill>
                       <a:prstDash val="solid"/>
                       <a:round/>
@@ -7797,7 +7866,7 @@
                     </a:lnR>
                     <a:lnT w="9525" cap="flat" cmpd="sng" algn="ctr">
                       <a:solidFill>
-                        <a:srgbClr val="CBD5E1"/>
+                        <a:srgbClr val="D7D7D7"/>
                       </a:solidFill>
                       <a:prstDash val="solid"/>
                       <a:round/>
@@ -7806,7 +7875,7 @@
                     </a:lnT>
                     <a:lnB w="9525" cap="flat" cmpd="sng" algn="ctr">
                       <a:solidFill>
-                        <a:srgbClr val="CBD5E1"/>
+                        <a:srgbClr val="D7D7D7"/>
                       </a:solidFill>
                       <a:prstDash val="solid"/>
                       <a:round/>
@@ -7840,7 +7909,7 @@
                   <a:tcPr marL="109728" marR="109728" marT="54864" marB="54864" anchor="ctr">
                     <a:lnL w="9525" cap="flat" cmpd="sng" algn="ctr">
                       <a:solidFill>
-                        <a:srgbClr val="CBD5E1"/>
+                        <a:srgbClr val="D7D7D7"/>
                       </a:solidFill>
                       <a:prstDash val="solid"/>
                       <a:round/>
@@ -7849,7 +7918,7 @@
                     </a:lnL>
                     <a:lnR w="9525" cap="flat" cmpd="sng" algn="ctr">
                       <a:solidFill>
-                        <a:srgbClr val="CBD5E1"/>
+                        <a:srgbClr val="D7D7D7"/>
                       </a:solidFill>
                       <a:prstDash val="solid"/>
                       <a:round/>
@@ -7858,7 +7927,7 @@
                     </a:lnR>
                     <a:lnT w="9525" cap="flat" cmpd="sng" algn="ctr">
                       <a:solidFill>
-                        <a:srgbClr val="CBD5E1"/>
+                        <a:srgbClr val="D7D7D7"/>
                       </a:solidFill>
                       <a:prstDash val="solid"/>
                       <a:round/>
@@ -7867,7 +7936,7 @@
                     </a:lnT>
                     <a:lnB w="9525" cap="flat" cmpd="sng" algn="ctr">
                       <a:solidFill>
-                        <a:srgbClr val="CBD5E1"/>
+                        <a:srgbClr val="D7D7D7"/>
                       </a:solidFill>
                       <a:prstDash val="solid"/>
                       <a:round/>
@@ -7903,7 +7972,7 @@
                   <a:tcPr marL="109728" marR="109728" marT="54864" marB="54864" anchor="ctr">
                     <a:lnL w="9525" cap="flat" cmpd="sng" algn="ctr">
                       <a:solidFill>
-                        <a:srgbClr val="CBD5E1"/>
+                        <a:srgbClr val="D7D7D7"/>
                       </a:solidFill>
                       <a:prstDash val="solid"/>
                       <a:round/>
@@ -7912,7 +7981,7 @@
                     </a:lnL>
                     <a:lnR w="9525" cap="flat" cmpd="sng" algn="ctr">
                       <a:solidFill>
-                        <a:srgbClr val="CBD5E1"/>
+                        <a:srgbClr val="D7D7D7"/>
                       </a:solidFill>
                       <a:prstDash val="solid"/>
                       <a:round/>
@@ -7921,7 +7990,7 @@
                     </a:lnR>
                     <a:lnT w="9525" cap="flat" cmpd="sng" algn="ctr">
                       <a:solidFill>
-                        <a:srgbClr val="CBD5E1"/>
+                        <a:srgbClr val="D7D7D7"/>
                       </a:solidFill>
                       <a:prstDash val="solid"/>
                       <a:round/>
@@ -7930,7 +7999,7 @@
                     </a:lnT>
                     <a:lnB w="9525" cap="flat" cmpd="sng" algn="ctr">
                       <a:solidFill>
-                        <a:srgbClr val="CBD5E1"/>
+                        <a:srgbClr val="D7D7D7"/>
                       </a:solidFill>
                       <a:prstDash val="solid"/>
                       <a:round/>
@@ -7964,7 +8033,7 @@
                   <a:tcPr marL="109728" marR="109728" marT="54864" marB="54864" anchor="ctr">
                     <a:lnL w="9525" cap="flat" cmpd="sng" algn="ctr">
                       <a:solidFill>
-                        <a:srgbClr val="CBD5E1"/>
+                        <a:srgbClr val="D7D7D7"/>
                       </a:solidFill>
                       <a:prstDash val="solid"/>
                       <a:round/>
@@ -7973,7 +8042,7 @@
                     </a:lnL>
                     <a:lnR w="9525" cap="flat" cmpd="sng" algn="ctr">
                       <a:solidFill>
-                        <a:srgbClr val="CBD5E1"/>
+                        <a:srgbClr val="D7D7D7"/>
                       </a:solidFill>
                       <a:prstDash val="solid"/>
                       <a:round/>
@@ -7982,7 +8051,7 @@
                     </a:lnR>
                     <a:lnT w="9525" cap="flat" cmpd="sng" algn="ctr">
                       <a:solidFill>
-                        <a:srgbClr val="CBD5E1"/>
+                        <a:srgbClr val="D7D7D7"/>
                       </a:solidFill>
                       <a:prstDash val="solid"/>
                       <a:round/>
@@ -7991,7 +8060,7 @@
                     </a:lnT>
                     <a:lnB w="9525" cap="flat" cmpd="sng" algn="ctr">
                       <a:solidFill>
-                        <a:srgbClr val="CBD5E1"/>
+                        <a:srgbClr val="D7D7D7"/>
                       </a:solidFill>
                       <a:prstDash val="solid"/>
                       <a:round/>
@@ -8025,7 +8094,7 @@
                   <a:tcPr marL="109728" marR="109728" marT="54864" marB="54864" anchor="ctr">
                     <a:lnL w="9525" cap="flat" cmpd="sng" algn="ctr">
                       <a:solidFill>
-                        <a:srgbClr val="CBD5E1"/>
+                        <a:srgbClr val="D7D7D7"/>
                       </a:solidFill>
                       <a:prstDash val="solid"/>
                       <a:round/>
@@ -8034,7 +8103,7 @@
                     </a:lnL>
                     <a:lnR w="9525" cap="flat" cmpd="sng" algn="ctr">
                       <a:solidFill>
-                        <a:srgbClr val="CBD5E1"/>
+                        <a:srgbClr val="D7D7D7"/>
                       </a:solidFill>
                       <a:prstDash val="solid"/>
                       <a:round/>
@@ -8043,7 +8112,7 @@
                     </a:lnR>
                     <a:lnT w="9525" cap="flat" cmpd="sng" algn="ctr">
                       <a:solidFill>
-                        <a:srgbClr val="CBD5E1"/>
+                        <a:srgbClr val="D7D7D7"/>
                       </a:solidFill>
                       <a:prstDash val="solid"/>
                       <a:round/>
@@ -8052,7 +8121,7 @@
                     </a:lnT>
                     <a:lnB w="9525" cap="flat" cmpd="sng" algn="ctr">
                       <a:solidFill>
-                        <a:srgbClr val="CBD5E1"/>
+                        <a:srgbClr val="D7D7D7"/>
                       </a:solidFill>
                       <a:prstDash val="solid"/>
                       <a:round/>
@@ -8166,20 +8235,31 @@
               <a:buNone/>
             </a:pPr>
             <a:r>
-              <a:rPr lang="en-US" sz="2800" b="1" dirty="0">
+              <a:rPr lang="en-US" sz="2600" b="1" dirty="0">
                 <a:solidFill>
                   <a:schemeClr val="tx2"/>
                 </a:solidFill>
               </a:rPr>
-              <a:t>Tested offline, built to run on Tencent Cloud</a:t>
-            </a:r>
-            <a:endParaRPr lang="en-US" sz="2800" dirty="0"/>
-          </a:p>
-        </p:txBody>
-      </p:sp>
-      <p:sp>
-        <p:nvSpPr>
-          <p:cNvPr id="3" name="text-276"/>
+              <a:t>Tested offline,</a:t>
+            </a:r>
+            <a:pPr algn="l" indent="0" marL="0">
+              <a:buNone/>
+            </a:pPr>
+            <a:r>
+              <a:rPr lang="en-US" sz="2600" b="1" dirty="0">
+                <a:solidFill>
+                  <a:srgbClr val="8C8C8C"/>
+                </a:solidFill>
+              </a:rPr>
+              <a:t> built to run on Tencent Cloud</a:t>
+            </a:r>
+            <a:endParaRPr lang="en-US" sz="2600" dirty="0"/>
+          </a:p>
+        </p:txBody>
+      </p:sp>
+      <p:sp>
+        <p:nvSpPr>
+          <p:cNvPr id="3" name="text-287"/>
           <p:cNvSpPr txBox="1"/>
           <p:nvPr/>
         </p:nvSpPr>
@@ -8207,7 +8287,7 @@
                   <a:schemeClr val="accent1"/>
                 </a:solidFill>
               </a:rPr>
-              <a:t>674</a:t>
+              <a:t>676</a:t>
             </a:r>
             <a:endParaRPr lang="en-US" sz="4800" dirty="0"/>
           </a:p>
@@ -8215,7 +8295,7 @@
       </p:sp>
       <p:sp>
         <p:nvSpPr>
-          <p:cNvPr id="4" name="text-277"/>
+          <p:cNvPr id="4" name="text-288"/>
           <p:cNvSpPr txBox="1"/>
           <p:nvPr/>
         </p:nvSpPr>
@@ -8251,7 +8331,7 @@
       </p:sp>
       <p:sp>
         <p:nvSpPr>
-          <p:cNvPr id="5" name="text-278"/>
+          <p:cNvPr id="5" name="text-289"/>
           <p:cNvSpPr txBox="1"/>
           <p:nvPr/>
         </p:nvSpPr>
@@ -8287,7 +8367,7 @@
       </p:sp>
       <p:sp>
         <p:nvSpPr>
-          <p:cNvPr id="6" name="text-279"/>
+          <p:cNvPr id="6" name="text-290"/>
           <p:cNvSpPr txBox="1"/>
           <p:nvPr/>
         </p:nvSpPr>
@@ -8323,7 +8403,7 @@
       </p:sp>
       <p:sp>
         <p:nvSpPr>
-          <p:cNvPr id="7" name="text-280"/>
+          <p:cNvPr id="7" name="text-291"/>
           <p:cNvSpPr txBox="1"/>
           <p:nvPr/>
         </p:nvSpPr>
@@ -8359,7 +8439,7 @@
       </p:sp>
       <p:sp>
         <p:nvSpPr>
-          <p:cNvPr id="8" name="text-281"/>
+          <p:cNvPr id="8" name="text-292"/>
           <p:cNvSpPr txBox="1"/>
           <p:nvPr/>
         </p:nvSpPr>
@@ -8387,7 +8467,7 @@
                   <a:schemeClr val="tx1"/>
                 </a:solidFill>
               </a:rPr>
-              <a:t>longest a revocation at the source goes unnoticed for confidential documents; in-app grants apply on the next query</a:t>
+              <a:t>max time a source revocation goes unnoticed (confidential); in-app grants: next query</a:t>
             </a:r>
             <a:endParaRPr lang="en-US" sz="1500" dirty="0"/>
           </a:p>
@@ -8395,7 +8475,7 @@
       </p:sp>
       <p:sp>
         <p:nvSpPr>
-          <p:cNvPr id="9" name="stack-282"/>
+          <p:cNvPr id="9" name="stack-293"/>
           <p:cNvSpPr/>
           <p:nvPr/>
         </p:nvSpPr>
@@ -8406,7 +8486,7 @@
           </a:xfrm>
           <a:prstGeom prst="roundRect">
             <a:avLst>
-              <a:gd name="adj" fmla="val 1538"/>
+              <a:gd name="adj" fmla="val 962"/>
             </a:avLst>
           </a:prstGeom>
           <a:solidFill>
@@ -8417,7 +8497,7 @@
       </p:sp>
       <p:sp>
         <p:nvSpPr>
-          <p:cNvPr id="10" name="text-283"/>
+          <p:cNvPr id="10" name="text-294"/>
           <p:cNvSpPr txBox="1"/>
           <p:nvPr/>
         </p:nvSpPr>
@@ -8453,7 +8533,7 @@
       </p:sp>
       <p:sp>
         <p:nvSpPr>
-          <p:cNvPr id="11" name="pill-284"/>
+          <p:cNvPr id="11" name="pill-295"/>
           <p:cNvSpPr txBox="1"/>
           <p:nvPr/>
         </p:nvSpPr>
@@ -8493,7 +8573,7 @@
       </p:sp>
       <p:sp>
         <p:nvSpPr>
-          <p:cNvPr id="12" name="text-285"/>
+          <p:cNvPr id="12" name="text-296"/>
           <p:cNvSpPr txBox="1"/>
           <p:nvPr/>
         </p:nvSpPr>
@@ -8529,7 +8609,7 @@
       </p:sp>
       <p:sp>
         <p:nvSpPr>
-          <p:cNvPr id="13" name="pill-286"/>
+          <p:cNvPr id="13" name="pill-297"/>
           <p:cNvSpPr txBox="1"/>
           <p:nvPr/>
         </p:nvSpPr>
@@ -8569,7 +8649,7 @@
       </p:sp>
       <p:sp>
         <p:nvSpPr>
-          <p:cNvPr id="14" name="text-287"/>
+          <p:cNvPr id="14" name="text-298"/>
           <p:cNvSpPr txBox="1"/>
           <p:nvPr/>
         </p:nvSpPr>
@@ -8605,7 +8685,7 @@
       </p:sp>
       <p:sp>
         <p:nvSpPr>
-          <p:cNvPr id="15" name="pill-288"/>
+          <p:cNvPr id="15" name="pill-299"/>
           <p:cNvSpPr txBox="1"/>
           <p:nvPr/>
         </p:nvSpPr>
@@ -8645,7 +8725,7 @@
       </p:sp>
       <p:sp>
         <p:nvSpPr>
-          <p:cNvPr id="16" name="text-289"/>
+          <p:cNvPr id="16" name="text-300"/>
           <p:cNvSpPr txBox="1"/>
           <p:nvPr/>
         </p:nvSpPr>
@@ -8681,7 +8761,7 @@
       </p:sp>
       <p:sp>
         <p:nvSpPr>
-          <p:cNvPr id="17" name="pill-290"/>
+          <p:cNvPr id="17" name="pill-301"/>
           <p:cNvSpPr txBox="1"/>
           <p:nvPr/>
         </p:nvSpPr>
@@ -8721,7 +8801,7 @@
       </p:sp>
       <p:sp>
         <p:nvSpPr>
-          <p:cNvPr id="18" name="text-291"/>
+          <p:cNvPr id="18" name="text-302"/>
           <p:cNvSpPr txBox="1"/>
           <p:nvPr/>
         </p:nvSpPr>
@@ -8757,7 +8837,7 @@
       </p:sp>
       <p:sp>
         <p:nvSpPr>
-          <p:cNvPr id="19" name="pill-292"/>
+          <p:cNvPr id="19" name="pill-303"/>
           <p:cNvSpPr txBox="1"/>
           <p:nvPr/>
         </p:nvSpPr>
@@ -8797,7 +8877,7 @@
       </p:sp>
       <p:sp>
         <p:nvSpPr>
-          <p:cNvPr id="20" name="text-293"/>
+          <p:cNvPr id="20" name="text-304"/>
           <p:cNvSpPr txBox="1"/>
           <p:nvPr/>
         </p:nvSpPr>
@@ -8833,7 +8913,7 @@
       </p:sp>
       <p:sp>
         <p:nvSpPr>
-          <p:cNvPr id="21" name="pill-294"/>
+          <p:cNvPr id="21" name="pill-305"/>
           <p:cNvSpPr txBox="1"/>
           <p:nvPr/>
         </p:nvSpPr>
@@ -8873,7 +8953,7 @@
       </p:sp>
       <p:sp>
         <p:nvSpPr>
-          <p:cNvPr id="22" name="text-295"/>
+          <p:cNvPr id="22" name="text-306"/>
           <p:cNvSpPr txBox="1"/>
           <p:nvPr/>
         </p:nvSpPr>
@@ -8909,7 +8989,7 @@
       </p:sp>
       <p:sp>
         <p:nvSpPr>
-          <p:cNvPr id="23" name="text-296"/>
+          <p:cNvPr id="23" name="text-307"/>
           <p:cNvSpPr txBox="1"/>
           <p:nvPr/>
         </p:nvSpPr>
@@ -8937,7 +9017,7 @@
                   <a:schemeClr val="accent6"/>
                 </a:solidFill>
               </a:rPr>
-              <a:t>Test count: main plus PRs #9 and #10, 15 Oct 2026 (11 SQL tests run separately against Postgres).</a:t>
+              <a:t>Test count: main, 16 Oct 2026 (11 SQL tests run separately against Postgres).</a:t>
             </a:r>
             <a:endParaRPr lang="en-US" sz="1000" dirty="0"/>
           </a:p>
@@ -9045,7 +9125,18 @@
                   <a:schemeClr val="bg1"/>
                 </a:solidFill>
               </a:rPr>
-              <a:t>Ask anything. See only what you are allowed to. Prove every answer.</a:t>
+              <a:t>Ask anything. See only what you are allowed to.</a:t>
+            </a:r>
+            <a:pPr algn="l" indent="0" marL="0">
+              <a:buNone/>
+            </a:pPr>
+            <a:r>
+              <a:rPr lang="en-US" sz="4000" b="1" dirty="0">
+                <a:solidFill>
+                  <a:srgbClr val="549F58"/>
+                </a:solidFill>
+              </a:rPr>
+              <a:t> Prove every answer.</a:t>
             </a:r>
             <a:endParaRPr lang="en-US" sz="4000" dirty="0"/>
           </a:p>
@@ -9053,7 +9144,7 @@
       </p:sp>
       <p:sp>
         <p:nvSpPr>
-          <p:cNvPr id="3" name="icon-bg-297"/>
+          <p:cNvPr id="3" name="icon-bg-308"/>
           <p:cNvSpPr/>
           <p:nvPr/>
         </p:nvSpPr>
@@ -9073,7 +9164,7 @@
       </p:sp>
       <p:pic>
         <p:nvPicPr>
-          <p:cNvPr id="4" name="icon-298" descr="preencoded.png">    </p:cNvPr>
+          <p:cNvPr id="4" name="icon-309" descr="preencoded.png">    </p:cNvPr>
           <p:cNvPicPr>
             <a:picLocks noChangeAspect="1"/>
           </p:cNvPicPr>
@@ -9097,7 +9188,7 @@
       </p:pic>
       <p:sp>
         <p:nvSpPr>
-          <p:cNvPr id="5" name="text-299"/>
+          <p:cNvPr id="5" name="text-310"/>
           <p:cNvSpPr txBox="1"/>
           <p:nvPr/>
         </p:nvSpPr>
@@ -9133,7 +9224,7 @@
       </p:sp>
       <p:sp>
         <p:nvSpPr>
-          <p:cNvPr id="6" name="icon-bg-300"/>
+          <p:cNvPr id="6" name="icon-bg-311"/>
           <p:cNvSpPr/>
           <p:nvPr/>
         </p:nvSpPr>
@@ -9153,7 +9244,7 @@
       </p:sp>
       <p:pic>
         <p:nvPicPr>
-          <p:cNvPr id="7" name="icon-301" descr="preencoded.png">    </p:cNvPr>
+          <p:cNvPr id="7" name="icon-312" descr="preencoded.png">    </p:cNvPr>
           <p:cNvPicPr>
             <a:picLocks noChangeAspect="1"/>
           </p:cNvPicPr>
@@ -9177,7 +9268,7 @@
       </p:pic>
       <p:sp>
         <p:nvSpPr>
-          <p:cNvPr id="8" name="text-302"/>
+          <p:cNvPr id="8" name="text-313"/>
           <p:cNvSpPr txBox="1"/>
           <p:nvPr/>
         </p:nvSpPr>
@@ -9213,7 +9304,7 @@
       </p:sp>
       <p:sp>
         <p:nvSpPr>
-          <p:cNvPr id="9" name="icon-bg-303"/>
+          <p:cNvPr id="9" name="icon-bg-314"/>
           <p:cNvSpPr/>
           <p:nvPr/>
         </p:nvSpPr>
@@ -9233,7 +9324,7 @@
       </p:sp>
       <p:pic>
         <p:nvPicPr>
-          <p:cNvPr id="10" name="icon-304" descr="preencoded.png">    </p:cNvPr>
+          <p:cNvPr id="10" name="icon-315" descr="preencoded.png">    </p:cNvPr>
           <p:cNvPicPr>
             <a:picLocks noChangeAspect="1"/>
           </p:cNvPicPr>
@@ -9257,7 +9348,7 @@
       </p:pic>
       <p:sp>
         <p:nvSpPr>
-          <p:cNvPr id="11" name="text-305"/>
+          <p:cNvPr id="11" name="text-316"/>
           <p:cNvSpPr txBox="1"/>
           <p:nvPr/>
         </p:nvSpPr>
@@ -9293,7 +9384,7 @@
       </p:sp>
       <p:sp>
         <p:nvSpPr>
-          <p:cNvPr id="12" name="icon-bg-306"/>
+          <p:cNvPr id="12" name="icon-bg-317"/>
           <p:cNvSpPr/>
           <p:nvPr/>
         </p:nvSpPr>
@@ -9313,7 +9404,7 @@
       </p:sp>
       <p:pic>
         <p:nvPicPr>
-          <p:cNvPr id="13" name="icon-307" descr="preencoded.png">    </p:cNvPr>
+          <p:cNvPr id="13" name="icon-318" descr="preencoded.png">    </p:cNvPr>
           <p:cNvPicPr>
             <a:picLocks noChangeAspect="1"/>
           </p:cNvPicPr>
@@ -9337,7 +9428,7 @@
       </p:pic>
       <p:sp>
         <p:nvSpPr>
-          <p:cNvPr id="14" name="text-308"/>
+          <p:cNvPr id="14" name="text-319"/>
           <p:cNvSpPr txBox="1"/>
           <p:nvPr/>
         </p:nvSpPr>
@@ -9373,7 +9464,7 @@
       </p:sp>
       <p:sp>
         <p:nvSpPr>
-          <p:cNvPr id="15" name="text-309"/>
+          <p:cNvPr id="15" name="text-320"/>
           <p:cNvSpPr txBox="1"/>
           <p:nvPr/>
         </p:nvSpPr>
@@ -9398,7 +9489,7 @@
             <a:r>
               <a:rPr lang="en-US" sz="1600" dirty="0">
                 <a:solidFill>
-                  <a:srgbClr val="C9D8EE"/>
+                  <a:srgbClr val="A6A6A6"/>
                 </a:solidFill>
               </a:rPr>
               <a:t>github.com/pavan2184/tencent-hack</a:t>
@@ -9409,7 +9500,7 @@
       </p:sp>
       <p:sp>
         <p:nvSpPr>
-          <p:cNvPr id="16" name="text-310"/>
+          <p:cNvPr id="16" name="text-321"/>
           <p:cNvSpPr txBox="1"/>
           <p:nvPr/>
         </p:nvSpPr>
@@ -9434,7 +9525,7 @@
             <a:r>
               <a:rPr lang="en-US" sz="1300" dirty="0">
                 <a:solidFill>
-                  <a:srgbClr val="C9D8EE"/>
+                  <a:srgbClr val="A6A6A6"/>
                 </a:solidFill>
               </a:rPr>
               <a:t>Chai · Raphael · Pavan  ·  Tencent Cloud AI CAN DO IT Hackathon Singapore 2026</a:t>
@@ -9495,20 +9586,31 @@
               <a:buNone/>
             </a:pPr>
             <a:r>
-              <a:rPr lang="en-US" sz="2800" b="1" dirty="0">
+              <a:rPr lang="en-US" sz="2600" b="1" dirty="0">
                 <a:solidFill>
                   <a:schemeClr val="tx2"/>
                 </a:solidFill>
               </a:rPr>
-              <a:t>A chatbot on top of search fails a fintech in three ways</a:t>
-            </a:r>
-            <a:endParaRPr lang="en-US" sz="2800" dirty="0"/>
-          </a:p>
-        </p:txBody>
-      </p:sp>
-      <p:sp>
-        <p:nvSpPr>
-          <p:cNvPr id="3" name="problem-card-25"/>
+              <a:t>A chatbot on top of search fails a fintech</a:t>
+            </a:r>
+            <a:pPr algn="l" indent="0" marL="0">
+              <a:buNone/>
+            </a:pPr>
+            <a:r>
+              <a:rPr lang="en-US" sz="2600" b="1" dirty="0">
+                <a:solidFill>
+                  <a:srgbClr val="8C8C8C"/>
+                </a:solidFill>
+              </a:rPr>
+              <a:t> in three ways</a:t>
+            </a:r>
+            <a:endParaRPr lang="en-US" sz="2600" dirty="0"/>
+          </a:p>
+        </p:txBody>
+      </p:sp>
+      <p:sp>
+        <p:nvSpPr>
+          <p:cNvPr id="3" name="problem-card-26"/>
           <p:cNvSpPr/>
           <p:nvPr/>
         </p:nvSpPr>
@@ -9519,7 +9621,7 @@
           </a:xfrm>
           <a:prstGeom prst="roundRect">
             <a:avLst>
-              <a:gd name="adj" fmla="val 2254"/>
+              <a:gd name="adj" fmla="val 1408"/>
             </a:avLst>
           </a:prstGeom>
           <a:solidFill>
@@ -9530,7 +9632,7 @@
       </p:sp>
       <p:sp>
         <p:nvSpPr>
-          <p:cNvPr id="4" name="icon-bg-26"/>
+          <p:cNvPr id="4" name="icon-bg-27"/>
           <p:cNvSpPr/>
           <p:nvPr/>
         </p:nvSpPr>
@@ -9550,7 +9652,7 @@
       </p:sp>
       <p:pic>
         <p:nvPicPr>
-          <p:cNvPr id="5" name="icon-27" descr="preencoded.png">    </p:cNvPr>
+          <p:cNvPr id="5" name="icon-28" descr="preencoded.png">    </p:cNvPr>
           <p:cNvPicPr>
             <a:picLocks noChangeAspect="1"/>
           </p:cNvPicPr>
@@ -9574,7 +9676,7 @@
       </p:pic>
       <p:sp>
         <p:nvSpPr>
-          <p:cNvPr id="6" name="text-28"/>
+          <p:cNvPr id="6" name="text-29"/>
           <p:cNvSpPr txBox="1"/>
           <p:nvPr/>
         </p:nvSpPr>
@@ -9610,7 +9712,7 @@
       </p:sp>
       <p:sp>
         <p:nvSpPr>
-          <p:cNvPr id="7" name="text-29"/>
+          <p:cNvPr id="7" name="text-30"/>
           <p:cNvSpPr txBox="1"/>
           <p:nvPr/>
         </p:nvSpPr>
@@ -9646,7 +9748,7 @@
       </p:sp>
       <p:sp>
         <p:nvSpPr>
-          <p:cNvPr id="8" name="problem-card-30"/>
+          <p:cNvPr id="8" name="problem-card-31"/>
           <p:cNvSpPr/>
           <p:nvPr/>
         </p:nvSpPr>
@@ -9657,7 +9759,7 @@
           </a:xfrm>
           <a:prstGeom prst="roundRect">
             <a:avLst>
-              <a:gd name="adj" fmla="val 2254"/>
+              <a:gd name="adj" fmla="val 1408"/>
             </a:avLst>
           </a:prstGeom>
           <a:solidFill>
@@ -9668,7 +9770,7 @@
       </p:sp>
       <p:sp>
         <p:nvSpPr>
-          <p:cNvPr id="9" name="icon-bg-31"/>
+          <p:cNvPr id="9" name="icon-bg-32"/>
           <p:cNvSpPr/>
           <p:nvPr/>
         </p:nvSpPr>
@@ -9688,7 +9790,7 @@
       </p:sp>
       <p:pic>
         <p:nvPicPr>
-          <p:cNvPr id="10" name="icon-32" descr="preencoded.png">    </p:cNvPr>
+          <p:cNvPr id="10" name="icon-33" descr="preencoded.png">    </p:cNvPr>
           <p:cNvPicPr>
             <a:picLocks noChangeAspect="1"/>
           </p:cNvPicPr>
@@ -9712,7 +9814,7 @@
       </p:pic>
       <p:sp>
         <p:nvSpPr>
-          <p:cNvPr id="11" name="text-33"/>
+          <p:cNvPr id="11" name="text-34"/>
           <p:cNvSpPr txBox="1"/>
           <p:nvPr/>
         </p:nvSpPr>
@@ -9748,7 +9850,7 @@
       </p:sp>
       <p:sp>
         <p:nvSpPr>
-          <p:cNvPr id="12" name="text-34"/>
+          <p:cNvPr id="12" name="text-35"/>
           <p:cNvSpPr txBox="1"/>
           <p:nvPr/>
         </p:nvSpPr>
@@ -9784,7 +9886,7 @@
       </p:sp>
       <p:sp>
         <p:nvSpPr>
-          <p:cNvPr id="13" name="problem-card-35"/>
+          <p:cNvPr id="13" name="problem-card-36"/>
           <p:cNvSpPr/>
           <p:nvPr/>
         </p:nvSpPr>
@@ -9795,7 +9897,7 @@
           </a:xfrm>
           <a:prstGeom prst="roundRect">
             <a:avLst>
-              <a:gd name="adj" fmla="val 2254"/>
+              <a:gd name="adj" fmla="val 1408"/>
             </a:avLst>
           </a:prstGeom>
           <a:solidFill>
@@ -9806,7 +9908,7 @@
       </p:sp>
       <p:sp>
         <p:nvSpPr>
-          <p:cNvPr id="14" name="icon-bg-36"/>
+          <p:cNvPr id="14" name="icon-bg-37"/>
           <p:cNvSpPr/>
           <p:nvPr/>
         </p:nvSpPr>
@@ -9826,7 +9928,7 @@
       </p:sp>
       <p:pic>
         <p:nvPicPr>
-          <p:cNvPr id="15" name="icon-37" descr="preencoded.png">    </p:cNvPr>
+          <p:cNvPr id="15" name="icon-38" descr="preencoded.png">    </p:cNvPr>
           <p:cNvPicPr>
             <a:picLocks noChangeAspect="1"/>
           </p:cNvPicPr>
@@ -9850,7 +9952,7 @@
       </p:pic>
       <p:sp>
         <p:nvSpPr>
-          <p:cNvPr id="16" name="text-38"/>
+          <p:cNvPr id="16" name="text-39"/>
           <p:cNvSpPr txBox="1"/>
           <p:nvPr/>
         </p:nvSpPr>
@@ -9886,7 +9988,7 @@
       </p:sp>
       <p:sp>
         <p:nvSpPr>
-          <p:cNvPr id="17" name="text-39"/>
+          <p:cNvPr id="17" name="text-40"/>
           <p:cNvSpPr txBox="1"/>
           <p:nvPr/>
         </p:nvSpPr>
@@ -9922,7 +10024,7 @@
       </p:sp>
       <p:sp>
         <p:nvSpPr>
-          <p:cNvPr id="18" name="context-band-40"/>
+          <p:cNvPr id="18" name="context-band-41"/>
           <p:cNvSpPr/>
           <p:nvPr/>
         </p:nvSpPr>
@@ -9933,7 +10035,7 @@
           </a:xfrm>
           <a:prstGeom prst="roundRect">
             <a:avLst>
-              <a:gd name="adj" fmla="val 6667"/>
+              <a:gd name="adj" fmla="val 4167"/>
             </a:avLst>
           </a:prstGeom>
           <a:solidFill>
@@ -9944,7 +10046,7 @@
       </p:sp>
       <p:sp>
         <p:nvSpPr>
-          <p:cNvPr id="19" name="text-41"/>
+          <p:cNvPr id="19" name="text-42"/>
           <p:cNvSpPr txBox="1"/>
           <p:nvPr/>
         </p:nvSpPr>
@@ -9980,7 +10082,7 @@
       </p:sp>
       <p:sp>
         <p:nvSpPr>
-          <p:cNvPr id="20" name="text-42"/>
+          <p:cNvPr id="20" name="text-43"/>
           <p:cNvSpPr txBox="1"/>
           <p:nvPr/>
         </p:nvSpPr>
@@ -10005,7 +10107,7 @@
             <a:r>
               <a:rPr lang="en-US" sz="1300" dirty="0">
                 <a:solidFill>
-                  <a:srgbClr val="C9D8EE"/>
+                  <a:srgbClr val="A6A6A6"/>
                 </a:solidFill>
               </a:rPr>
               <a:t>employees</a:t>
@@ -10016,7 +10118,7 @@
       </p:sp>
       <p:sp>
         <p:nvSpPr>
-          <p:cNvPr id="21" name="text-43"/>
+          <p:cNvPr id="21" name="text-44"/>
           <p:cNvSpPr txBox="1"/>
           <p:nvPr/>
         </p:nvSpPr>
@@ -10052,7 +10154,7 @@
       </p:sp>
       <p:sp>
         <p:nvSpPr>
-          <p:cNvPr id="22" name="text-44"/>
+          <p:cNvPr id="22" name="text-45"/>
           <p:cNvSpPr txBox="1"/>
           <p:nvPr/>
         </p:nvSpPr>
@@ -10077,7 +10179,7 @@
             <a:r>
               <a:rPr lang="en-US" sz="1300" dirty="0">
                 <a:solidFill>
-                  <a:srgbClr val="C9D8EE"/>
+                  <a:srgbClr val="A6A6A6"/>
                 </a:solidFill>
               </a:rPr>
               <a:t>countries</a:t>
@@ -10088,7 +10190,7 @@
       </p:sp>
       <p:sp>
         <p:nvSpPr>
-          <p:cNvPr id="23" name="text-45"/>
+          <p:cNvPr id="23" name="text-46"/>
           <p:cNvSpPr txBox="1"/>
           <p:nvPr/>
         </p:nvSpPr>
@@ -10124,7 +10226,7 @@
       </p:sp>
       <p:sp>
         <p:nvSpPr>
-          <p:cNvPr id="24" name="text-46"/>
+          <p:cNvPr id="24" name="text-47"/>
           <p:cNvSpPr txBox="1"/>
           <p:nvPr/>
         </p:nvSpPr>
@@ -10149,7 +10251,7 @@
             <a:r>
               <a:rPr lang="en-US" sz="1300" dirty="0">
                 <a:solidFill>
-                  <a:srgbClr val="C9D8EE"/>
+                  <a:srgbClr val="A6A6A6"/>
                 </a:solidFill>
               </a:rPr>
               <a:t>client markets</a:t>
@@ -10160,7 +10262,7 @@
       </p:sp>
       <p:sp>
         <p:nvSpPr>
-          <p:cNvPr id="25" name="text-47"/>
+          <p:cNvPr id="25" name="text-48"/>
           <p:cNvSpPr txBox="1"/>
           <p:nvPr/>
         </p:nvSpPr>
@@ -10196,7 +10298,7 @@
       </p:sp>
       <p:sp>
         <p:nvSpPr>
-          <p:cNvPr id="26" name="text-48"/>
+          <p:cNvPr id="26" name="text-49"/>
           <p:cNvSpPr txBox="1"/>
           <p:nvPr/>
         </p:nvSpPr>
@@ -10221,7 +10323,7 @@
             <a:r>
               <a:rPr lang="en-US" sz="1300" dirty="0">
                 <a:solidFill>
-                  <a:srgbClr val="C9D8EE"/>
+                  <a:srgbClr val="A6A6A6"/>
                 </a:solidFill>
               </a:rPr>
               <a:t>platforms, 4 permission models</a:t>
@@ -10232,7 +10334,7 @@
       </p:sp>
       <p:sp>
         <p:nvSpPr>
-          <p:cNvPr id="27" name="text-49"/>
+          <p:cNvPr id="27" name="text-50"/>
           <p:cNvSpPr txBox="1"/>
           <p:nvPr/>
         </p:nvSpPr>
@@ -10257,7 +10359,7 @@
             <a:r>
               <a:rPr lang="en-US" sz="1100" i="1" dirty="0">
                 <a:solidFill>
-                  <a:srgbClr val="C9D8EE"/>
+                  <a:srgbClr val="A6A6A6"/>
                 </a:solidFill>
               </a:rPr>
               <a:t>Aspire, per the challenge brief</a:t>
@@ -10363,42 +10465,53 @@
               <a:buNone/>
             </a:pPr>
             <a:r>
-              <a:rPr lang="en-US" sz="2800" b="1" dirty="0">
+              <a:rPr lang="en-US" sz="2600" b="1" dirty="0">
                 <a:solidFill>
                   <a:schemeClr val="tx2"/>
                 </a:solidFill>
               </a:rPr>
-              <a:t>Our answer: one governed pipeline, four guarantees on every response</a:t>
-            </a:r>
-            <a:endParaRPr lang="en-US" sz="2800" dirty="0"/>
-          </a:p>
-        </p:txBody>
-      </p:sp>
-      <p:sp>
-        <p:nvSpPr>
-          <p:cNvPr id="3" name="pillar-50"/>
+              <a:t>One governed pipeline,</a:t>
+            </a:r>
+            <a:pPr algn="l" indent="0" marL="0">
+              <a:buNone/>
+            </a:pPr>
+            <a:r>
+              <a:rPr lang="en-US" sz="2600" b="1" dirty="0">
+                <a:solidFill>
+                  <a:srgbClr val="8C8C8C"/>
+                </a:solidFill>
+              </a:rPr>
+              <a:t> four guarantees on every answer</a:t>
+            </a:r>
+            <a:endParaRPr lang="en-US" sz="2600" dirty="0"/>
+          </a:p>
+        </p:txBody>
+      </p:sp>
+      <p:sp>
+        <p:nvSpPr>
+          <p:cNvPr id="3" name="pillar-51"/>
           <p:cNvSpPr/>
           <p:nvPr/>
         </p:nvSpPr>
         <p:spPr>
           <a:xfrm>
             <a:off x="548640" y="1417320"/>
-            <a:ext cx="2606040" cy="3429000"/>
+            <a:ext cx="2606040" cy="3657600"/>
           </a:xfrm>
           <a:prstGeom prst="roundRect">
             <a:avLst>
-              <a:gd name="adj" fmla="val 2807"/>
+              <a:gd name="adj" fmla="val 1754"/>
             </a:avLst>
           </a:prstGeom>
           <a:solidFill>
-            <a:srgbClr val="E3F5F2"/>
+            <a:srgbClr val="EAF3EA"/>
           </a:solidFill>
           <a:ln/>
         </p:spPr>
       </p:sp>
       <p:sp>
         <p:nvSpPr>
-          <p:cNvPr id="4" name="icon-bg-51"/>
+          <p:cNvPr id="4" name="icon-bg-52"/>
           <p:cNvSpPr/>
           <p:nvPr/>
         </p:nvSpPr>
@@ -10418,7 +10531,7 @@
       </p:sp>
       <p:pic>
         <p:nvPicPr>
-          <p:cNvPr id="5" name="icon-52" descr="preencoded.png">    </p:cNvPr>
+          <p:cNvPr id="5" name="icon-53" descr="preencoded.png">    </p:cNvPr>
           <p:cNvPicPr>
             <a:picLocks noChangeAspect="1"/>
           </p:cNvPicPr>
@@ -10442,7 +10555,7 @@
       </p:pic>
       <p:sp>
         <p:nvSpPr>
-          <p:cNvPr id="6" name="text-53"/>
+          <p:cNvPr id="6" name="text-54"/>
           <p:cNvSpPr txBox="1"/>
           <p:nvPr/>
         </p:nvSpPr>
@@ -10478,7 +10591,7 @@
       </p:sp>
       <p:sp>
         <p:nvSpPr>
-          <p:cNvPr id="7" name="text-54"/>
+          <p:cNvPr id="7" name="text-55"/>
           <p:cNvSpPr txBox="1"/>
           <p:nvPr/>
         </p:nvSpPr>
@@ -10514,29 +10627,29 @@
       </p:sp>
       <p:sp>
         <p:nvSpPr>
-          <p:cNvPr id="8" name="pillar-55"/>
+          <p:cNvPr id="8" name="pillar-56"/>
           <p:cNvSpPr/>
           <p:nvPr/>
         </p:nvSpPr>
         <p:spPr>
           <a:xfrm>
             <a:off x="3364992" y="1417320"/>
-            <a:ext cx="2606040" cy="3429000"/>
+            <a:ext cx="2606040" cy="3657600"/>
           </a:xfrm>
           <a:prstGeom prst="roundRect">
             <a:avLst>
-              <a:gd name="adj" fmla="val 2807"/>
+              <a:gd name="adj" fmla="val 1754"/>
             </a:avLst>
           </a:prstGeom>
           <a:solidFill>
-            <a:srgbClr val="FDF4E4"/>
+            <a:srgbClr val="FCF3E3"/>
           </a:solidFill>
           <a:ln/>
         </p:spPr>
       </p:sp>
       <p:sp>
         <p:nvSpPr>
-          <p:cNvPr id="9" name="icon-bg-56"/>
+          <p:cNvPr id="9" name="icon-bg-57"/>
           <p:cNvSpPr/>
           <p:nvPr/>
         </p:nvSpPr>
@@ -10556,7 +10669,7 @@
       </p:sp>
       <p:pic>
         <p:nvPicPr>
-          <p:cNvPr id="10" name="icon-57" descr="preencoded.png">    </p:cNvPr>
+          <p:cNvPr id="10" name="icon-58" descr="preencoded.png">    </p:cNvPr>
           <p:cNvPicPr>
             <a:picLocks noChangeAspect="1"/>
           </p:cNvPicPr>
@@ -10580,7 +10693,7 @@
       </p:pic>
       <p:sp>
         <p:nvSpPr>
-          <p:cNvPr id="11" name="text-58"/>
+          <p:cNvPr id="11" name="text-59"/>
           <p:cNvSpPr txBox="1"/>
           <p:nvPr/>
         </p:nvSpPr>
@@ -10616,7 +10729,7 @@
       </p:sp>
       <p:sp>
         <p:nvSpPr>
-          <p:cNvPr id="12" name="text-59"/>
+          <p:cNvPr id="12" name="text-60"/>
           <p:cNvSpPr txBox="1"/>
           <p:nvPr/>
         </p:nvSpPr>
@@ -10652,29 +10765,29 @@
       </p:sp>
       <p:sp>
         <p:nvSpPr>
-          <p:cNvPr id="13" name="pillar-60"/>
+          <p:cNvPr id="13" name="pillar-61"/>
           <p:cNvSpPr/>
           <p:nvPr/>
         </p:nvSpPr>
         <p:spPr>
           <a:xfrm>
             <a:off x="6181344" y="1417320"/>
-            <a:ext cx="2606040" cy="3429000"/>
+            <a:ext cx="2606040" cy="3657600"/>
           </a:xfrm>
           <a:prstGeom prst="roundRect">
             <a:avLst>
-              <a:gd name="adj" fmla="val 2807"/>
+              <a:gd name="adj" fmla="val 1754"/>
             </a:avLst>
           </a:prstGeom>
           <a:solidFill>
-            <a:srgbClr val="E8F0FC"/>
+            <a:srgbClr val="F5F5F5"/>
           </a:solidFill>
           <a:ln/>
         </p:spPr>
       </p:sp>
       <p:sp>
         <p:nvSpPr>
-          <p:cNvPr id="14" name="icon-bg-61"/>
+          <p:cNvPr id="14" name="icon-bg-62"/>
           <p:cNvSpPr/>
           <p:nvPr/>
         </p:nvSpPr>
@@ -10694,7 +10807,7 @@
       </p:sp>
       <p:pic>
         <p:nvPicPr>
-          <p:cNvPr id="15" name="icon-62" descr="preencoded.png">    </p:cNvPr>
+          <p:cNvPr id="15" name="icon-63" descr="preencoded.png">    </p:cNvPr>
           <p:cNvPicPr>
             <a:picLocks noChangeAspect="1"/>
           </p:cNvPicPr>
@@ -10718,7 +10831,7 @@
       </p:pic>
       <p:sp>
         <p:nvSpPr>
-          <p:cNvPr id="16" name="text-63"/>
+          <p:cNvPr id="16" name="text-64"/>
           <p:cNvSpPr txBox="1"/>
           <p:nvPr/>
         </p:nvSpPr>
@@ -10754,7 +10867,7 @@
       </p:sp>
       <p:sp>
         <p:nvSpPr>
-          <p:cNvPr id="17" name="text-64"/>
+          <p:cNvPr id="17" name="text-65"/>
           <p:cNvSpPr txBox="1"/>
           <p:nvPr/>
         </p:nvSpPr>
@@ -10790,29 +10903,29 @@
       </p:sp>
       <p:sp>
         <p:nvSpPr>
-          <p:cNvPr id="18" name="pillar-65"/>
+          <p:cNvPr id="18" name="pillar-66"/>
           <p:cNvSpPr/>
           <p:nvPr/>
         </p:nvSpPr>
         <p:spPr>
           <a:xfrm>
             <a:off x="8997696" y="1417320"/>
-            <a:ext cx="2606040" cy="3429000"/>
+            <a:ext cx="2606040" cy="3657600"/>
           </a:xfrm>
           <a:prstGeom prst="roundRect">
             <a:avLst>
-              <a:gd name="adj" fmla="val 2807"/>
+              <a:gd name="adj" fmla="val 1754"/>
             </a:avLst>
           </a:prstGeom>
           <a:solidFill>
-            <a:srgbClr val="EFEBFB"/>
+            <a:srgbClr val="F5F5F5"/>
           </a:solidFill>
           <a:ln/>
         </p:spPr>
       </p:sp>
       <p:sp>
         <p:nvSpPr>
-          <p:cNvPr id="19" name="icon-bg-66"/>
+          <p:cNvPr id="19" name="icon-bg-67"/>
           <p:cNvSpPr/>
           <p:nvPr/>
         </p:nvSpPr>
@@ -10832,7 +10945,7 @@
       </p:sp>
       <p:pic>
         <p:nvPicPr>
-          <p:cNvPr id="20" name="icon-67" descr="preencoded.png">    </p:cNvPr>
+          <p:cNvPr id="20" name="icon-68" descr="preencoded.png">    </p:cNvPr>
           <p:cNvPicPr>
             <a:picLocks noChangeAspect="1"/>
           </p:cNvPicPr>
@@ -10856,7 +10969,7 @@
       </p:pic>
       <p:sp>
         <p:nvSpPr>
-          <p:cNvPr id="21" name="text-68"/>
+          <p:cNvPr id="21" name="text-69"/>
           <p:cNvSpPr txBox="1"/>
           <p:nvPr/>
         </p:nvSpPr>
@@ -10892,7 +11005,7 @@
       </p:sp>
       <p:sp>
         <p:nvSpPr>
-          <p:cNvPr id="22" name="text-69"/>
+          <p:cNvPr id="22" name="text-70"/>
           <p:cNvSpPr txBox="1"/>
           <p:nvPr/>
         </p:nvSpPr>
@@ -10928,13 +11041,13 @@
       </p:sp>
       <p:sp>
         <p:nvSpPr>
-          <p:cNvPr id="23" name="text-70"/>
+          <p:cNvPr id="23" name="text-71"/>
           <p:cNvSpPr txBox="1"/>
           <p:nvPr/>
         </p:nvSpPr>
         <p:spPr>
           <a:xfrm>
-            <a:off x="548640" y="5074920"/>
+            <a:off x="548640" y="5257800"/>
             <a:ext cx="11064240" cy="548640"/>
           </a:xfrm>
           <a:prstGeom prst="rect">
@@ -11070,20 +11183,31 @@
               <a:buNone/>
             </a:pPr>
             <a:r>
-              <a:rPr lang="en-US" sz="2800" b="1" dirty="0">
+              <a:rPr lang="en-US" sz="2600" b="1" dirty="0">
                 <a:solidFill>
                   <a:schemeClr val="tx2"/>
                 </a:solidFill>
               </a:rPr>
-              <a:t>Restricted evidence never reaches the language model</a:t>
-            </a:r>
-            <a:endParaRPr lang="en-US" sz="2800" dirty="0"/>
-          </a:p>
-        </p:txBody>
-      </p:sp>
-      <p:sp>
-        <p:nvSpPr>
-          <p:cNvPr id="3" name="zone-untrusted-71"/>
+              <a:t>Restricted evidence never reaches</a:t>
+            </a:r>
+            <a:pPr algn="l" indent="0" marL="0">
+              <a:buNone/>
+            </a:pPr>
+            <a:r>
+              <a:rPr lang="en-US" sz="2600" b="1" dirty="0">
+                <a:solidFill>
+                  <a:srgbClr val="8C8C8C"/>
+                </a:solidFill>
+              </a:rPr>
+              <a:t> the language model</a:t>
+            </a:r>
+            <a:endParaRPr lang="en-US" sz="2600" dirty="0"/>
+          </a:p>
+        </p:txBody>
+      </p:sp>
+      <p:sp>
+        <p:nvSpPr>
+          <p:cNvPr id="3" name="zone-untrusted-72"/>
           <p:cNvSpPr/>
           <p:nvPr/>
         </p:nvSpPr>
@@ -11110,7 +11234,7 @@
       </p:sp>
       <p:sp>
         <p:nvSpPr>
-          <p:cNvPr id="4" name="text-72"/>
+          <p:cNvPr id="4" name="text-73"/>
           <p:cNvSpPr txBox="1"/>
           <p:nvPr/>
         </p:nvSpPr>
@@ -11146,7 +11270,7 @@
       </p:sp>
       <p:sp>
         <p:nvSpPr>
-          <p:cNvPr id="5" name="zone-server-73"/>
+          <p:cNvPr id="5" name="zone-server-74"/>
           <p:cNvSpPr/>
           <p:nvPr/>
         </p:nvSpPr>
@@ -11161,14 +11285,14 @@
             </a:avLst>
           </a:prstGeom>
           <a:solidFill>
-            <a:srgbClr val="EEF3F8"/>
+            <a:srgbClr val="F5F5F5"/>
           </a:solidFill>
           <a:ln/>
         </p:spPr>
       </p:sp>
       <p:sp>
         <p:nvSpPr>
-          <p:cNvPr id="6" name="text-74"/>
+          <p:cNvPr id="6" name="text-75"/>
           <p:cNvSpPr txBox="1"/>
           <p:nvPr/>
         </p:nvSpPr>
@@ -11204,7 +11328,7 @@
       </p:sp>
       <p:sp>
         <p:nvSpPr>
-          <p:cNvPr id="7" name="zone-model-75"/>
+          <p:cNvPr id="7" name="zone-model-76"/>
           <p:cNvSpPr/>
           <p:nvPr/>
         </p:nvSpPr>
@@ -11219,7 +11343,7 @@
             </a:avLst>
           </a:prstGeom>
           <a:solidFill>
-            <a:srgbClr val="EFEBFB"/>
+            <a:srgbClr val="F5F5F5"/>
           </a:solidFill>
           <a:ln w="12700">
             <a:solidFill>
@@ -11231,7 +11355,7 @@
       </p:sp>
       <p:sp>
         <p:nvSpPr>
-          <p:cNvPr id="8" name="text-76"/>
+          <p:cNvPr id="8" name="text-77"/>
           <p:cNvSpPr txBox="1"/>
           <p:nvPr/>
         </p:nvSpPr>
@@ -11267,7 +11391,7 @@
       </p:sp>
       <p:sp>
         <p:nvSpPr>
-          <p:cNvPr id="9" name="zone-server-2-77"/>
+          <p:cNvPr id="9" name="zone-server-2-78"/>
           <p:cNvSpPr/>
           <p:nvPr/>
         </p:nvSpPr>
@@ -11282,14 +11406,14 @@
             </a:avLst>
           </a:prstGeom>
           <a:solidFill>
-            <a:srgbClr val="EEF3F8"/>
+            <a:srgbClr val="F5F5F5"/>
           </a:solidFill>
           <a:ln/>
         </p:spPr>
       </p:sp>
       <p:sp>
         <p:nvSpPr>
-          <p:cNvPr id="10" name="text-78"/>
+          <p:cNvPr id="10" name="text-79"/>
           <p:cNvSpPr txBox="1"/>
           <p:nvPr/>
         </p:nvSpPr>
@@ -11325,7 +11449,7 @@
       </p:sp>
       <p:sp>
         <p:nvSpPr>
-          <p:cNvPr id="11" name="step-79"/>
+          <p:cNvPr id="11" name="step-80"/>
           <p:cNvSpPr/>
           <p:nvPr/>
         </p:nvSpPr>
@@ -11336,7 +11460,7 @@
           </a:xfrm>
           <a:prstGeom prst="roundRect">
             <a:avLst>
-              <a:gd name="adj" fmla="val 6061"/>
+              <a:gd name="adj" fmla="val 3788"/>
             </a:avLst>
           </a:prstGeom>
           <a:solidFill>
@@ -11352,7 +11476,7 @@
       </p:sp>
       <p:sp>
         <p:nvSpPr>
-          <p:cNvPr id="12" name="text-80"/>
+          <p:cNvPr id="12" name="text-81"/>
           <p:cNvSpPr txBox="1"/>
           <p:nvPr/>
         </p:nvSpPr>
@@ -11388,7 +11512,7 @@
       </p:sp>
       <p:sp>
         <p:nvSpPr>
-          <p:cNvPr id="13" name="text-81"/>
+          <p:cNvPr id="13" name="text-82"/>
           <p:cNvSpPr txBox="1"/>
           <p:nvPr/>
         </p:nvSpPr>
@@ -11411,20 +11535,20 @@
               <a:buNone/>
             </a:pPr>
             <a:r>
-              <a:rPr lang="en-US" sz="1100" dirty="0">
+              <a:rPr lang="en-US" sz="1050" dirty="0">
                 <a:solidFill>
                   <a:schemeClr val="tx1"/>
                 </a:solidFill>
               </a:rPr>
               <a:t>Employee, contractor, auditor or agent</a:t>
             </a:r>
-            <a:endParaRPr lang="en-US" sz="1100" dirty="0"/>
-          </a:p>
-        </p:txBody>
-      </p:sp>
-      <p:sp>
-        <p:nvSpPr>
-          <p:cNvPr id="14" name="arrow-82"/>
+            <a:endParaRPr lang="en-US" sz="1050" dirty="0"/>
+          </a:p>
+        </p:txBody>
+      </p:sp>
+      <p:sp>
+        <p:nvSpPr>
+          <p:cNvPr id="14" name="arrow-83"/>
           <p:cNvSpPr/>
           <p:nvPr/>
         </p:nvSpPr>
@@ -11448,7 +11572,7 @@
       </p:sp>
       <p:sp>
         <p:nvSpPr>
-          <p:cNvPr id="15" name="step-83"/>
+          <p:cNvPr id="15" name="step-84"/>
           <p:cNvSpPr/>
           <p:nvPr/>
         </p:nvSpPr>
@@ -11459,7 +11583,7 @@
           </a:xfrm>
           <a:prstGeom prst="roundRect">
             <a:avLst>
-              <a:gd name="adj" fmla="val 6061"/>
+              <a:gd name="adj" fmla="val 3788"/>
             </a:avLst>
           </a:prstGeom>
           <a:solidFill>
@@ -11475,7 +11599,7 @@
       </p:sp>
       <p:sp>
         <p:nvSpPr>
-          <p:cNvPr id="16" name="text-84"/>
+          <p:cNvPr id="16" name="text-85"/>
           <p:cNvSpPr txBox="1"/>
           <p:nvPr/>
         </p:nvSpPr>
@@ -11511,7 +11635,7 @@
       </p:sp>
       <p:sp>
         <p:nvSpPr>
-          <p:cNvPr id="17" name="text-85"/>
+          <p:cNvPr id="17" name="text-86"/>
           <p:cNvSpPr txBox="1"/>
           <p:nvPr/>
         </p:nvSpPr>
@@ -11534,20 +11658,20 @@
               <a:buNone/>
             </a:pPr>
             <a:r>
-              <a:rPr lang="en-US" sz="1100" dirty="0">
+              <a:rPr lang="en-US" sz="1050" dirty="0">
                 <a:solidFill>
                   <a:schemeClr val="tx1"/>
                 </a:solidFill>
               </a:rPr>
               <a:t>Resolved server-side; demo personas, SSO in production</a:t>
             </a:r>
-            <a:endParaRPr lang="en-US" sz="1100" dirty="0"/>
-          </a:p>
-        </p:txBody>
-      </p:sp>
-      <p:sp>
-        <p:nvSpPr>
-          <p:cNvPr id="18" name="arrow-86"/>
+            <a:endParaRPr lang="en-US" sz="1050" dirty="0"/>
+          </a:p>
+        </p:txBody>
+      </p:sp>
+      <p:sp>
+        <p:nvSpPr>
+          <p:cNvPr id="18" name="arrow-87"/>
           <p:cNvSpPr/>
           <p:nvPr/>
         </p:nvSpPr>
@@ -11571,7 +11695,7 @@
       </p:sp>
       <p:sp>
         <p:nvSpPr>
-          <p:cNvPr id="19" name="step-87"/>
+          <p:cNvPr id="19" name="step-88"/>
           <p:cNvSpPr/>
           <p:nvPr/>
         </p:nvSpPr>
@@ -11582,7 +11706,7 @@
           </a:xfrm>
           <a:prstGeom prst="roundRect">
             <a:avLst>
-              <a:gd name="adj" fmla="val 6061"/>
+              <a:gd name="adj" fmla="val 3788"/>
             </a:avLst>
           </a:prstGeom>
           <a:solidFill>
@@ -11598,7 +11722,7 @@
       </p:sp>
       <p:sp>
         <p:nvSpPr>
-          <p:cNvPr id="20" name="text-88"/>
+          <p:cNvPr id="20" name="text-89"/>
           <p:cNvSpPr txBox="1"/>
           <p:nvPr/>
         </p:nvSpPr>
@@ -11634,7 +11758,7 @@
       </p:sp>
       <p:sp>
         <p:nvSpPr>
-          <p:cNvPr id="21" name="text-89"/>
+          <p:cNvPr id="21" name="text-90"/>
           <p:cNvSpPr txBox="1"/>
           <p:nvPr/>
         </p:nvSpPr>
@@ -11657,20 +11781,20 @@
               <a:buNone/>
             </a:pPr>
             <a:r>
-              <a:rPr lang="en-US" sz="1100" dirty="0">
+              <a:rPr lang="en-US" sz="1050" dirty="0">
                 <a:solidFill>
                   <a:schemeClr val="tx1"/>
                 </a:solidFill>
               </a:rPr>
               <a:t>Hybrid keyword + vector search across all four sources</a:t>
             </a:r>
-            <a:endParaRPr lang="en-US" sz="1100" dirty="0"/>
-          </a:p>
-        </p:txBody>
-      </p:sp>
-      <p:sp>
-        <p:nvSpPr>
-          <p:cNvPr id="22" name="arrow-90"/>
+            <a:endParaRPr lang="en-US" sz="1050" dirty="0"/>
+          </a:p>
+        </p:txBody>
+      </p:sp>
+      <p:sp>
+        <p:nvSpPr>
+          <p:cNvPr id="22" name="arrow-91"/>
           <p:cNvSpPr/>
           <p:nvPr/>
         </p:nvSpPr>
@@ -11694,7 +11818,7 @@
       </p:sp>
       <p:sp>
         <p:nvSpPr>
-          <p:cNvPr id="23" name="step-91"/>
+          <p:cNvPr id="23" name="step-92"/>
           <p:cNvSpPr/>
           <p:nvPr/>
         </p:nvSpPr>
@@ -11705,11 +11829,11 @@
           </a:xfrm>
           <a:prstGeom prst="roundRect">
             <a:avLst>
-              <a:gd name="adj" fmla="val 6061"/>
+              <a:gd name="adj" fmla="val 3788"/>
             </a:avLst>
           </a:prstGeom>
           <a:solidFill>
-            <a:srgbClr val="E3F5F2"/>
+            <a:srgbClr val="EAF3EA"/>
           </a:solidFill>
           <a:ln w="28575">
             <a:solidFill>
@@ -11721,7 +11845,7 @@
       </p:sp>
       <p:sp>
         <p:nvSpPr>
-          <p:cNvPr id="24" name="text-92"/>
+          <p:cNvPr id="24" name="text-93"/>
           <p:cNvSpPr txBox="1"/>
           <p:nvPr/>
         </p:nvSpPr>
@@ -11757,7 +11881,7 @@
       </p:sp>
       <p:sp>
         <p:nvSpPr>
-          <p:cNvPr id="25" name="text-93"/>
+          <p:cNvPr id="25" name="text-94"/>
           <p:cNvSpPr txBox="1"/>
           <p:nvPr/>
         </p:nvSpPr>
@@ -11780,20 +11904,20 @@
               <a:buNone/>
             </a:pPr>
             <a:r>
-              <a:rPr lang="en-US" sz="1100" dirty="0">
+              <a:rPr lang="en-US" sz="1050" dirty="0">
                 <a:solidFill>
                   <a:schemeClr val="tx1"/>
                 </a:solidFill>
               </a:rPr>
               <a:t>Allow/deny per document; permissions under 5 min old</a:t>
             </a:r>
-            <a:endParaRPr lang="en-US" sz="1100" dirty="0"/>
-          </a:p>
-        </p:txBody>
-      </p:sp>
-      <p:sp>
-        <p:nvSpPr>
-          <p:cNvPr id="26" name="arrow-94"/>
+            <a:endParaRPr lang="en-US" sz="1050" dirty="0"/>
+          </a:p>
+        </p:txBody>
+      </p:sp>
+      <p:sp>
+        <p:nvSpPr>
+          <p:cNvPr id="26" name="arrow-95"/>
           <p:cNvSpPr/>
           <p:nvPr/>
         </p:nvSpPr>
@@ -11817,7 +11941,7 @@
       </p:sp>
       <p:sp>
         <p:nvSpPr>
-          <p:cNvPr id="27" name="step-95"/>
+          <p:cNvPr id="27" name="step-96"/>
           <p:cNvSpPr/>
           <p:nvPr/>
         </p:nvSpPr>
@@ -11828,7 +11952,7 @@
           </a:xfrm>
           <a:prstGeom prst="roundRect">
             <a:avLst>
-              <a:gd name="adj" fmla="val 6061"/>
+              <a:gd name="adj" fmla="val 3788"/>
             </a:avLst>
           </a:prstGeom>
           <a:solidFill>
@@ -11844,7 +11968,7 @@
       </p:sp>
       <p:sp>
         <p:nvSpPr>
-          <p:cNvPr id="28" name="text-96"/>
+          <p:cNvPr id="28" name="text-97"/>
           <p:cNvSpPr txBox="1"/>
           <p:nvPr/>
         </p:nvSpPr>
@@ -11880,7 +12004,7 @@
       </p:sp>
       <p:sp>
         <p:nvSpPr>
-          <p:cNvPr id="29" name="text-97"/>
+          <p:cNvPr id="29" name="text-98"/>
           <p:cNvSpPr txBox="1"/>
           <p:nvPr/>
         </p:nvSpPr>
@@ -11903,20 +12027,20 @@
               <a:buNone/>
             </a:pPr>
             <a:r>
-              <a:rPr lang="en-US" sz="1100" dirty="0">
+              <a:rPr lang="en-US" sz="1050" dirty="0">
                 <a:solidFill>
                   <a:schemeClr val="tx1"/>
                 </a:solidFill>
               </a:rPr>
               <a:t>Live-verify critical docs; screen injection</a:t>
             </a:r>
-            <a:endParaRPr lang="en-US" sz="1100" dirty="0"/>
-          </a:p>
-        </p:txBody>
-      </p:sp>
-      <p:sp>
-        <p:nvSpPr>
-          <p:cNvPr id="30" name="arrow-98"/>
+            <a:endParaRPr lang="en-US" sz="1050" dirty="0"/>
+          </a:p>
+        </p:txBody>
+      </p:sp>
+      <p:sp>
+        <p:nvSpPr>
+          <p:cNvPr id="30" name="arrow-99"/>
           <p:cNvSpPr/>
           <p:nvPr/>
         </p:nvSpPr>
@@ -11940,7 +12064,7 @@
       </p:sp>
       <p:sp>
         <p:nvSpPr>
-          <p:cNvPr id="31" name="step-99"/>
+          <p:cNvPr id="31" name="step-100"/>
           <p:cNvSpPr/>
           <p:nvPr/>
         </p:nvSpPr>
@@ -11951,7 +12075,7 @@
           </a:xfrm>
           <a:prstGeom prst="roundRect">
             <a:avLst>
-              <a:gd name="adj" fmla="val 6061"/>
+              <a:gd name="adj" fmla="val 3788"/>
             </a:avLst>
           </a:prstGeom>
           <a:solidFill>
@@ -11967,7 +12091,7 @@
       </p:sp>
       <p:sp>
         <p:nvSpPr>
-          <p:cNvPr id="32" name="text-100"/>
+          <p:cNvPr id="32" name="text-101"/>
           <p:cNvSpPr txBox="1"/>
           <p:nvPr/>
         </p:nvSpPr>
@@ -12003,7 +12127,7 @@
       </p:sp>
       <p:sp>
         <p:nvSpPr>
-          <p:cNvPr id="33" name="text-101"/>
+          <p:cNvPr id="33" name="text-102"/>
           <p:cNvSpPr txBox="1"/>
           <p:nvPr/>
         </p:nvSpPr>
@@ -12026,20 +12150,20 @@
               <a:buNone/>
             </a:pPr>
             <a:r>
-              <a:rPr lang="en-US" sz="1100" dirty="0">
+              <a:rPr lang="en-US" sz="1050" dirty="0">
                 <a:solidFill>
                   <a:schemeClr val="tx1"/>
                 </a:solidFill>
               </a:rPr>
               <a:t>Tencent Cloud ADP composes from cited spans</a:t>
             </a:r>
-            <a:endParaRPr lang="en-US" sz="1100" dirty="0"/>
-          </a:p>
-        </p:txBody>
-      </p:sp>
-      <p:sp>
-        <p:nvSpPr>
-          <p:cNvPr id="34" name="arrow-102"/>
+            <a:endParaRPr lang="en-US" sz="1050" dirty="0"/>
+          </a:p>
+        </p:txBody>
+      </p:sp>
+      <p:sp>
+        <p:nvSpPr>
+          <p:cNvPr id="34" name="arrow-103"/>
           <p:cNvSpPr/>
           <p:nvPr/>
         </p:nvSpPr>
@@ -12063,7 +12187,7 @@
       </p:sp>
       <p:sp>
         <p:nvSpPr>
-          <p:cNvPr id="35" name="step-103"/>
+          <p:cNvPr id="35" name="step-104"/>
           <p:cNvSpPr/>
           <p:nvPr/>
         </p:nvSpPr>
@@ -12074,7 +12198,7 @@
           </a:xfrm>
           <a:prstGeom prst="roundRect">
             <a:avLst>
-              <a:gd name="adj" fmla="val 6061"/>
+              <a:gd name="adj" fmla="val 3788"/>
             </a:avLst>
           </a:prstGeom>
           <a:solidFill>
@@ -12090,7 +12214,7 @@
       </p:sp>
       <p:sp>
         <p:nvSpPr>
-          <p:cNvPr id="36" name="text-104"/>
+          <p:cNvPr id="36" name="text-105"/>
           <p:cNvSpPr txBox="1"/>
           <p:nvPr/>
         </p:nvSpPr>
@@ -12126,7 +12250,7 @@
       </p:sp>
       <p:sp>
         <p:nvSpPr>
-          <p:cNvPr id="37" name="text-105"/>
+          <p:cNvPr id="37" name="text-106"/>
           <p:cNvSpPr txBox="1"/>
           <p:nvPr/>
         </p:nvSpPr>
@@ -12149,20 +12273,20 @@
               <a:buNone/>
             </a:pPr>
             <a:r>
-              <a:rPr lang="en-US" sz="1100" dirty="0">
+              <a:rPr lang="en-US" sz="1050" dirty="0">
                 <a:solidFill>
                   <a:schemeClr val="tx1"/>
                 </a:solidFill>
               </a:rPr>
-              <a:t>Deterministic check of every claim, numbers included; no LLM judge</a:t>
-            </a:r>
-            <a:endParaRPr lang="en-US" sz="1100" dirty="0"/>
-          </a:p>
-        </p:txBody>
-      </p:sp>
-      <p:sp>
-        <p:nvSpPr>
-          <p:cNvPr id="38" name="arrow-106"/>
+              <a:t>Deterministic check of each claim; no LLM judge</a:t>
+            </a:r>
+            <a:endParaRPr lang="en-US" sz="1050" dirty="0"/>
+          </a:p>
+        </p:txBody>
+      </p:sp>
+      <p:sp>
+        <p:nvSpPr>
+          <p:cNvPr id="38" name="arrow-107"/>
           <p:cNvSpPr/>
           <p:nvPr/>
         </p:nvSpPr>
@@ -12185,7 +12309,7 @@
       </p:sp>
       <p:sp>
         <p:nvSpPr>
-          <p:cNvPr id="39" name="arrow-107"/>
+          <p:cNvPr id="39" name="arrow-108"/>
           <p:cNvSpPr/>
           <p:nvPr/>
         </p:nvSpPr>
@@ -12208,7 +12332,7 @@
       </p:sp>
       <p:sp>
         <p:nvSpPr>
-          <p:cNvPr id="40" name="arrow-108"/>
+          <p:cNvPr id="40" name="arrow-109"/>
           <p:cNvSpPr/>
           <p:nvPr/>
         </p:nvSpPr>
@@ -12232,7 +12356,7 @@
       </p:sp>
       <p:sp>
         <p:nvSpPr>
-          <p:cNvPr id="41" name="text-109"/>
+          <p:cNvPr id="41" name="text-110"/>
           <p:cNvSpPr txBox="1"/>
           <p:nvPr/>
         </p:nvSpPr>
@@ -12268,7 +12392,7 @@
       </p:sp>
       <p:sp>
         <p:nvSpPr>
-          <p:cNvPr id="42" name="arrow-110"/>
+          <p:cNvPr id="42" name="arrow-111"/>
           <p:cNvSpPr/>
           <p:nvPr/>
         </p:nvSpPr>
@@ -12291,7 +12415,7 @@
       </p:sp>
       <p:sp>
         <p:nvSpPr>
-          <p:cNvPr id="43" name="pill-111"/>
+          <p:cNvPr id="43" name="pill-112"/>
           <p:cNvSpPr txBox="1"/>
           <p:nvPr/>
         </p:nvSpPr>
@@ -12318,20 +12442,20 @@
               <a:buNone/>
             </a:pPr>
             <a:r>
-              <a:rPr lang="en-US" sz="950" b="1" dirty="0">
+              <a:rPr lang="en-US" sz="800" b="1" dirty="0">
                 <a:solidFill>
                   <a:schemeClr val="bg1"/>
                 </a:solidFill>
               </a:rPr>
               <a:t>MODEL-CONTEXT BOUNDARY</a:t>
             </a:r>
-            <a:endParaRPr lang="en-US" sz="950" dirty="0"/>
-          </a:p>
-        </p:txBody>
-      </p:sp>
-      <p:sp>
-        <p:nvSpPr>
-          <p:cNvPr id="44" name="denied-callout-112"/>
+            <a:endParaRPr lang="en-US" sz="800" dirty="0"/>
+          </a:p>
+        </p:txBody>
+      </p:sp>
+      <p:sp>
+        <p:nvSpPr>
+          <p:cNvPr id="44" name="denied-callout-113"/>
           <p:cNvSpPr/>
           <p:nvPr/>
         </p:nvSpPr>
@@ -12342,11 +12466,11 @@
           </a:xfrm>
           <a:prstGeom prst="roundRect">
             <a:avLst>
-              <a:gd name="adj" fmla="val 8696"/>
+              <a:gd name="adj" fmla="val 5435"/>
             </a:avLst>
           </a:prstGeom>
           <a:solidFill>
-            <a:srgbClr val="FDECEC"/>
+            <a:srgbClr val="FBECEB"/>
           </a:solidFill>
           <a:ln w="12700">
             <a:solidFill>
@@ -12358,7 +12482,7 @@
       </p:sp>
       <p:pic>
         <p:nvPicPr>
-          <p:cNvPr id="45" name="ban-113" descr="preencoded.png">    </p:cNvPr>
+          <p:cNvPr id="45" name="ban-114" descr="preencoded.png">    </p:cNvPr>
           <p:cNvPicPr>
             <a:picLocks noChangeAspect="1"/>
           </p:cNvPicPr>
@@ -12382,7 +12506,7 @@
       </p:pic>
       <p:sp>
         <p:nvSpPr>
-          <p:cNvPr id="46" name="text-114"/>
+          <p:cNvPr id="46" name="text-115"/>
           <p:cNvSpPr txBox="1"/>
           <p:nvPr/>
         </p:nvSpPr>
@@ -12429,7 +12553,7 @@
       </p:sp>
       <p:sp>
         <p:nvSpPr>
-          <p:cNvPr id="47" name="zone-sources-115"/>
+          <p:cNvPr id="47" name="zone-sources-116"/>
           <p:cNvSpPr/>
           <p:nvPr/>
         </p:nvSpPr>
@@ -12456,7 +12580,7 @@
       </p:sp>
       <p:sp>
         <p:nvSpPr>
-          <p:cNvPr id="48" name="text-116"/>
+          <p:cNvPr id="48" name="text-117"/>
           <p:cNvSpPr txBox="1"/>
           <p:nvPr/>
         </p:nvSpPr>
@@ -12492,7 +12616,7 @@
       </p:sp>
       <p:pic>
         <p:nvPicPr>
-          <p:cNvPr id="49" name="src-icon-117" descr="preencoded.png">    </p:cNvPr>
+          <p:cNvPr id="49" name="src-icon-118" descr="preencoded.png">    </p:cNvPr>
           <p:cNvPicPr>
             <a:picLocks noChangeAspect="1"/>
           </p:cNvPicPr>
@@ -12516,7 +12640,7 @@
       </p:pic>
       <p:sp>
         <p:nvSpPr>
-          <p:cNvPr id="50" name="text-118"/>
+          <p:cNvPr id="50" name="text-119"/>
           <p:cNvSpPr txBox="1"/>
           <p:nvPr/>
         </p:nvSpPr>
@@ -12552,7 +12676,7 @@
       </p:sp>
       <p:pic>
         <p:nvPicPr>
-          <p:cNvPr id="51" name="src-icon-119" descr="preencoded.png">    </p:cNvPr>
+          <p:cNvPr id="51" name="src-icon-120" descr="preencoded.png">    </p:cNvPr>
           <p:cNvPicPr>
             <a:picLocks noChangeAspect="1"/>
           </p:cNvPicPr>
@@ -12576,7 +12700,7 @@
       </p:pic>
       <p:sp>
         <p:nvSpPr>
-          <p:cNvPr id="52" name="text-120"/>
+          <p:cNvPr id="52" name="text-121"/>
           <p:cNvSpPr txBox="1"/>
           <p:nvPr/>
         </p:nvSpPr>
@@ -12612,7 +12736,7 @@
       </p:sp>
       <p:pic>
         <p:nvPicPr>
-          <p:cNvPr id="53" name="src-icon-121" descr="preencoded.png">    </p:cNvPr>
+          <p:cNvPr id="53" name="src-icon-122" descr="preencoded.png">    </p:cNvPr>
           <p:cNvPicPr>
             <a:picLocks noChangeAspect="1"/>
           </p:cNvPicPr>
@@ -12636,7 +12760,7 @@
       </p:pic>
       <p:sp>
         <p:nvSpPr>
-          <p:cNvPr id="54" name="text-122"/>
+          <p:cNvPr id="54" name="text-123"/>
           <p:cNvSpPr txBox="1"/>
           <p:nvPr/>
         </p:nvSpPr>
@@ -12672,7 +12796,7 @@
       </p:sp>
       <p:pic>
         <p:nvPicPr>
-          <p:cNvPr id="55" name="src-icon-123" descr="preencoded.png">    </p:cNvPr>
+          <p:cNvPr id="55" name="src-icon-124" descr="preencoded.png">    </p:cNvPr>
           <p:cNvPicPr>
             <a:picLocks noChangeAspect="1"/>
           </p:cNvPicPr>
@@ -12696,7 +12820,7 @@
       </p:pic>
       <p:sp>
         <p:nvSpPr>
-          <p:cNvPr id="56" name="text-124"/>
+          <p:cNvPr id="56" name="text-125"/>
           <p:cNvSpPr txBox="1"/>
           <p:nvPr/>
         </p:nvSpPr>
@@ -12732,7 +12856,7 @@
       </p:sp>
       <p:sp>
         <p:nvSpPr>
-          <p:cNvPr id="57" name="store-125"/>
+          <p:cNvPr id="57" name="store-126"/>
           <p:cNvSpPr/>
           <p:nvPr/>
         </p:nvSpPr>
@@ -12743,7 +12867,7 @@
           </a:xfrm>
           <a:prstGeom prst="roundRect">
             <a:avLst>
-              <a:gd name="adj" fmla="val 5517"/>
+              <a:gd name="adj" fmla="val 3448"/>
             </a:avLst>
           </a:prstGeom>
           <a:solidFill>
@@ -12759,7 +12883,7 @@
       </p:sp>
       <p:pic>
         <p:nvPicPr>
-          <p:cNvPr id="58" name="store-icon-126" descr="preencoded.png">    </p:cNvPr>
+          <p:cNvPr id="58" name="store-icon-127" descr="preencoded.png">    </p:cNvPr>
           <p:cNvPicPr>
             <a:picLocks noChangeAspect="1"/>
           </p:cNvPicPr>
@@ -12783,7 +12907,7 @@
       </p:pic>
       <p:sp>
         <p:nvSpPr>
-          <p:cNvPr id="59" name="text-127"/>
+          <p:cNvPr id="59" name="text-128"/>
           <p:cNvSpPr txBox="1"/>
           <p:nvPr/>
         </p:nvSpPr>
@@ -12811,7 +12935,7 @@
                   <a:schemeClr val="tx2"/>
                 </a:solidFill>
               </a:rPr>
-              <a:t>Connectors + workers</a:t>
+              <a:t>Sync workers</a:t>
             </a:r>
             <a:endParaRPr lang="en-US" sz="1300" dirty="0"/>
           </a:p>
@@ -12819,7 +12943,7 @@
       </p:sp>
       <p:sp>
         <p:nvSpPr>
-          <p:cNvPr id="60" name="text-128"/>
+          <p:cNvPr id="60" name="text-129"/>
           <p:cNvSpPr txBox="1"/>
           <p:nvPr/>
         </p:nvSpPr>
@@ -12855,7 +12979,7 @@
       </p:sp>
       <p:sp>
         <p:nvSpPr>
-          <p:cNvPr id="61" name="store-129"/>
+          <p:cNvPr id="61" name="store-130"/>
           <p:cNvSpPr/>
           <p:nvPr/>
         </p:nvSpPr>
@@ -12866,7 +12990,7 @@
           </a:xfrm>
           <a:prstGeom prst="roundRect">
             <a:avLst>
-              <a:gd name="adj" fmla="val 5517"/>
+              <a:gd name="adj" fmla="val 3448"/>
             </a:avLst>
           </a:prstGeom>
           <a:solidFill>
@@ -12882,7 +13006,7 @@
       </p:sp>
       <p:pic>
         <p:nvPicPr>
-          <p:cNvPr id="62" name="store-icon-130" descr="preencoded.png">    </p:cNvPr>
+          <p:cNvPr id="62" name="store-icon-131" descr="preencoded.png">    </p:cNvPr>
           <p:cNvPicPr>
             <a:picLocks noChangeAspect="1"/>
           </p:cNvPicPr>
@@ -12906,7 +13030,7 @@
       </p:pic>
       <p:sp>
         <p:nvSpPr>
-          <p:cNvPr id="63" name="text-131"/>
+          <p:cNvPr id="63" name="text-132"/>
           <p:cNvSpPr txBox="1"/>
           <p:nvPr/>
         </p:nvSpPr>
@@ -12942,7 +13066,7 @@
       </p:sp>
       <p:sp>
         <p:nvSpPr>
-          <p:cNvPr id="64" name="text-132"/>
+          <p:cNvPr id="64" name="text-133"/>
           <p:cNvSpPr txBox="1"/>
           <p:nvPr/>
         </p:nvSpPr>
@@ -12978,7 +13102,7 @@
       </p:sp>
       <p:sp>
         <p:nvSpPr>
-          <p:cNvPr id="65" name="store-133"/>
+          <p:cNvPr id="65" name="store-134"/>
           <p:cNvSpPr/>
           <p:nvPr/>
         </p:nvSpPr>
@@ -12989,7 +13113,7 @@
           </a:xfrm>
           <a:prstGeom prst="roundRect">
             <a:avLst>
-              <a:gd name="adj" fmla="val 5517"/>
+              <a:gd name="adj" fmla="val 3448"/>
             </a:avLst>
           </a:prstGeom>
           <a:solidFill>
@@ -13005,7 +13129,7 @@
       </p:sp>
       <p:pic>
         <p:nvPicPr>
-          <p:cNvPr id="66" name="store-icon-134" descr="preencoded.png">    </p:cNvPr>
+          <p:cNvPr id="66" name="store-icon-135" descr="preencoded.png">    </p:cNvPr>
           <p:cNvPicPr>
             <a:picLocks noChangeAspect="1"/>
           </p:cNvPicPr>
@@ -13029,7 +13153,7 @@
       </p:pic>
       <p:sp>
         <p:nvSpPr>
-          <p:cNvPr id="67" name="text-135"/>
+          <p:cNvPr id="67" name="text-136"/>
           <p:cNvSpPr txBox="1"/>
           <p:nvPr/>
         </p:nvSpPr>
@@ -13065,7 +13189,7 @@
       </p:sp>
       <p:sp>
         <p:nvSpPr>
-          <p:cNvPr id="68" name="text-136"/>
+          <p:cNvPr id="68" name="text-137"/>
           <p:cNvSpPr txBox="1"/>
           <p:nvPr/>
         </p:nvSpPr>
@@ -13101,7 +13225,7 @@
       </p:sp>
       <p:sp>
         <p:nvSpPr>
-          <p:cNvPr id="69" name="arrow-137"/>
+          <p:cNvPr id="69" name="arrow-138"/>
           <p:cNvSpPr/>
           <p:nvPr/>
         </p:nvSpPr>
@@ -13125,7 +13249,7 @@
       </p:sp>
       <p:sp>
         <p:nvSpPr>
-          <p:cNvPr id="70" name="arrow-138"/>
+          <p:cNvPr id="70" name="arrow-139"/>
           <p:cNvSpPr/>
           <p:nvPr/>
         </p:nvSpPr>
@@ -13149,7 +13273,7 @@
       </p:sp>
       <p:sp>
         <p:nvSpPr>
-          <p:cNvPr id="71" name="arrow-139"/>
+          <p:cNvPr id="71" name="arrow-140"/>
           <p:cNvSpPr/>
           <p:nvPr/>
         </p:nvSpPr>
@@ -13173,7 +13297,7 @@
       </p:sp>
       <p:sp>
         <p:nvSpPr>
-          <p:cNvPr id="72" name="text-140"/>
+          <p:cNvPr id="72" name="text-141"/>
           <p:cNvSpPr txBox="1"/>
           <p:nvPr/>
         </p:nvSpPr>
@@ -13209,7 +13333,7 @@
       </p:sp>
       <p:sp>
         <p:nvSpPr>
-          <p:cNvPr id="73" name="arrow-141"/>
+          <p:cNvPr id="73" name="arrow-142"/>
           <p:cNvSpPr/>
           <p:nvPr/>
         </p:nvSpPr>
@@ -13233,7 +13357,7 @@
       </p:sp>
       <p:sp>
         <p:nvSpPr>
-          <p:cNvPr id="74" name="text-142"/>
+          <p:cNvPr id="74" name="text-143"/>
           <p:cNvSpPr txBox="1"/>
           <p:nvPr/>
         </p:nvSpPr>
@@ -13269,7 +13393,7 @@
       </p:sp>
       <p:sp>
         <p:nvSpPr>
-          <p:cNvPr id="75" name="arrow-143"/>
+          <p:cNvPr id="75" name="arrow-144"/>
           <p:cNvSpPr/>
           <p:nvPr/>
         </p:nvSpPr>
@@ -13293,7 +13417,7 @@
       </p:sp>
       <p:sp>
         <p:nvSpPr>
-          <p:cNvPr id="76" name="text-144"/>
+          <p:cNvPr id="76" name="text-145"/>
           <p:cNvSpPr txBox="1"/>
           <p:nvPr/>
         </p:nvSpPr>
@@ -13329,7 +13453,7 @@
       </p:sp>
       <p:sp>
         <p:nvSpPr>
-          <p:cNvPr id="77" name="text-145"/>
+          <p:cNvPr id="77" name="text-146"/>
           <p:cNvSpPr txBox="1"/>
           <p:nvPr/>
         </p:nvSpPr>
@@ -13357,7 +13481,7 @@
                   <a:schemeClr val="accent6"/>
                 </a:solidFill>
               </a:rPr>
-              <a:t>Teal path: only authorised evidence.  Red dashed line: nothing denied crosses it.  Dashed boxes: untrusted or external.  Demo uses a synthetic corpus; in production Slack is searched live as the user and never stored.</a:t>
+              <a:t>Green path: authorised evidence only.  Red dashed line: nothing denied crosses it.  Dashed boxes: untrusted or external.  Production Slack is searched live, never stored.</a:t>
             </a:r>
             <a:endParaRPr lang="en-US" sz="950" dirty="0"/>
           </a:p>
@@ -13460,20 +13584,31 @@
               <a:buNone/>
             </a:pPr>
             <a:r>
-              <a:rPr lang="en-US" sz="2800" b="1" dirty="0">
+              <a:rPr lang="en-US" sz="2600" b="1" dirty="0">
                 <a:solidFill>
                   <a:schemeClr val="tx2"/>
                 </a:solidFill>
               </a:rPr>
-              <a:t>Four trust boundaries, each failing closed</a:t>
-            </a:r>
-            <a:endParaRPr lang="en-US" sz="2800" dirty="0"/>
-          </a:p>
-        </p:txBody>
-      </p:sp>
-      <p:sp>
-        <p:nvSpPr>
-          <p:cNvPr id="3" name="tb-row-146"/>
+              <a:t>Four trust boundaries,</a:t>
+            </a:r>
+            <a:pPr algn="l" indent="0" marL="0">
+              <a:buNone/>
+            </a:pPr>
+            <a:r>
+              <a:rPr lang="en-US" sz="2600" b="1" dirty="0">
+                <a:solidFill>
+                  <a:srgbClr val="8C8C8C"/>
+                </a:solidFill>
+              </a:rPr>
+              <a:t> each failing closed</a:t>
+            </a:r>
+            <a:endParaRPr lang="en-US" sz="2600" dirty="0"/>
+          </a:p>
+        </p:txBody>
+      </p:sp>
+      <p:sp>
+        <p:nvSpPr>
+          <p:cNvPr id="3" name="tb-row-147"/>
           <p:cNvSpPr/>
           <p:nvPr/>
         </p:nvSpPr>
@@ -13484,7 +13619,7 @@
           </a:xfrm>
           <a:prstGeom prst="roundRect">
             <a:avLst>
-              <a:gd name="adj" fmla="val 6957"/>
+              <a:gd name="adj" fmla="val 4348"/>
             </a:avLst>
           </a:prstGeom>
           <a:solidFill>
@@ -13495,7 +13630,7 @@
       </p:sp>
       <p:sp>
         <p:nvSpPr>
-          <p:cNvPr id="4" name="num-147"/>
+          <p:cNvPr id="4" name="num-148"/>
           <p:cNvSpPr txBox="1"/>
           <p:nvPr/>
         </p:nvSpPr>
@@ -13508,9 +13643,13 @@
             <a:avLst/>
           </a:prstGeom>
           <a:solidFill>
-            <a:schemeClr val="accent4"/>
+            <a:schemeClr val="bg1"/>
           </a:solidFill>
-          <a:ln/>
+          <a:ln w="12700">
+            <a:solidFill>
+              <a:srgbClr val="D7D7D7"/>
+            </a:solidFill>
+          </a:ln>
         </p:spPr>
         <p:txBody>
           <a:bodyPr wrap="square" lIns="0" tIns="0" rIns="0" bIns="0" rtlCol="0" anchor="ctr"/>
@@ -13520,20 +13659,20 @@
               <a:buNone/>
             </a:pPr>
             <a:r>
-              <a:rPr lang="en-US" sz="1600" b="1" dirty="0">
-                <a:solidFill>
-                  <a:schemeClr val="bg1"/>
-                </a:solidFill>
-              </a:rPr>
-              <a:t>1</a:t>
-            </a:r>
-            <a:endParaRPr lang="en-US" sz="1600" dirty="0"/>
-          </a:p>
-        </p:txBody>
-      </p:sp>
-      <p:sp>
-        <p:nvSpPr>
-          <p:cNvPr id="5" name="text-148"/>
+              <a:rPr lang="en-US" sz="1400" b="1" dirty="0">
+                <a:solidFill>
+                  <a:schemeClr val="tx2"/>
+                </a:solidFill>
+              </a:rPr>
+              <a:t>01</a:t>
+            </a:r>
+            <a:endParaRPr lang="en-US" sz="1400" dirty="0"/>
+          </a:p>
+        </p:txBody>
+      </p:sp>
+      <p:sp>
+        <p:nvSpPr>
+          <p:cNvPr id="5" name="text-149"/>
           <p:cNvSpPr txBox="1"/>
           <p:nvPr/>
         </p:nvSpPr>
@@ -13569,7 +13708,7 @@
       </p:sp>
       <p:sp>
         <p:nvSpPr>
-          <p:cNvPr id="6" name="text-149"/>
+          <p:cNvPr id="6" name="text-150"/>
           <p:cNvSpPr txBox="1"/>
           <p:nvPr/>
         </p:nvSpPr>
@@ -13605,7 +13744,7 @@
       </p:sp>
       <p:sp>
         <p:nvSpPr>
-          <p:cNvPr id="7" name="failclosed-150"/>
+          <p:cNvPr id="7" name="failclosed-151"/>
           <p:cNvSpPr/>
           <p:nvPr/>
         </p:nvSpPr>
@@ -13616,7 +13755,7 @@
           </a:xfrm>
           <a:prstGeom prst="roundRect">
             <a:avLst>
-              <a:gd name="adj" fmla="val 10667"/>
+              <a:gd name="adj" fmla="val 6667"/>
             </a:avLst>
           </a:prstGeom>
           <a:solidFill>
@@ -13632,7 +13771,7 @@
       </p:sp>
       <p:sp>
         <p:nvSpPr>
-          <p:cNvPr id="8" name="text-151"/>
+          <p:cNvPr id="8" name="text-152"/>
           <p:cNvSpPr txBox="1"/>
           <p:nvPr/>
         </p:nvSpPr>
@@ -13668,7 +13807,7 @@
       </p:sp>
       <p:sp>
         <p:nvSpPr>
-          <p:cNvPr id="9" name="tb-row-152"/>
+          <p:cNvPr id="9" name="tb-row-153"/>
           <p:cNvSpPr/>
           <p:nvPr/>
         </p:nvSpPr>
@@ -13679,7 +13818,7 @@
           </a:xfrm>
           <a:prstGeom prst="roundRect">
             <a:avLst>
-              <a:gd name="adj" fmla="val 6957"/>
+              <a:gd name="adj" fmla="val 4348"/>
             </a:avLst>
           </a:prstGeom>
           <a:solidFill>
@@ -13690,7 +13829,7 @@
       </p:sp>
       <p:sp>
         <p:nvSpPr>
-          <p:cNvPr id="10" name="num-153"/>
+          <p:cNvPr id="10" name="num-154"/>
           <p:cNvSpPr txBox="1"/>
           <p:nvPr/>
         </p:nvSpPr>
@@ -13715,20 +13854,20 @@
               <a:buNone/>
             </a:pPr>
             <a:r>
-              <a:rPr lang="en-US" sz="1600" b="1" dirty="0">
+              <a:rPr lang="en-US" sz="1400" b="1" dirty="0">
                 <a:solidFill>
                   <a:schemeClr val="bg1"/>
                 </a:solidFill>
               </a:rPr>
-              <a:t>2</a:t>
-            </a:r>
-            <a:endParaRPr lang="en-US" sz="1600" dirty="0"/>
-          </a:p>
-        </p:txBody>
-      </p:sp>
-      <p:sp>
-        <p:nvSpPr>
-          <p:cNvPr id="11" name="text-154"/>
+              <a:t>02</a:t>
+            </a:r>
+            <a:endParaRPr lang="en-US" sz="1400" dirty="0"/>
+          </a:p>
+        </p:txBody>
+      </p:sp>
+      <p:sp>
+        <p:nvSpPr>
+          <p:cNvPr id="11" name="text-155"/>
           <p:cNvSpPr txBox="1"/>
           <p:nvPr/>
         </p:nvSpPr>
@@ -13764,7 +13903,7 @@
       </p:sp>
       <p:sp>
         <p:nvSpPr>
-          <p:cNvPr id="12" name="text-155"/>
+          <p:cNvPr id="12" name="text-156"/>
           <p:cNvSpPr txBox="1"/>
           <p:nvPr/>
         </p:nvSpPr>
@@ -13800,7 +13939,7 @@
       </p:sp>
       <p:sp>
         <p:nvSpPr>
-          <p:cNvPr id="13" name="failclosed-156"/>
+          <p:cNvPr id="13" name="failclosed-157"/>
           <p:cNvSpPr/>
           <p:nvPr/>
         </p:nvSpPr>
@@ -13811,7 +13950,7 @@
           </a:xfrm>
           <a:prstGeom prst="roundRect">
             <a:avLst>
-              <a:gd name="adj" fmla="val 10667"/>
+              <a:gd name="adj" fmla="val 6667"/>
             </a:avLst>
           </a:prstGeom>
           <a:solidFill>
@@ -13827,7 +13966,7 @@
       </p:sp>
       <p:sp>
         <p:nvSpPr>
-          <p:cNvPr id="14" name="text-157"/>
+          <p:cNvPr id="14" name="text-158"/>
           <p:cNvSpPr txBox="1"/>
           <p:nvPr/>
         </p:nvSpPr>
@@ -13863,7 +14002,7 @@
       </p:sp>
       <p:sp>
         <p:nvSpPr>
-          <p:cNvPr id="15" name="tb-row-158"/>
+          <p:cNvPr id="15" name="tb-row-159"/>
           <p:cNvSpPr/>
           <p:nvPr/>
         </p:nvSpPr>
@@ -13874,7 +14013,7 @@
           </a:xfrm>
           <a:prstGeom prst="roundRect">
             <a:avLst>
-              <a:gd name="adj" fmla="val 6957"/>
+              <a:gd name="adj" fmla="val 4348"/>
             </a:avLst>
           </a:prstGeom>
           <a:solidFill>
@@ -13885,7 +14024,7 @@
       </p:sp>
       <p:sp>
         <p:nvSpPr>
-          <p:cNvPr id="16" name="num-159"/>
+          <p:cNvPr id="16" name="num-160"/>
           <p:cNvSpPr txBox="1"/>
           <p:nvPr/>
         </p:nvSpPr>
@@ -13898,9 +14037,13 @@
             <a:avLst/>
           </a:prstGeom>
           <a:solidFill>
-            <a:schemeClr val="accent2"/>
+            <a:schemeClr val="bg1"/>
           </a:solidFill>
-          <a:ln/>
+          <a:ln w="12700">
+            <a:solidFill>
+              <a:srgbClr val="D7D7D7"/>
+            </a:solidFill>
+          </a:ln>
         </p:spPr>
         <p:txBody>
           <a:bodyPr wrap="square" lIns="0" tIns="0" rIns="0" bIns="0" rtlCol="0" anchor="ctr"/>
@@ -13910,20 +14053,20 @@
               <a:buNone/>
             </a:pPr>
             <a:r>
-              <a:rPr lang="en-US" sz="1600" b="1" dirty="0">
-                <a:solidFill>
-                  <a:schemeClr val="bg1"/>
-                </a:solidFill>
-              </a:rPr>
-              <a:t>3</a:t>
-            </a:r>
-            <a:endParaRPr lang="en-US" sz="1600" dirty="0"/>
-          </a:p>
-        </p:txBody>
-      </p:sp>
-      <p:sp>
-        <p:nvSpPr>
-          <p:cNvPr id="17" name="text-160"/>
+              <a:rPr lang="en-US" sz="1400" b="1" dirty="0">
+                <a:solidFill>
+                  <a:schemeClr val="tx2"/>
+                </a:solidFill>
+              </a:rPr>
+              <a:t>03</a:t>
+            </a:r>
+            <a:endParaRPr lang="en-US" sz="1400" dirty="0"/>
+          </a:p>
+        </p:txBody>
+      </p:sp>
+      <p:sp>
+        <p:nvSpPr>
+          <p:cNvPr id="17" name="text-161"/>
           <p:cNvSpPr txBox="1"/>
           <p:nvPr/>
         </p:nvSpPr>
@@ -13959,7 +14102,7 @@
       </p:sp>
       <p:sp>
         <p:nvSpPr>
-          <p:cNvPr id="18" name="text-161"/>
+          <p:cNvPr id="18" name="text-162"/>
           <p:cNvSpPr txBox="1"/>
           <p:nvPr/>
         </p:nvSpPr>
@@ -13995,7 +14138,7 @@
       </p:sp>
       <p:sp>
         <p:nvSpPr>
-          <p:cNvPr id="19" name="failclosed-162"/>
+          <p:cNvPr id="19" name="failclosed-163"/>
           <p:cNvSpPr/>
           <p:nvPr/>
         </p:nvSpPr>
@@ -14006,7 +14149,7 @@
           </a:xfrm>
           <a:prstGeom prst="roundRect">
             <a:avLst>
-              <a:gd name="adj" fmla="val 10667"/>
+              <a:gd name="adj" fmla="val 6667"/>
             </a:avLst>
           </a:prstGeom>
           <a:solidFill>
@@ -14022,7 +14165,7 @@
       </p:sp>
       <p:sp>
         <p:nvSpPr>
-          <p:cNvPr id="20" name="text-163"/>
+          <p:cNvPr id="20" name="text-164"/>
           <p:cNvSpPr txBox="1"/>
           <p:nvPr/>
         </p:nvSpPr>
@@ -14058,7 +14201,7 @@
       </p:sp>
       <p:sp>
         <p:nvSpPr>
-          <p:cNvPr id="21" name="tb-row-164"/>
+          <p:cNvPr id="21" name="tb-row-165"/>
           <p:cNvSpPr/>
           <p:nvPr/>
         </p:nvSpPr>
@@ -14069,7 +14212,7 @@
           </a:xfrm>
           <a:prstGeom prst="roundRect">
             <a:avLst>
-              <a:gd name="adj" fmla="val 6957"/>
+              <a:gd name="adj" fmla="val 4348"/>
             </a:avLst>
           </a:prstGeom>
           <a:solidFill>
@@ -14080,7 +14223,7 @@
       </p:sp>
       <p:sp>
         <p:nvSpPr>
-          <p:cNvPr id="22" name="num-165"/>
+          <p:cNvPr id="22" name="num-166"/>
           <p:cNvSpPr txBox="1"/>
           <p:nvPr/>
         </p:nvSpPr>
@@ -14093,9 +14236,13 @@
             <a:avLst/>
           </a:prstGeom>
           <a:solidFill>
-            <a:schemeClr val="accent5"/>
+            <a:schemeClr val="bg1"/>
           </a:solidFill>
-          <a:ln/>
+          <a:ln w="12700">
+            <a:solidFill>
+              <a:srgbClr val="D7D7D7"/>
+            </a:solidFill>
+          </a:ln>
         </p:spPr>
         <p:txBody>
           <a:bodyPr wrap="square" lIns="0" tIns="0" rIns="0" bIns="0" rtlCol="0" anchor="ctr"/>
@@ -14105,20 +14252,20 @@
               <a:buNone/>
             </a:pPr>
             <a:r>
-              <a:rPr lang="en-US" sz="1600" b="1" dirty="0">
-                <a:solidFill>
-                  <a:schemeClr val="bg1"/>
-                </a:solidFill>
-              </a:rPr>
-              <a:t>4</a:t>
-            </a:r>
-            <a:endParaRPr lang="en-US" sz="1600" dirty="0"/>
-          </a:p>
-        </p:txBody>
-      </p:sp>
-      <p:sp>
-        <p:nvSpPr>
-          <p:cNvPr id="23" name="text-166"/>
+              <a:rPr lang="en-US" sz="1400" b="1" dirty="0">
+                <a:solidFill>
+                  <a:schemeClr val="tx2"/>
+                </a:solidFill>
+              </a:rPr>
+              <a:t>04</a:t>
+            </a:r>
+            <a:endParaRPr lang="en-US" sz="1400" dirty="0"/>
+          </a:p>
+        </p:txBody>
+      </p:sp>
+      <p:sp>
+        <p:nvSpPr>
+          <p:cNvPr id="23" name="text-167"/>
           <p:cNvSpPr txBox="1"/>
           <p:nvPr/>
         </p:nvSpPr>
@@ -14154,7 +14301,7 @@
       </p:sp>
       <p:sp>
         <p:nvSpPr>
-          <p:cNvPr id="24" name="text-167"/>
+          <p:cNvPr id="24" name="text-168"/>
           <p:cNvSpPr txBox="1"/>
           <p:nvPr/>
         </p:nvSpPr>
@@ -14190,7 +14337,7 @@
       </p:sp>
       <p:sp>
         <p:nvSpPr>
-          <p:cNvPr id="25" name="failclosed-168"/>
+          <p:cNvPr id="25" name="failclosed-169"/>
           <p:cNvSpPr/>
           <p:nvPr/>
         </p:nvSpPr>
@@ -14201,7 +14348,7 @@
           </a:xfrm>
           <a:prstGeom prst="roundRect">
             <a:avLst>
-              <a:gd name="adj" fmla="val 10667"/>
+              <a:gd name="adj" fmla="val 6667"/>
             </a:avLst>
           </a:prstGeom>
           <a:solidFill>
@@ -14217,7 +14364,7 @@
       </p:sp>
       <p:sp>
         <p:nvSpPr>
-          <p:cNvPr id="26" name="text-169"/>
+          <p:cNvPr id="26" name="text-170"/>
           <p:cNvSpPr txBox="1"/>
           <p:nvPr/>
         </p:nvSpPr>
@@ -14253,7 +14400,7 @@
       </p:sp>
       <p:sp>
         <p:nvSpPr>
-          <p:cNvPr id="27" name="text-170"/>
+          <p:cNvPr id="27" name="text-171"/>
           <p:cNvSpPr txBox="1"/>
           <p:nvPr/>
         </p:nvSpPr>
@@ -14384,20 +14531,31 @@
               <a:buNone/>
             </a:pPr>
             <a:r>
-              <a:rPr lang="en-US" sz="2800" b="1" dirty="0">
+              <a:rPr lang="en-US" sz="2600" b="1" dirty="0">
                 <a:solidFill>
                   <a:schemeClr val="tx2"/>
                 </a:solidFill>
               </a:rPr>
-              <a:t>We keep each platform's own permission model instead of flattening it</a:t>
-            </a:r>
-            <a:endParaRPr lang="en-US" sz="2800" dirty="0"/>
-          </a:p>
-        </p:txBody>
-      </p:sp>
-      <p:sp>
-        <p:nvSpPr>
-          <p:cNvPr id="3" name="src-card-171"/>
+              <a:t>Each platform keeps its own permission model,</a:t>
+            </a:r>
+            <a:pPr algn="l" indent="0" marL="0">
+              <a:buNone/>
+            </a:pPr>
+            <a:r>
+              <a:rPr lang="en-US" sz="2600" b="1" dirty="0">
+                <a:solidFill>
+                  <a:srgbClr val="8C8C8C"/>
+                </a:solidFill>
+              </a:rPr>
+              <a:t> never flattened</a:t>
+            </a:r>
+            <a:endParaRPr lang="en-US" sz="2600" dirty="0"/>
+          </a:p>
+        </p:txBody>
+      </p:sp>
+      <p:sp>
+        <p:nvSpPr>
+          <p:cNvPr id="3" name="src-card-172"/>
           <p:cNvSpPr/>
           <p:nvPr/>
         </p:nvSpPr>
@@ -14408,7 +14566,7 @@
           </a:xfrm>
           <a:prstGeom prst="roundRect">
             <a:avLst>
-              <a:gd name="adj" fmla="val 4103"/>
+              <a:gd name="adj" fmla="val 2564"/>
             </a:avLst>
           </a:prstGeom>
           <a:solidFill>
@@ -14416,22 +14574,15 @@
           </a:solidFill>
           <a:ln w="12700">
             <a:solidFill>
-              <a:srgbClr val="CBD5E1"/>
+              <a:srgbClr val="D7D7D7"/>
             </a:solidFill>
             <a:prstDash val="solid"/>
           </a:ln>
-          <a:effectLst>
-            <a:outerShdw sx="100000" sy="100000" kx="0" ky="0" algn="bl" rotWithShape="0" blurRad="76200" dist="25400" dir="5400000">
-              <a:srgbClr val="0F172A">
-                <a:alpha val="12000"/>
-              </a:srgbClr>
-            </a:outerShdw>
-          </a:effectLst>
-        </p:spPr>
-      </p:sp>
-      <p:sp>
-        <p:nvSpPr>
-          <p:cNvPr id="4" name="icon-bg-172"/>
+        </p:spPr>
+      </p:sp>
+      <p:sp>
+        <p:nvSpPr>
+          <p:cNvPr id="4" name="icon-bg-173"/>
           <p:cNvSpPr/>
           <p:nvPr/>
         </p:nvSpPr>
@@ -14451,7 +14602,7 @@
       </p:sp>
       <p:pic>
         <p:nvPicPr>
-          <p:cNvPr id="5" name="icon-173" descr="preencoded.png">    </p:cNvPr>
+          <p:cNvPr id="5" name="icon-174" descr="preencoded.png">    </p:cNvPr>
           <p:cNvPicPr>
             <a:picLocks noChangeAspect="1"/>
           </p:cNvPicPr>
@@ -14475,7 +14626,7 @@
       </p:pic>
       <p:sp>
         <p:nvSpPr>
-          <p:cNvPr id="6" name="text-174"/>
+          <p:cNvPr id="6" name="text-175"/>
           <p:cNvSpPr txBox="1"/>
           <p:nvPr/>
         </p:nvSpPr>
@@ -14511,7 +14662,7 @@
       </p:sp>
       <p:sp>
         <p:nvSpPr>
-          <p:cNvPr id="7" name="text-175"/>
+          <p:cNvPr id="7" name="text-176"/>
           <p:cNvSpPr txBox="1"/>
           <p:nvPr/>
         </p:nvSpPr>
@@ -14547,7 +14698,7 @@
       </p:sp>
       <p:pic>
         <p:nvPicPr>
-          <p:cNvPr id="8" name="check-176" descr="preencoded.png">    </p:cNvPr>
+          <p:cNvPr id="8" name="check-177" descr="preencoded.png">    </p:cNvPr>
           <p:cNvPicPr>
             <a:picLocks noChangeAspect="1"/>
           </p:cNvPicPr>
@@ -14571,7 +14722,7 @@
       </p:pic>
       <p:sp>
         <p:nvSpPr>
-          <p:cNvPr id="9" name="text-177"/>
+          <p:cNvPr id="9" name="text-178"/>
           <p:cNvSpPr txBox="1"/>
           <p:nvPr/>
         </p:nvSpPr>
@@ -14607,7 +14758,7 @@
       </p:sp>
       <p:sp>
         <p:nvSpPr>
-          <p:cNvPr id="10" name="src-card-178"/>
+          <p:cNvPr id="10" name="src-card-179"/>
           <p:cNvSpPr/>
           <p:nvPr/>
         </p:nvSpPr>
@@ -14618,7 +14769,7 @@
           </a:xfrm>
           <a:prstGeom prst="roundRect">
             <a:avLst>
-              <a:gd name="adj" fmla="val 4103"/>
+              <a:gd name="adj" fmla="val 2564"/>
             </a:avLst>
           </a:prstGeom>
           <a:solidFill>
@@ -14626,22 +14777,15 @@
           </a:solidFill>
           <a:ln w="12700">
             <a:solidFill>
-              <a:srgbClr val="CBD5E1"/>
+              <a:srgbClr val="D7D7D7"/>
             </a:solidFill>
             <a:prstDash val="solid"/>
           </a:ln>
-          <a:effectLst>
-            <a:outerShdw sx="100000" sy="100000" kx="0" ky="0" algn="bl" rotWithShape="0" blurRad="76200" dist="25400" dir="5400000">
-              <a:srgbClr val="0F172A">
-                <a:alpha val="12000"/>
-              </a:srgbClr>
-            </a:outerShdw>
-          </a:effectLst>
-        </p:spPr>
-      </p:sp>
-      <p:sp>
-        <p:nvSpPr>
-          <p:cNvPr id="11" name="icon-bg-179"/>
+        </p:spPr>
+      </p:sp>
+      <p:sp>
+        <p:nvSpPr>
+          <p:cNvPr id="11" name="icon-bg-180"/>
           <p:cNvSpPr/>
           <p:nvPr/>
         </p:nvSpPr>
@@ -14661,7 +14805,7 @@
       </p:sp>
       <p:pic>
         <p:nvPicPr>
-          <p:cNvPr id="12" name="icon-180" descr="preencoded.png">    </p:cNvPr>
+          <p:cNvPr id="12" name="icon-181" descr="preencoded.png">    </p:cNvPr>
           <p:cNvPicPr>
             <a:picLocks noChangeAspect="1"/>
           </p:cNvPicPr>
@@ -14685,7 +14829,7 @@
       </p:pic>
       <p:sp>
         <p:nvSpPr>
-          <p:cNvPr id="13" name="text-181"/>
+          <p:cNvPr id="13" name="text-182"/>
           <p:cNvSpPr txBox="1"/>
           <p:nvPr/>
         </p:nvSpPr>
@@ -14721,7 +14865,7 @@
       </p:sp>
       <p:sp>
         <p:nvSpPr>
-          <p:cNvPr id="14" name="text-182"/>
+          <p:cNvPr id="14" name="text-183"/>
           <p:cNvSpPr txBox="1"/>
           <p:nvPr/>
         </p:nvSpPr>
@@ -14757,7 +14901,7 @@
       </p:sp>
       <p:pic>
         <p:nvPicPr>
-          <p:cNvPr id="15" name="check-183" descr="preencoded.png">    </p:cNvPr>
+          <p:cNvPr id="15" name="check-184" descr="preencoded.png">    </p:cNvPr>
           <p:cNvPicPr>
             <a:picLocks noChangeAspect="1"/>
           </p:cNvPicPr>
@@ -14781,7 +14925,7 @@
       </p:pic>
       <p:sp>
         <p:nvSpPr>
-          <p:cNvPr id="16" name="text-184"/>
+          <p:cNvPr id="16" name="text-185"/>
           <p:cNvSpPr txBox="1"/>
           <p:nvPr/>
         </p:nvSpPr>
@@ -14817,7 +14961,7 @@
       </p:sp>
       <p:sp>
         <p:nvSpPr>
-          <p:cNvPr id="17" name="src-card-185"/>
+          <p:cNvPr id="17" name="src-card-186"/>
           <p:cNvSpPr/>
           <p:nvPr/>
         </p:nvSpPr>
@@ -14828,7 +14972,7 @@
           </a:xfrm>
           <a:prstGeom prst="roundRect">
             <a:avLst>
-              <a:gd name="adj" fmla="val 4103"/>
+              <a:gd name="adj" fmla="val 2564"/>
             </a:avLst>
           </a:prstGeom>
           <a:solidFill>
@@ -14836,22 +14980,15 @@
           </a:solidFill>
           <a:ln w="12700">
             <a:solidFill>
-              <a:srgbClr val="CBD5E1"/>
+              <a:srgbClr val="D7D7D7"/>
             </a:solidFill>
             <a:prstDash val="solid"/>
           </a:ln>
-          <a:effectLst>
-            <a:outerShdw sx="100000" sy="100000" kx="0" ky="0" algn="bl" rotWithShape="0" blurRad="76200" dist="25400" dir="5400000">
-              <a:srgbClr val="0F172A">
-                <a:alpha val="12000"/>
-              </a:srgbClr>
-            </a:outerShdw>
-          </a:effectLst>
-        </p:spPr>
-      </p:sp>
-      <p:sp>
-        <p:nvSpPr>
-          <p:cNvPr id="18" name="icon-bg-186"/>
+        </p:spPr>
+      </p:sp>
+      <p:sp>
+        <p:nvSpPr>
+          <p:cNvPr id="18" name="icon-bg-187"/>
           <p:cNvSpPr/>
           <p:nvPr/>
         </p:nvSpPr>
@@ -14871,7 +15008,7 @@
       </p:sp>
       <p:pic>
         <p:nvPicPr>
-          <p:cNvPr id="19" name="icon-187" descr="preencoded.png">    </p:cNvPr>
+          <p:cNvPr id="19" name="icon-188" descr="preencoded.png">    </p:cNvPr>
           <p:cNvPicPr>
             <a:picLocks noChangeAspect="1"/>
           </p:cNvPicPr>
@@ -14895,7 +15032,7 @@
       </p:pic>
       <p:sp>
         <p:nvSpPr>
-          <p:cNvPr id="20" name="text-188"/>
+          <p:cNvPr id="20" name="text-189"/>
           <p:cNvSpPr txBox="1"/>
           <p:nvPr/>
         </p:nvSpPr>
@@ -14931,7 +15068,7 @@
       </p:sp>
       <p:sp>
         <p:nvSpPr>
-          <p:cNvPr id="21" name="text-189"/>
+          <p:cNvPr id="21" name="text-190"/>
           <p:cNvSpPr txBox="1"/>
           <p:nvPr/>
         </p:nvSpPr>
@@ -14959,7 +15096,7 @@
                   <a:schemeClr val="tx1"/>
                 </a:solidFill>
               </a:rPr>
-              <a:t>Channel membership; public channels for full members only. In production, searched live as the user; nothing stored</a:t>
+              <a:t>Channel membership. Production: live search as the user, nothing stored</a:t>
             </a:r>
             <a:endParaRPr lang="en-US" sz="1300" dirty="0"/>
           </a:p>
@@ -14967,7 +15104,7 @@
       </p:sp>
       <p:pic>
         <p:nvPicPr>
-          <p:cNvPr id="22" name="check-190" descr="preencoded.png">    </p:cNvPr>
+          <p:cNvPr id="22" name="check-191" descr="preencoded.png">    </p:cNvPr>
           <p:cNvPicPr>
             <a:picLocks noChangeAspect="1"/>
           </p:cNvPicPr>
@@ -14991,7 +15128,7 @@
       </p:pic>
       <p:sp>
         <p:nvSpPr>
-          <p:cNvPr id="23" name="text-191"/>
+          <p:cNvPr id="23" name="text-192"/>
           <p:cNvSpPr txBox="1"/>
           <p:nvPr/>
         </p:nvSpPr>
@@ -15027,7 +15164,7 @@
       </p:sp>
       <p:sp>
         <p:nvSpPr>
-          <p:cNvPr id="24" name="src-card-192"/>
+          <p:cNvPr id="24" name="src-card-193"/>
           <p:cNvSpPr/>
           <p:nvPr/>
         </p:nvSpPr>
@@ -15038,7 +15175,7 @@
           </a:xfrm>
           <a:prstGeom prst="roundRect">
             <a:avLst>
-              <a:gd name="adj" fmla="val 4103"/>
+              <a:gd name="adj" fmla="val 2564"/>
             </a:avLst>
           </a:prstGeom>
           <a:solidFill>
@@ -15046,22 +15183,15 @@
           </a:solidFill>
           <a:ln w="12700">
             <a:solidFill>
-              <a:srgbClr val="CBD5E1"/>
+              <a:srgbClr val="D7D7D7"/>
             </a:solidFill>
             <a:prstDash val="solid"/>
           </a:ln>
-          <a:effectLst>
-            <a:outerShdw sx="100000" sy="100000" kx="0" ky="0" algn="bl" rotWithShape="0" blurRad="76200" dist="25400" dir="5400000">
-              <a:srgbClr val="0F172A">
-                <a:alpha val="12000"/>
-              </a:srgbClr>
-            </a:outerShdw>
-          </a:effectLst>
-        </p:spPr>
-      </p:sp>
-      <p:sp>
-        <p:nvSpPr>
-          <p:cNvPr id="25" name="icon-bg-193"/>
+        </p:spPr>
+      </p:sp>
+      <p:sp>
+        <p:nvSpPr>
+          <p:cNvPr id="25" name="icon-bg-194"/>
           <p:cNvSpPr/>
           <p:nvPr/>
         </p:nvSpPr>
@@ -15081,7 +15211,7 @@
       </p:sp>
       <p:pic>
         <p:nvPicPr>
-          <p:cNvPr id="26" name="icon-194" descr="preencoded.png">    </p:cNvPr>
+          <p:cNvPr id="26" name="icon-195" descr="preencoded.png">    </p:cNvPr>
           <p:cNvPicPr>
             <a:picLocks noChangeAspect="1"/>
           </p:cNvPicPr>
@@ -15105,7 +15235,7 @@
       </p:pic>
       <p:sp>
         <p:nvSpPr>
-          <p:cNvPr id="27" name="text-195"/>
+          <p:cNvPr id="27" name="text-196"/>
           <p:cNvSpPr txBox="1"/>
           <p:nvPr/>
         </p:nvSpPr>
@@ -15141,7 +15271,7 @@
       </p:sp>
       <p:sp>
         <p:nvSpPr>
-          <p:cNvPr id="28" name="text-196"/>
+          <p:cNvPr id="28" name="text-197"/>
           <p:cNvSpPr txBox="1"/>
           <p:nvPr/>
         </p:nvSpPr>
@@ -15177,7 +15307,7 @@
       </p:sp>
       <p:pic>
         <p:nvPicPr>
-          <p:cNvPr id="29" name="check-197" descr="preencoded.png">    </p:cNvPr>
+          <p:cNvPr id="29" name="check-198" descr="preencoded.png">    </p:cNvPr>
           <p:cNvPicPr>
             <a:picLocks noChangeAspect="1"/>
           </p:cNvPicPr>
@@ -15201,7 +15331,7 @@
       </p:pic>
       <p:sp>
         <p:nvSpPr>
-          <p:cNvPr id="30" name="text-198"/>
+          <p:cNvPr id="30" name="text-199"/>
           <p:cNvSpPr txBox="1"/>
           <p:nvPr/>
         </p:nvSpPr>
@@ -15237,7 +15367,7 @@
       </p:sp>
       <p:sp>
         <p:nvSpPr>
-          <p:cNvPr id="31" name="equation-199"/>
+          <p:cNvPr id="31" name="equation-200"/>
           <p:cNvSpPr/>
           <p:nvPr/>
         </p:nvSpPr>
@@ -15248,7 +15378,7 @@
           </a:xfrm>
           <a:prstGeom prst="roundRect">
             <a:avLst>
-              <a:gd name="adj" fmla="val 8421"/>
+              <a:gd name="adj" fmla="val 5263"/>
             </a:avLst>
           </a:prstGeom>
           <a:solidFill>
@@ -15259,7 +15389,7 @@
       </p:sp>
       <p:sp>
         <p:nvSpPr>
-          <p:cNvPr id="32" name="text-200"/>
+          <p:cNvPr id="32" name="text-201"/>
           <p:cNvSpPr txBox="1"/>
           <p:nvPr/>
         </p:nvSpPr>
@@ -15298,10 +15428,10 @@
             <a:r>
               <a:rPr lang="en-US" sz="1300" dirty="0">
                 <a:solidFill>
-                  <a:srgbClr val="C9D8EE"/>
-                </a:solidFill>
-              </a:rPr>
-              <a:t>A local grant can narrow access but never widen what the source allows. Confidential documents also need the owner, an admin or an active grant.</a:t>
+                  <a:srgbClr val="A6A6A6"/>
+                </a:solidFill>
+              </a:rPr>
+              <a:t>A local grant can narrow access, never widen it. Confidential documents also need the owner, an admin or an active grant.</a:t>
             </a:r>
             <a:endParaRPr lang="en-US" sz="1400" dirty="0"/>
           </a:p>
@@ -15404,20 +15534,31 @@
               <a:buNone/>
             </a:pPr>
             <a:r>
-              <a:rPr lang="en-US" sz="2800" b="1" dirty="0">
+              <a:rPr lang="en-US" sz="2600" b="1" dirty="0">
                 <a:solidFill>
                   <a:schemeClr val="tx2"/>
                 </a:solidFill>
               </a:rPr>
-              <a:t>The access-control demo in three scenes</a:t>
-            </a:r>
-            <a:endParaRPr lang="en-US" sz="2800" dirty="0"/>
-          </a:p>
-        </p:txBody>
-      </p:sp>
-      <p:sp>
-        <p:nvSpPr>
-          <p:cNvPr id="3" name="scene-201"/>
+              <a:t>The access-control demo</a:t>
+            </a:r>
+            <a:pPr algn="l" indent="0" marL="0">
+              <a:buNone/>
+            </a:pPr>
+            <a:r>
+              <a:rPr lang="en-US" sz="2600" b="1" dirty="0">
+                <a:solidFill>
+                  <a:srgbClr val="8C8C8C"/>
+                </a:solidFill>
+              </a:rPr>
+              <a:t> in three scenes</a:t>
+            </a:r>
+            <a:endParaRPr lang="en-US" sz="2600" dirty="0"/>
+          </a:p>
+        </p:txBody>
+      </p:sp>
+      <p:sp>
+        <p:nvSpPr>
+          <p:cNvPr id="3" name="scene-202"/>
           <p:cNvSpPr/>
           <p:nvPr/>
         </p:nvSpPr>
@@ -15428,7 +15569,7 @@
           </a:xfrm>
           <a:prstGeom prst="roundRect">
             <a:avLst>
-              <a:gd name="adj" fmla="val 2078"/>
+              <a:gd name="adj" fmla="val 1299"/>
             </a:avLst>
           </a:prstGeom>
           <a:solidFill>
@@ -15439,7 +15580,7 @@
       </p:sp>
       <p:sp>
         <p:nvSpPr>
-          <p:cNvPr id="4" name="num-202"/>
+          <p:cNvPr id="4" name="num-203"/>
           <p:cNvSpPr txBox="1"/>
           <p:nvPr/>
         </p:nvSpPr>
@@ -15464,20 +15605,20 @@
               <a:buNone/>
             </a:pPr>
             <a:r>
-              <a:rPr lang="en-US" sz="1600" b="1" dirty="0">
+              <a:rPr lang="en-US" sz="1400" b="1" dirty="0">
                 <a:solidFill>
                   <a:schemeClr val="bg1"/>
                 </a:solidFill>
               </a:rPr>
-              <a:t>1</a:t>
-            </a:r>
-            <a:endParaRPr lang="en-US" sz="1600" dirty="0"/>
-          </a:p>
-        </p:txBody>
-      </p:sp>
-      <p:sp>
-        <p:nvSpPr>
-          <p:cNvPr id="5" name="text-203"/>
+              <a:t>01</a:t>
+            </a:r>
+            <a:endParaRPr lang="en-US" sz="1400" dirty="0"/>
+          </a:p>
+        </p:txBody>
+      </p:sp>
+      <p:sp>
+        <p:nvSpPr>
+          <p:cNvPr id="5" name="text-204"/>
           <p:cNvSpPr txBox="1"/>
           <p:nvPr/>
         </p:nvSpPr>
@@ -15513,7 +15654,7 @@
       </p:sp>
       <p:sp>
         <p:nvSpPr>
-          <p:cNvPr id="6" name="icon-bg-204"/>
+          <p:cNvPr id="6" name="icon-bg-205"/>
           <p:cNvSpPr/>
           <p:nvPr/>
         </p:nvSpPr>
@@ -15533,7 +15674,7 @@
       </p:sp>
       <p:pic>
         <p:nvPicPr>
-          <p:cNvPr id="7" name="icon-205" descr="preencoded.png">    </p:cNvPr>
+          <p:cNvPr id="7" name="icon-206" descr="preencoded.png">    </p:cNvPr>
           <p:cNvPicPr>
             <a:picLocks noChangeAspect="1"/>
           </p:cNvPicPr>
@@ -15557,7 +15698,7 @@
       </p:pic>
       <p:sp>
         <p:nvSpPr>
-          <p:cNvPr id="8" name="text-206"/>
+          <p:cNvPr id="8" name="text-207"/>
           <p:cNvSpPr txBox="1"/>
           <p:nvPr/>
         </p:nvSpPr>
@@ -15593,7 +15734,7 @@
       </p:sp>
       <p:sp>
         <p:nvSpPr>
-          <p:cNvPr id="9" name="text-207"/>
+          <p:cNvPr id="9" name="text-208"/>
           <p:cNvSpPr txBox="1"/>
           <p:nvPr/>
         </p:nvSpPr>
@@ -15629,7 +15770,7 @@
       </p:sp>
       <p:sp>
         <p:nvSpPr>
-          <p:cNvPr id="10" name="answer-mock-208"/>
+          <p:cNvPr id="10" name="answer-mock-209"/>
           <p:cNvSpPr/>
           <p:nvPr/>
         </p:nvSpPr>
@@ -15640,7 +15781,7 @@
           </a:xfrm>
           <a:prstGeom prst="roundRect">
             <a:avLst>
-              <a:gd name="adj" fmla="val 5926"/>
+              <a:gd name="adj" fmla="val 3704"/>
             </a:avLst>
           </a:prstGeom>
           <a:solidFill>
@@ -15648,7 +15789,7 @@
           </a:solidFill>
           <a:ln w="12700">
             <a:solidFill>
-              <a:srgbClr val="CBD5E1"/>
+              <a:srgbClr val="D7D7D7"/>
             </a:solidFill>
             <a:prstDash val="solid"/>
           </a:ln>
@@ -15656,7 +15797,7 @@
       </p:sp>
       <p:sp>
         <p:nvSpPr>
-          <p:cNvPr id="11" name="text-209"/>
+          <p:cNvPr id="11" name="text-210"/>
           <p:cNvSpPr txBox="1"/>
           <p:nvPr/>
         </p:nvSpPr>
@@ -15684,7 +15825,7 @@
                   <a:schemeClr val="tx1"/>
                 </a:solidFill>
               </a:rPr>
-              <a:t>SGD 48.6 million, up 18% year on year</a:t>
+              <a:t>Q3 2026 revenue: SGD 48.6 million, up 18% year on year</a:t>
             </a:r>
             <a:endParaRPr lang="en-US" sz="1300" dirty="0"/>
           </a:p>
@@ -15698,7 +15839,7 @@
                   <a:schemeClr val="accent4"/>
                 </a:solidFill>
               </a:rPr>
-              <a:t>[1] Board deck Q3 · Google Drive</a:t>
+              <a:t>[E4] Q3 2026 Board Deck · Google Drive · 8/8 claims supported</a:t>
             </a:r>
             <a:endParaRPr lang="en-US" sz="1300" dirty="0"/>
           </a:p>
@@ -15706,7 +15847,7 @@
       </p:sp>
       <p:sp>
         <p:nvSpPr>
-          <p:cNvPr id="12" name="verdict-210"/>
+          <p:cNvPr id="12" name="verdict-211"/>
           <p:cNvSpPr/>
           <p:nvPr/>
         </p:nvSpPr>
@@ -15717,11 +15858,11 @@
           </a:xfrm>
           <a:prstGeom prst="roundRect">
             <a:avLst>
-              <a:gd name="adj" fmla="val 7619"/>
+              <a:gd name="adj" fmla="val 4762"/>
             </a:avLst>
           </a:prstGeom>
           <a:solidFill>
-            <a:srgbClr val="E3F5F2"/>
+            <a:srgbClr val="EAF3EA"/>
           </a:solidFill>
           <a:ln w="12700">
             <a:solidFill>
@@ -15733,7 +15874,7 @@
       </p:sp>
       <p:sp>
         <p:nvSpPr>
-          <p:cNvPr id="13" name="text-211"/>
+          <p:cNvPr id="13" name="text-212"/>
           <p:cNvSpPr txBox="1"/>
           <p:nvPr/>
         </p:nvSpPr>
@@ -15769,7 +15910,7 @@
       </p:sp>
       <p:sp>
         <p:nvSpPr>
-          <p:cNvPr id="14" name="arrow-212"/>
+          <p:cNvPr id="14" name="arrow-213"/>
           <p:cNvSpPr/>
           <p:nvPr/>
         </p:nvSpPr>
@@ -15793,7 +15934,7 @@
       </p:sp>
       <p:sp>
         <p:nvSpPr>
-          <p:cNvPr id="15" name="scene-213"/>
+          <p:cNvPr id="15" name="scene-214"/>
           <p:cNvSpPr/>
           <p:nvPr/>
         </p:nvSpPr>
@@ -15804,7 +15945,7 @@
           </a:xfrm>
           <a:prstGeom prst="roundRect">
             <a:avLst>
-              <a:gd name="adj" fmla="val 2078"/>
+              <a:gd name="adj" fmla="val 1299"/>
             </a:avLst>
           </a:prstGeom>
           <a:solidFill>
@@ -15815,7 +15956,7 @@
       </p:sp>
       <p:sp>
         <p:nvSpPr>
-          <p:cNvPr id="16" name="num-214"/>
+          <p:cNvPr id="16" name="num-215"/>
           <p:cNvSpPr txBox="1"/>
           <p:nvPr/>
         </p:nvSpPr>
@@ -15823,6 +15964,84 @@
           <a:xfrm>
             <a:off x="4526280" y="1508760"/>
             <a:ext cx="411480" cy="411480"/>
+          </a:xfrm>
+          <a:prstGeom prst="ellipse">
+            <a:avLst/>
+          </a:prstGeom>
+          <a:solidFill>
+            <a:schemeClr val="bg1"/>
+          </a:solidFill>
+          <a:ln w="12700">
+            <a:solidFill>
+              <a:srgbClr val="D7D7D7"/>
+            </a:solidFill>
+          </a:ln>
+        </p:spPr>
+        <p:txBody>
+          <a:bodyPr wrap="square" lIns="0" tIns="0" rIns="0" bIns="0" rtlCol="0" anchor="ctr"/>
+          <a:lstStyle/>
+          <a:p>
+            <a:pPr algn="ctr" indent="0" marL="0">
+              <a:buNone/>
+            </a:pPr>
+            <a:r>
+              <a:rPr lang="en-US" sz="1400" b="1" dirty="0">
+                <a:solidFill>
+                  <a:schemeClr val="tx2"/>
+                </a:solidFill>
+              </a:rPr>
+              <a:t>02</a:t>
+            </a:r>
+            <a:endParaRPr lang="en-US" sz="1400" dirty="0"/>
+          </a:p>
+        </p:txBody>
+      </p:sp>
+      <p:sp>
+        <p:nvSpPr>
+          <p:cNvPr id="17" name="text-216"/>
+          <p:cNvSpPr txBox="1"/>
+          <p:nvPr/>
+        </p:nvSpPr>
+        <p:spPr>
+          <a:xfrm>
+            <a:off x="5074920" y="1481328"/>
+            <a:ext cx="2651760" cy="457200"/>
+          </a:xfrm>
+          <a:prstGeom prst="rect">
+            <a:avLst/>
+          </a:prstGeom>
+          <a:noFill/>
+          <a:ln/>
+        </p:spPr>
+        <p:txBody>
+          <a:bodyPr wrap="square" lIns="0" tIns="0" rIns="0" bIns="0" rtlCol="0" anchor="ctr"/>
+          <a:lstStyle/>
+          <a:p>
+            <a:pPr algn="l" indent="0" marL="0">
+              <a:buNone/>
+            </a:pPr>
+            <a:r>
+              <a:rPr lang="en-US" sz="1800" b="1" dirty="0">
+                <a:solidFill>
+                  <a:schemeClr val="tx2"/>
+                </a:solidFill>
+              </a:rPr>
+              <a:t>Unauthorised contractor</a:t>
+            </a:r>
+            <a:endParaRPr lang="en-US" sz="1800" dirty="0"/>
+          </a:p>
+        </p:txBody>
+      </p:sp>
+      <p:sp>
+        <p:nvSpPr>
+          <p:cNvPr id="18" name="icon-bg-217"/>
+          <p:cNvSpPr/>
+          <p:nvPr/>
+        </p:nvSpPr>
+        <p:spPr>
+          <a:xfrm>
+            <a:off x="4526280" y="2103120"/>
+            <a:ext cx="502920" cy="502920"/>
           </a:xfrm>
           <a:prstGeom prst="ellipse">
             <a:avLst/>
@@ -15832,84 +16051,10 @@
           </a:solidFill>
           <a:ln/>
         </p:spPr>
-        <p:txBody>
-          <a:bodyPr wrap="square" lIns="0" tIns="0" rIns="0" bIns="0" rtlCol="0" anchor="ctr"/>
-          <a:lstStyle/>
-          <a:p>
-            <a:pPr algn="ctr" indent="0" marL="0">
-              <a:buNone/>
-            </a:pPr>
-            <a:r>
-              <a:rPr lang="en-US" sz="1600" b="1" dirty="0">
-                <a:solidFill>
-                  <a:schemeClr val="bg1"/>
-                </a:solidFill>
-              </a:rPr>
-              <a:t>2</a:t>
-            </a:r>
-            <a:endParaRPr lang="en-US" sz="1600" dirty="0"/>
-          </a:p>
-        </p:txBody>
-      </p:sp>
-      <p:sp>
-        <p:nvSpPr>
-          <p:cNvPr id="17" name="text-215"/>
-          <p:cNvSpPr txBox="1"/>
-          <p:nvPr/>
-        </p:nvSpPr>
-        <p:spPr>
-          <a:xfrm>
-            <a:off x="5074920" y="1481328"/>
-            <a:ext cx="2651760" cy="457200"/>
-          </a:xfrm>
-          <a:prstGeom prst="rect">
-            <a:avLst/>
-          </a:prstGeom>
-          <a:noFill/>
-          <a:ln/>
-        </p:spPr>
-        <p:txBody>
-          <a:bodyPr wrap="square" lIns="0" tIns="0" rIns="0" bIns="0" rtlCol="0" anchor="ctr"/>
-          <a:lstStyle/>
-          <a:p>
-            <a:pPr algn="l" indent="0" marL="0">
-              <a:buNone/>
-            </a:pPr>
-            <a:r>
-              <a:rPr lang="en-US" sz="1800" b="1" dirty="0">
-                <a:solidFill>
-                  <a:schemeClr val="tx2"/>
-                </a:solidFill>
-              </a:rPr>
-              <a:t>Unauthorised contractor</a:t>
-            </a:r>
-            <a:endParaRPr lang="en-US" sz="1800" dirty="0"/>
-          </a:p>
-        </p:txBody>
-      </p:sp>
-      <p:sp>
-        <p:nvSpPr>
-          <p:cNvPr id="18" name="icon-bg-216"/>
-          <p:cNvSpPr/>
-          <p:nvPr/>
-        </p:nvSpPr>
-        <p:spPr>
-          <a:xfrm>
-            <a:off x="4526280" y="2103120"/>
-            <a:ext cx="502920" cy="502920"/>
-          </a:xfrm>
-          <a:prstGeom prst="ellipse">
-            <a:avLst/>
-          </a:prstGeom>
-          <a:solidFill>
-            <a:schemeClr val="accent2"/>
-          </a:solidFill>
-          <a:ln/>
-        </p:spPr>
       </p:sp>
       <p:pic>
         <p:nvPicPr>
-          <p:cNvPr id="19" name="icon-217" descr="preencoded.png">    </p:cNvPr>
+          <p:cNvPr id="19" name="icon-218" descr="preencoded.png">    </p:cNvPr>
           <p:cNvPicPr>
             <a:picLocks noChangeAspect="1"/>
           </p:cNvPicPr>
@@ -15933,7 +16078,7 @@
       </p:pic>
       <p:sp>
         <p:nvSpPr>
-          <p:cNvPr id="20" name="text-218"/>
+          <p:cNvPr id="20" name="text-219"/>
           <p:cNvSpPr txBox="1"/>
           <p:nvPr/>
         </p:nvSpPr>
@@ -15969,7 +16114,7 @@
       </p:sp>
       <p:sp>
         <p:nvSpPr>
-          <p:cNvPr id="21" name="text-219"/>
+          <p:cNvPr id="21" name="text-220"/>
           <p:cNvSpPr txBox="1"/>
           <p:nvPr/>
         </p:nvSpPr>
@@ -16005,7 +16150,7 @@
       </p:sp>
       <p:sp>
         <p:nvSpPr>
-          <p:cNvPr id="22" name="answer-mock-220"/>
+          <p:cNvPr id="22" name="answer-mock-221"/>
           <p:cNvSpPr/>
           <p:nvPr/>
         </p:nvSpPr>
@@ -16016,7 +16161,7 @@
           </a:xfrm>
           <a:prstGeom prst="roundRect">
             <a:avLst>
-              <a:gd name="adj" fmla="val 5926"/>
+              <a:gd name="adj" fmla="val 3704"/>
             </a:avLst>
           </a:prstGeom>
           <a:solidFill>
@@ -16024,7 +16169,7 @@
           </a:solidFill>
           <a:ln w="12700">
             <a:solidFill>
-              <a:srgbClr val="CBD5E1"/>
+              <a:srgbClr val="D7D7D7"/>
             </a:solidFill>
             <a:prstDash val="solid"/>
           </a:ln>
@@ -16032,7 +16177,7 @@
       </p:sp>
       <p:sp>
         <p:nvSpPr>
-          <p:cNvPr id="23" name="text-221"/>
+          <p:cNvPr id="23" name="text-222"/>
           <p:cNvSpPr txBox="1"/>
           <p:nvPr/>
         </p:nvSpPr>
@@ -16060,7 +16205,7 @@
                   <a:schemeClr val="tx1"/>
                 </a:solidFill>
               </a:rPr>
-              <a:t>No figures, no title, no hint the deck exists</a:t>
+              <a:t>“There is not enough evidence to answer this question.”</a:t>
             </a:r>
             <a:endParaRPr lang="en-US" sz="1300" dirty="0"/>
           </a:p>
@@ -16074,7 +16219,7 @@
                   <a:schemeClr val="accent6"/>
                 </a:solidFill>
               </a:rPr>
-              <a:t>Opening the deck returns the same 404 as a missing file</a:t>
+              <a:t>11 of 11 candidates denied before the model; opening the deck gives the same 404 as a missing file</a:t>
             </a:r>
             <a:endParaRPr lang="en-US" sz="1300" dirty="0"/>
           </a:p>
@@ -16082,7 +16227,7 @@
       </p:sp>
       <p:sp>
         <p:nvSpPr>
-          <p:cNvPr id="24" name="verdict-222"/>
+          <p:cNvPr id="24" name="verdict-223"/>
           <p:cNvSpPr/>
           <p:nvPr/>
         </p:nvSpPr>
@@ -16093,11 +16238,11 @@
           </a:xfrm>
           <a:prstGeom prst="roundRect">
             <a:avLst>
-              <a:gd name="adj" fmla="val 7619"/>
+              <a:gd name="adj" fmla="val 4762"/>
             </a:avLst>
           </a:prstGeom>
           <a:solidFill>
-            <a:srgbClr val="FDECEC"/>
+            <a:srgbClr val="FBECEB"/>
           </a:solidFill>
           <a:ln w="12700">
             <a:solidFill>
@@ -16109,7 +16254,7 @@
       </p:sp>
       <p:sp>
         <p:nvSpPr>
-          <p:cNvPr id="25" name="text-223"/>
+          <p:cNvPr id="25" name="text-224"/>
           <p:cNvSpPr txBox="1"/>
           <p:nvPr/>
         </p:nvSpPr>
@@ -16145,7 +16290,7 @@
       </p:sp>
       <p:sp>
         <p:nvSpPr>
-          <p:cNvPr id="26" name="arrow-224"/>
+          <p:cNvPr id="26" name="arrow-225"/>
           <p:cNvSpPr/>
           <p:nvPr/>
         </p:nvSpPr>
@@ -16169,7 +16314,7 @@
       </p:sp>
       <p:sp>
         <p:nvSpPr>
-          <p:cNvPr id="27" name="scene-225"/>
+          <p:cNvPr id="27" name="scene-226"/>
           <p:cNvSpPr/>
           <p:nvPr/>
         </p:nvSpPr>
@@ -16180,7 +16325,7 @@
           </a:xfrm>
           <a:prstGeom prst="roundRect">
             <a:avLst>
-              <a:gd name="adj" fmla="val 2078"/>
+              <a:gd name="adj" fmla="val 1299"/>
             </a:avLst>
           </a:prstGeom>
           <a:solidFill>
@@ -16191,7 +16336,7 @@
       </p:sp>
       <p:sp>
         <p:nvSpPr>
-          <p:cNvPr id="28" name="num-226"/>
+          <p:cNvPr id="28" name="num-227"/>
           <p:cNvSpPr txBox="1"/>
           <p:nvPr/>
         </p:nvSpPr>
@@ -16199,6 +16344,84 @@
           <a:xfrm>
             <a:off x="8275320" y="1508760"/>
             <a:ext cx="411480" cy="411480"/>
+          </a:xfrm>
+          <a:prstGeom prst="ellipse">
+            <a:avLst/>
+          </a:prstGeom>
+          <a:solidFill>
+            <a:schemeClr val="bg1"/>
+          </a:solidFill>
+          <a:ln w="12700">
+            <a:solidFill>
+              <a:srgbClr val="D7D7D7"/>
+            </a:solidFill>
+          </a:ln>
+        </p:spPr>
+        <p:txBody>
+          <a:bodyPr wrap="square" lIns="0" tIns="0" rIns="0" bIns="0" rtlCol="0" anchor="ctr"/>
+          <a:lstStyle/>
+          <a:p>
+            <a:pPr algn="ctr" indent="0" marL="0">
+              <a:buNone/>
+            </a:pPr>
+            <a:r>
+              <a:rPr lang="en-US" sz="1400" b="1" dirty="0">
+                <a:solidFill>
+                  <a:schemeClr val="tx2"/>
+                </a:solidFill>
+              </a:rPr>
+              <a:t>03</a:t>
+            </a:r>
+            <a:endParaRPr lang="en-US" sz="1400" dirty="0"/>
+          </a:p>
+        </p:txBody>
+      </p:sp>
+      <p:sp>
+        <p:nvSpPr>
+          <p:cNvPr id="29" name="text-228"/>
+          <p:cNvSpPr txBox="1"/>
+          <p:nvPr/>
+        </p:nvSpPr>
+        <p:spPr>
+          <a:xfrm>
+            <a:off x="8823960" y="1481328"/>
+            <a:ext cx="2651760" cy="457200"/>
+          </a:xfrm>
+          <a:prstGeom prst="rect">
+            <a:avLst/>
+          </a:prstGeom>
+          <a:noFill/>
+          <a:ln/>
+        </p:spPr>
+        <p:txBody>
+          <a:bodyPr wrap="square" lIns="0" tIns="0" rIns="0" bIns="0" rtlCol="0" anchor="ctr"/>
+          <a:lstStyle/>
+          <a:p>
+            <a:pPr algn="l" indent="0" marL="0">
+              <a:buNone/>
+            </a:pPr>
+            <a:r>
+              <a:rPr lang="en-US" sz="1800" b="1" dirty="0">
+                <a:solidFill>
+                  <a:schemeClr val="tx2"/>
+                </a:solidFill>
+              </a:rPr>
+              <a:t>Revoked at the source</a:t>
+            </a:r>
+            <a:endParaRPr lang="en-US" sz="1800" dirty="0"/>
+          </a:p>
+        </p:txBody>
+      </p:sp>
+      <p:sp>
+        <p:nvSpPr>
+          <p:cNvPr id="30" name="icon-bg-229"/>
+          <p:cNvSpPr/>
+          <p:nvPr/>
+        </p:nvSpPr>
+        <p:spPr>
+          <a:xfrm>
+            <a:off x="8275320" y="2103120"/>
+            <a:ext cx="502920" cy="502920"/>
           </a:xfrm>
           <a:prstGeom prst="ellipse">
             <a:avLst/>
@@ -16208,84 +16431,10 @@
           </a:solidFill>
           <a:ln/>
         </p:spPr>
-        <p:txBody>
-          <a:bodyPr wrap="square" lIns="0" tIns="0" rIns="0" bIns="0" rtlCol="0" anchor="ctr"/>
-          <a:lstStyle/>
-          <a:p>
-            <a:pPr algn="ctr" indent="0" marL="0">
-              <a:buNone/>
-            </a:pPr>
-            <a:r>
-              <a:rPr lang="en-US" sz="1600" b="1" dirty="0">
-                <a:solidFill>
-                  <a:schemeClr val="bg1"/>
-                </a:solidFill>
-              </a:rPr>
-              <a:t>3</a:t>
-            </a:r>
-            <a:endParaRPr lang="en-US" sz="1600" dirty="0"/>
-          </a:p>
-        </p:txBody>
-      </p:sp>
-      <p:sp>
-        <p:nvSpPr>
-          <p:cNvPr id="29" name="text-227"/>
-          <p:cNvSpPr txBox="1"/>
-          <p:nvPr/>
-        </p:nvSpPr>
-        <p:spPr>
-          <a:xfrm>
-            <a:off x="8823960" y="1481328"/>
-            <a:ext cx="2651760" cy="457200"/>
-          </a:xfrm>
-          <a:prstGeom prst="rect">
-            <a:avLst/>
-          </a:prstGeom>
-          <a:noFill/>
-          <a:ln/>
-        </p:spPr>
-        <p:txBody>
-          <a:bodyPr wrap="square" lIns="0" tIns="0" rIns="0" bIns="0" rtlCol="0" anchor="ctr"/>
-          <a:lstStyle/>
-          <a:p>
-            <a:pPr algn="l" indent="0" marL="0">
-              <a:buNone/>
-            </a:pPr>
-            <a:r>
-              <a:rPr lang="en-US" sz="1800" b="1" dirty="0">
-                <a:solidFill>
-                  <a:schemeClr val="tx2"/>
-                </a:solidFill>
-              </a:rPr>
-              <a:t>Revoked at the source</a:t>
-            </a:r>
-            <a:endParaRPr lang="en-US" sz="1800" dirty="0"/>
-          </a:p>
-        </p:txBody>
-      </p:sp>
-      <p:sp>
-        <p:nvSpPr>
-          <p:cNvPr id="30" name="icon-bg-228"/>
-          <p:cNvSpPr/>
-          <p:nvPr/>
-        </p:nvSpPr>
-        <p:spPr>
-          <a:xfrm>
-            <a:off x="8275320" y="2103120"/>
-            <a:ext cx="502920" cy="502920"/>
-          </a:xfrm>
-          <a:prstGeom prst="ellipse">
-            <a:avLst/>
-          </a:prstGeom>
-          <a:solidFill>
-            <a:schemeClr val="accent3"/>
-          </a:solidFill>
-          <a:ln/>
-        </p:spPr>
       </p:sp>
       <p:pic>
         <p:nvPicPr>
-          <p:cNvPr id="31" name="icon-229" descr="preencoded.png">    </p:cNvPr>
+          <p:cNvPr id="31" name="icon-230" descr="preencoded.png">    </p:cNvPr>
           <p:cNvPicPr>
             <a:picLocks noChangeAspect="1"/>
           </p:cNvPicPr>
@@ -16309,7 +16458,7 @@
       </p:pic>
       <p:sp>
         <p:nvSpPr>
-          <p:cNvPr id="32" name="text-230"/>
+          <p:cNvPr id="32" name="text-231"/>
           <p:cNvSpPr txBox="1"/>
           <p:nvPr/>
         </p:nvSpPr>
@@ -16345,7 +16494,7 @@
       </p:sp>
       <p:sp>
         <p:nvSpPr>
-          <p:cNvPr id="33" name="text-231"/>
+          <p:cNvPr id="33" name="text-232"/>
           <p:cNvSpPr txBox="1"/>
           <p:nvPr/>
         </p:nvSpPr>
@@ -16381,7 +16530,7 @@
       </p:sp>
       <p:sp>
         <p:nvSpPr>
-          <p:cNvPr id="34" name="answer-mock-232"/>
+          <p:cNvPr id="34" name="answer-mock-233"/>
           <p:cNvSpPr/>
           <p:nvPr/>
         </p:nvSpPr>
@@ -16392,7 +16541,7 @@
           </a:xfrm>
           <a:prstGeom prst="roundRect">
             <a:avLst>
-              <a:gd name="adj" fmla="val 5926"/>
+              <a:gd name="adj" fmla="val 3704"/>
             </a:avLst>
           </a:prstGeom>
           <a:solidFill>
@@ -16400,7 +16549,7 @@
           </a:solidFill>
           <a:ln w="12700">
             <a:solidFill>
-              <a:srgbClr val="CBD5E1"/>
+              <a:srgbClr val="D7D7D7"/>
             </a:solidFill>
             <a:prstDash val="solid"/>
           </a:ln>
@@ -16408,7 +16557,7 @@
       </p:sp>
       <p:sp>
         <p:nvSpPr>
-          <p:cNvPr id="35" name="text-233"/>
+          <p:cNvPr id="35" name="text-234"/>
           <p:cNvSpPr txBox="1"/>
           <p:nvPr/>
         </p:nvSpPr>
@@ -16458,7 +16607,7 @@
       </p:sp>
       <p:sp>
         <p:nvSpPr>
-          <p:cNvPr id="36" name="verdict-234"/>
+          <p:cNvPr id="36" name="verdict-235"/>
           <p:cNvSpPr/>
           <p:nvPr/>
         </p:nvSpPr>
@@ -16469,11 +16618,11 @@
           </a:xfrm>
           <a:prstGeom prst="roundRect">
             <a:avLst>
-              <a:gd name="adj" fmla="val 7619"/>
+              <a:gd name="adj" fmla="val 4762"/>
             </a:avLst>
           </a:prstGeom>
           <a:solidFill>
-            <a:srgbClr val="FDF4E4"/>
+            <a:srgbClr val="FCF3E3"/>
           </a:solidFill>
           <a:ln w="12700">
             <a:solidFill>
@@ -16485,7 +16634,7 @@
       </p:sp>
       <p:sp>
         <p:nvSpPr>
-          <p:cNvPr id="37" name="text-235"/>
+          <p:cNvPr id="37" name="text-236"/>
           <p:cNvSpPr txBox="1"/>
           <p:nvPr/>
         </p:nvSpPr>
@@ -16521,7 +16670,7 @@
       </p:sp>
       <p:sp>
         <p:nvSpPr>
-          <p:cNvPr id="38" name="text-236"/>
+          <p:cNvPr id="38" name="text-237"/>
           <p:cNvSpPr txBox="1"/>
           <p:nvPr/>
         </p:nvSpPr>
@@ -16652,20 +16801,31 @@
               <a:buNone/>
             </a:pPr>
             <a:r>
-              <a:rPr lang="en-US" sz="2800" b="1" dirty="0">
+              <a:rPr lang="en-US" sz="2600" b="1" dirty="0">
                 <a:solidFill>
                   <a:schemeClr val="tx2"/>
                 </a:solidFill>
               </a:rPr>
-              <a:t>All five mandatory scenarios run end to end, and each is a test</a:t>
-            </a:r>
-            <a:endParaRPr lang="en-US" sz="2800" dirty="0"/>
+              <a:t>All five mandatory scenarios run end to end,</a:t>
+            </a:r>
+            <a:pPr algn="l" indent="0" marL="0">
+              <a:buNone/>
+            </a:pPr>
+            <a:r>
+              <a:rPr lang="en-US" sz="2600" b="1" dirty="0">
+                <a:solidFill>
+                  <a:srgbClr val="8C8C8C"/>
+                </a:solidFill>
+              </a:rPr>
+              <a:t> and each is a test</a:t>
+            </a:r>
+            <a:endParaRPr lang="en-US" sz="2600" dirty="0"/>
           </a:p>
         </p:txBody>
       </p:sp>
       <p:graphicFrame>
         <p:nvGraphicFramePr>
-          <p:cNvPr id="9" name="scenario-table-237"/>
+          <p:cNvPr id="9" name="scenario-table-238"/>
           <p:cNvGraphicFramePr>
             <a:graphicFrameLocks noGrp="1"/>
           </p:cNvGraphicFramePr>
@@ -16706,7 +16866,7 @@
                   <a:tcPr marL="91440" marR="91440" marT="54864" marB="54864" anchor="ctr">
                     <a:lnL w="9525" cap="flat" cmpd="sng" algn="ctr">
                       <a:solidFill>
-                        <a:srgbClr val="CBD5E1"/>
+                        <a:srgbClr val="D7D7D7"/>
                       </a:solidFill>
                       <a:prstDash val="solid"/>
                       <a:round/>
@@ -16715,7 +16875,7 @@
                     </a:lnL>
                     <a:lnR w="9525" cap="flat" cmpd="sng" algn="ctr">
                       <a:solidFill>
-                        <a:srgbClr val="CBD5E1"/>
+                        <a:srgbClr val="D7D7D7"/>
                       </a:solidFill>
                       <a:prstDash val="solid"/>
                       <a:round/>
@@ -16724,7 +16884,7 @@
                     </a:lnR>
                     <a:lnT w="9525" cap="flat" cmpd="sng" algn="ctr">
                       <a:solidFill>
-                        <a:srgbClr val="CBD5E1"/>
+                        <a:srgbClr val="D7D7D7"/>
                       </a:solidFill>
                       <a:prstDash val="solid"/>
                       <a:round/>
@@ -16733,7 +16893,7 @@
                     </a:lnT>
                     <a:lnB w="9525" cap="flat" cmpd="sng" algn="ctr">
                       <a:solidFill>
-                        <a:srgbClr val="CBD5E1"/>
+                        <a:srgbClr val="D7D7D7"/>
                       </a:solidFill>
                       <a:prstDash val="solid"/>
                       <a:round/>
@@ -16767,7 +16927,7 @@
                   <a:tcPr marL="91440" marR="91440" marT="54864" marB="54864" anchor="ctr">
                     <a:lnL w="9525" cap="flat" cmpd="sng" algn="ctr">
                       <a:solidFill>
-                        <a:srgbClr val="CBD5E1"/>
+                        <a:srgbClr val="D7D7D7"/>
                       </a:solidFill>
                       <a:prstDash val="solid"/>
                       <a:round/>
@@ -16776,7 +16936,7 @@
                     </a:lnL>
                     <a:lnR w="9525" cap="flat" cmpd="sng" algn="ctr">
                       <a:solidFill>
-                        <a:srgbClr val="CBD5E1"/>
+                        <a:srgbClr val="D7D7D7"/>
                       </a:solidFill>
                       <a:prstDash val="solid"/>
                       <a:round/>
@@ -16785,7 +16945,7 @@
                     </a:lnR>
                     <a:lnT w="9525" cap="flat" cmpd="sng" algn="ctr">
                       <a:solidFill>
-                        <a:srgbClr val="CBD5E1"/>
+                        <a:srgbClr val="D7D7D7"/>
                       </a:solidFill>
                       <a:prstDash val="solid"/>
                       <a:round/>
@@ -16794,7 +16954,7 @@
                     </a:lnT>
                     <a:lnB w="9525" cap="flat" cmpd="sng" algn="ctr">
                       <a:solidFill>
-                        <a:srgbClr val="CBD5E1"/>
+                        <a:srgbClr val="D7D7D7"/>
                       </a:solidFill>
                       <a:prstDash val="solid"/>
                       <a:round/>
@@ -16828,7 +16988,7 @@
                   <a:tcPr marL="91440" marR="91440" marT="54864" marB="54864" anchor="ctr">
                     <a:lnL w="9525" cap="flat" cmpd="sng" algn="ctr">
                       <a:solidFill>
-                        <a:srgbClr val="CBD5E1"/>
+                        <a:srgbClr val="D7D7D7"/>
                       </a:solidFill>
                       <a:prstDash val="solid"/>
                       <a:round/>
@@ -16837,7 +16997,7 @@
                     </a:lnL>
                     <a:lnR w="9525" cap="flat" cmpd="sng" algn="ctr">
                       <a:solidFill>
-                        <a:srgbClr val="CBD5E1"/>
+                        <a:srgbClr val="D7D7D7"/>
                       </a:solidFill>
                       <a:prstDash val="solid"/>
                       <a:round/>
@@ -16846,7 +17006,7 @@
                     </a:lnR>
                     <a:lnT w="9525" cap="flat" cmpd="sng" algn="ctr">
                       <a:solidFill>
-                        <a:srgbClr val="CBD5E1"/>
+                        <a:srgbClr val="D7D7D7"/>
                       </a:solidFill>
                       <a:prstDash val="solid"/>
                       <a:round/>
@@ -16855,7 +17015,7 @@
                     </a:lnT>
                     <a:lnB w="9525" cap="flat" cmpd="sng" algn="ctr">
                       <a:solidFill>
-                        <a:srgbClr val="CBD5E1"/>
+                        <a:srgbClr val="D7D7D7"/>
                       </a:solidFill>
                       <a:prstDash val="solid"/>
                       <a:round/>
@@ -16889,7 +17049,7 @@
                   <a:tcPr marL="91440" marR="91440" marT="54864" marB="54864" anchor="ctr">
                     <a:lnL w="9525" cap="flat" cmpd="sng" algn="ctr">
                       <a:solidFill>
-                        <a:srgbClr val="CBD5E1"/>
+                        <a:srgbClr val="D7D7D7"/>
                       </a:solidFill>
                       <a:prstDash val="solid"/>
                       <a:round/>
@@ -16898,7 +17058,7 @@
                     </a:lnL>
                     <a:lnR w="9525" cap="flat" cmpd="sng" algn="ctr">
                       <a:solidFill>
-                        <a:srgbClr val="CBD5E1"/>
+                        <a:srgbClr val="D7D7D7"/>
                       </a:solidFill>
                       <a:prstDash val="solid"/>
                       <a:round/>
@@ -16907,7 +17067,7 @@
                     </a:lnR>
                     <a:lnT w="9525" cap="flat" cmpd="sng" algn="ctr">
                       <a:solidFill>
-                        <a:srgbClr val="CBD5E1"/>
+                        <a:srgbClr val="D7D7D7"/>
                       </a:solidFill>
                       <a:prstDash val="solid"/>
                       <a:round/>
@@ -16916,7 +17076,7 @@
                     </a:lnT>
                     <a:lnB w="9525" cap="flat" cmpd="sng" algn="ctr">
                       <a:solidFill>
-                        <a:srgbClr val="CBD5E1"/>
+                        <a:srgbClr val="D7D7D7"/>
                       </a:solidFill>
                       <a:prstDash val="solid"/>
                       <a:round/>
@@ -16952,7 +17112,7 @@
                   <a:tcPr marL="91440" marR="91440" marT="54864" marB="54864" anchor="ctr">
                     <a:lnL w="9525" cap="flat" cmpd="sng" algn="ctr">
                       <a:solidFill>
-                        <a:srgbClr val="CBD5E1"/>
+                        <a:srgbClr val="D7D7D7"/>
                       </a:solidFill>
                       <a:prstDash val="solid"/>
                       <a:round/>
@@ -16961,7 +17121,7 @@
                     </a:lnL>
                     <a:lnR w="9525" cap="flat" cmpd="sng" algn="ctr">
                       <a:solidFill>
-                        <a:srgbClr val="CBD5E1"/>
+                        <a:srgbClr val="D7D7D7"/>
                       </a:solidFill>
                       <a:prstDash val="solid"/>
                       <a:round/>
@@ -16970,7 +17130,7 @@
                     </a:lnR>
                     <a:lnT w="9525" cap="flat" cmpd="sng" algn="ctr">
                       <a:solidFill>
-                        <a:srgbClr val="CBD5E1"/>
+                        <a:srgbClr val="D7D7D7"/>
                       </a:solidFill>
                       <a:prstDash val="solid"/>
                       <a:round/>
@@ -16979,7 +17139,7 @@
                     </a:lnT>
                     <a:lnB w="9525" cap="flat" cmpd="sng" algn="ctr">
                       <a:solidFill>
-                        <a:srgbClr val="CBD5E1"/>
+                        <a:srgbClr val="D7D7D7"/>
                       </a:solidFill>
                       <a:prstDash val="solid"/>
                       <a:round/>
@@ -17013,7 +17173,7 @@
                   <a:tcPr marL="91440" marR="91440" marT="54864" marB="54864" anchor="ctr">
                     <a:lnL w="9525" cap="flat" cmpd="sng" algn="ctr">
                       <a:solidFill>
-                        <a:srgbClr val="CBD5E1"/>
+                        <a:srgbClr val="D7D7D7"/>
                       </a:solidFill>
                       <a:prstDash val="solid"/>
                       <a:round/>
@@ -17022,7 +17182,7 @@
                     </a:lnL>
                     <a:lnR w="9525" cap="flat" cmpd="sng" algn="ctr">
                       <a:solidFill>
-                        <a:srgbClr val="CBD5E1"/>
+                        <a:srgbClr val="D7D7D7"/>
                       </a:solidFill>
                       <a:prstDash val="solid"/>
                       <a:round/>
@@ -17031,7 +17191,7 @@
                     </a:lnR>
                     <a:lnT w="9525" cap="flat" cmpd="sng" algn="ctr">
                       <a:solidFill>
-                        <a:srgbClr val="CBD5E1"/>
+                        <a:srgbClr val="D7D7D7"/>
                       </a:solidFill>
                       <a:prstDash val="solid"/>
                       <a:round/>
@@ -17040,7 +17200,7 @@
                     </a:lnT>
                     <a:lnB w="9525" cap="flat" cmpd="sng" algn="ctr">
                       <a:solidFill>
-                        <a:srgbClr val="CBD5E1"/>
+                        <a:srgbClr val="D7D7D7"/>
                       </a:solidFill>
                       <a:prstDash val="solid"/>
                       <a:round/>
@@ -17066,7 +17226,7 @@
                             <a:schemeClr val="tx1"/>
                           </a:solidFill>
                         </a:rPr>
-                        <a:t>John asks about the Rail-B cutover. The facts are spread across email, Jira, Slack and Drive, and one answer cites several of them</a:t>
+                        <a:t>John asks about the Rail-B cutover and gets one answer citing an email, Jira PAY-150, two Slack channels and the Drive vendor list (8/8 claims supported)</a:t>
                       </a:r>
                       <a:endParaRPr lang="en-US" sz="1300" dirty="0"/>
                     </a:p>
@@ -17074,7 +17234,7 @@
                   <a:tcPr marL="91440" marR="91440" marT="54864" marB="54864" anchor="ctr">
                     <a:lnL w="9525" cap="flat" cmpd="sng" algn="ctr">
                       <a:solidFill>
-                        <a:srgbClr val="CBD5E1"/>
+                        <a:srgbClr val="D7D7D7"/>
                       </a:solidFill>
                       <a:prstDash val="solid"/>
                       <a:round/>
@@ -17083,7 +17243,7 @@
                     </a:lnL>
                     <a:lnR w="9525" cap="flat" cmpd="sng" algn="ctr">
                       <a:solidFill>
-                        <a:srgbClr val="CBD5E1"/>
+                        <a:srgbClr val="D7D7D7"/>
                       </a:solidFill>
                       <a:prstDash val="solid"/>
                       <a:round/>
@@ -17092,7 +17252,7 @@
                     </a:lnR>
                     <a:lnT w="9525" cap="flat" cmpd="sng" algn="ctr">
                       <a:solidFill>
-                        <a:srgbClr val="CBD5E1"/>
+                        <a:srgbClr val="D7D7D7"/>
                       </a:solidFill>
                       <a:prstDash val="solid"/>
                       <a:round/>
@@ -17101,7 +17261,7 @@
                     </a:lnT>
                     <a:lnB w="9525" cap="flat" cmpd="sng" algn="ctr">
                       <a:solidFill>
-                        <a:srgbClr val="CBD5E1"/>
+                        <a:srgbClr val="D7D7D7"/>
                       </a:solidFill>
                       <a:prstDash val="solid"/>
                       <a:round/>
@@ -17135,7 +17295,7 @@
                   <a:tcPr marL="91440" marR="91440" marT="54864" marB="54864" anchor="ctr">
                     <a:lnL w="9525" cap="flat" cmpd="sng" algn="ctr">
                       <a:solidFill>
-                        <a:srgbClr val="CBD5E1"/>
+                        <a:srgbClr val="D7D7D7"/>
                       </a:solidFill>
                       <a:prstDash val="solid"/>
                       <a:round/>
@@ -17144,7 +17304,7 @@
                     </a:lnL>
                     <a:lnR w="9525" cap="flat" cmpd="sng" algn="ctr">
                       <a:solidFill>
-                        <a:srgbClr val="CBD5E1"/>
+                        <a:srgbClr val="D7D7D7"/>
                       </a:solidFill>
                       <a:prstDash val="solid"/>
                       <a:round/>
@@ -17153,7 +17313,7 @@
                     </a:lnR>
                     <a:lnT w="9525" cap="flat" cmpd="sng" algn="ctr">
                       <a:solidFill>
-                        <a:srgbClr val="CBD5E1"/>
+                        <a:srgbClr val="D7D7D7"/>
                       </a:solidFill>
                       <a:prstDash val="solid"/>
                       <a:round/>
@@ -17162,7 +17322,7 @@
                     </a:lnT>
                     <a:lnB w="9525" cap="flat" cmpd="sng" algn="ctr">
                       <a:solidFill>
-                        <a:srgbClr val="CBD5E1"/>
+                        <a:srgbClr val="D7D7D7"/>
                       </a:solidFill>
                       <a:prstDash val="solid"/>
                       <a:round/>
@@ -17198,7 +17358,7 @@
                   <a:tcPr marL="91440" marR="91440" marT="54864" marB="54864" anchor="ctr">
                     <a:lnL w="9525" cap="flat" cmpd="sng" algn="ctr">
                       <a:solidFill>
-                        <a:srgbClr val="CBD5E1"/>
+                        <a:srgbClr val="D7D7D7"/>
                       </a:solidFill>
                       <a:prstDash val="solid"/>
                       <a:round/>
@@ -17207,7 +17367,7 @@
                     </a:lnL>
                     <a:lnR w="9525" cap="flat" cmpd="sng" algn="ctr">
                       <a:solidFill>
-                        <a:srgbClr val="CBD5E1"/>
+                        <a:srgbClr val="D7D7D7"/>
                       </a:solidFill>
                       <a:prstDash val="solid"/>
                       <a:round/>
@@ -17216,7 +17376,7 @@
                     </a:lnR>
                     <a:lnT w="9525" cap="flat" cmpd="sng" algn="ctr">
                       <a:solidFill>
-                        <a:srgbClr val="CBD5E1"/>
+                        <a:srgbClr val="D7D7D7"/>
                       </a:solidFill>
                       <a:prstDash val="solid"/>
                       <a:round/>
@@ -17225,7 +17385,7 @@
                     </a:lnT>
                     <a:lnB w="9525" cap="flat" cmpd="sng" algn="ctr">
                       <a:solidFill>
-                        <a:srgbClr val="CBD5E1"/>
+                        <a:srgbClr val="D7D7D7"/>
                       </a:solidFill>
                       <a:prstDash val="solid"/>
                       <a:round/>
@@ -17259,7 +17419,7 @@
                   <a:tcPr marL="91440" marR="91440" marT="54864" marB="54864" anchor="ctr">
                     <a:lnL w="9525" cap="flat" cmpd="sng" algn="ctr">
                       <a:solidFill>
-                        <a:srgbClr val="CBD5E1"/>
+                        <a:srgbClr val="D7D7D7"/>
                       </a:solidFill>
                       <a:prstDash val="solid"/>
                       <a:round/>
@@ -17268,7 +17428,7 @@
                     </a:lnL>
                     <a:lnR w="9525" cap="flat" cmpd="sng" algn="ctr">
                       <a:solidFill>
-                        <a:srgbClr val="CBD5E1"/>
+                        <a:srgbClr val="D7D7D7"/>
                       </a:solidFill>
                       <a:prstDash val="solid"/>
                       <a:round/>
@@ -17277,7 +17437,7 @@
                     </a:lnR>
                     <a:lnT w="9525" cap="flat" cmpd="sng" algn="ctr">
                       <a:solidFill>
-                        <a:srgbClr val="CBD5E1"/>
+                        <a:srgbClr val="D7D7D7"/>
                       </a:solidFill>
                       <a:prstDash val="solid"/>
                       <a:round/>
@@ -17286,7 +17446,7 @@
                     </a:lnT>
                     <a:lnB w="9525" cap="flat" cmpd="sng" algn="ctr">
                       <a:solidFill>
-                        <a:srgbClr val="CBD5E1"/>
+                        <a:srgbClr val="D7D7D7"/>
                       </a:solidFill>
                       <a:prstDash val="solid"/>
                       <a:round/>
@@ -17320,7 +17480,7 @@
                   <a:tcPr marL="91440" marR="91440" marT="54864" marB="54864" anchor="ctr">
                     <a:lnL w="9525" cap="flat" cmpd="sng" algn="ctr">
                       <a:solidFill>
-                        <a:srgbClr val="CBD5E1"/>
+                        <a:srgbClr val="D7D7D7"/>
                       </a:solidFill>
                       <a:prstDash val="solid"/>
                       <a:round/>
@@ -17329,7 +17489,7 @@
                     </a:lnL>
                     <a:lnR w="9525" cap="flat" cmpd="sng" algn="ctr">
                       <a:solidFill>
-                        <a:srgbClr val="CBD5E1"/>
+                        <a:srgbClr val="D7D7D7"/>
                       </a:solidFill>
                       <a:prstDash val="solid"/>
                       <a:round/>
@@ -17338,7 +17498,7 @@
                     </a:lnR>
                     <a:lnT w="9525" cap="flat" cmpd="sng" algn="ctr">
                       <a:solidFill>
-                        <a:srgbClr val="CBD5E1"/>
+                        <a:srgbClr val="D7D7D7"/>
                       </a:solidFill>
                       <a:prstDash val="solid"/>
                       <a:round/>
@@ -17347,7 +17507,7 @@
                     </a:lnT>
                     <a:lnB w="9525" cap="flat" cmpd="sng" algn="ctr">
                       <a:solidFill>
-                        <a:srgbClr val="CBD5E1"/>
+                        <a:srgbClr val="D7D7D7"/>
                       </a:solidFill>
                       <a:prstDash val="solid"/>
                       <a:round/>
@@ -17381,7 +17541,7 @@
                   <a:tcPr marL="91440" marR="91440" marT="54864" marB="54864" anchor="ctr">
                     <a:lnL w="9525" cap="flat" cmpd="sng" algn="ctr">
                       <a:solidFill>
-                        <a:srgbClr val="CBD5E1"/>
+                        <a:srgbClr val="D7D7D7"/>
                       </a:solidFill>
                       <a:prstDash val="solid"/>
                       <a:round/>
@@ -17390,7 +17550,7 @@
                     </a:lnL>
                     <a:lnR w="9525" cap="flat" cmpd="sng" algn="ctr">
                       <a:solidFill>
-                        <a:srgbClr val="CBD5E1"/>
+                        <a:srgbClr val="D7D7D7"/>
                       </a:solidFill>
                       <a:prstDash val="solid"/>
                       <a:round/>
@@ -17399,7 +17559,7 @@
                     </a:lnR>
                     <a:lnT w="9525" cap="flat" cmpd="sng" algn="ctr">
                       <a:solidFill>
-                        <a:srgbClr val="CBD5E1"/>
+                        <a:srgbClr val="D7D7D7"/>
                       </a:solidFill>
                       <a:prstDash val="solid"/>
                       <a:round/>
@@ -17408,7 +17568,7 @@
                     </a:lnT>
                     <a:lnB w="9525" cap="flat" cmpd="sng" algn="ctr">
                       <a:solidFill>
-                        <a:srgbClr val="CBD5E1"/>
+                        <a:srgbClr val="D7D7D7"/>
                       </a:solidFill>
                       <a:prstDash val="solid"/>
                       <a:round/>
@@ -17444,7 +17604,7 @@
                   <a:tcPr marL="91440" marR="91440" marT="54864" marB="54864" anchor="ctr">
                     <a:lnL w="9525" cap="flat" cmpd="sng" algn="ctr">
                       <a:solidFill>
-                        <a:srgbClr val="CBD5E1"/>
+                        <a:srgbClr val="D7D7D7"/>
                       </a:solidFill>
                       <a:prstDash val="solid"/>
                       <a:round/>
@@ -17453,7 +17613,7 @@
                     </a:lnL>
                     <a:lnR w="9525" cap="flat" cmpd="sng" algn="ctr">
                       <a:solidFill>
-                        <a:srgbClr val="CBD5E1"/>
+                        <a:srgbClr val="D7D7D7"/>
                       </a:solidFill>
                       <a:prstDash val="solid"/>
                       <a:round/>
@@ -17462,7 +17622,7 @@
                     </a:lnR>
                     <a:lnT w="9525" cap="flat" cmpd="sng" algn="ctr">
                       <a:solidFill>
-                        <a:srgbClr val="CBD5E1"/>
+                        <a:srgbClr val="D7D7D7"/>
                       </a:solidFill>
                       <a:prstDash val="solid"/>
                       <a:round/>
@@ -17471,7 +17631,7 @@
                     </a:lnT>
                     <a:lnB w="9525" cap="flat" cmpd="sng" algn="ctr">
                       <a:solidFill>
-                        <a:srgbClr val="CBD5E1"/>
+                        <a:srgbClr val="D7D7D7"/>
                       </a:solidFill>
                       <a:prstDash val="solid"/>
                       <a:round/>
@@ -17505,7 +17665,7 @@
                   <a:tcPr marL="91440" marR="91440" marT="54864" marB="54864" anchor="ctr">
                     <a:lnL w="9525" cap="flat" cmpd="sng" algn="ctr">
                       <a:solidFill>
-                        <a:srgbClr val="CBD5E1"/>
+                        <a:srgbClr val="D7D7D7"/>
                       </a:solidFill>
                       <a:prstDash val="solid"/>
                       <a:round/>
@@ -17514,7 +17674,7 @@
                     </a:lnL>
                     <a:lnR w="9525" cap="flat" cmpd="sng" algn="ctr">
                       <a:solidFill>
-                        <a:srgbClr val="CBD5E1"/>
+                        <a:srgbClr val="D7D7D7"/>
                       </a:solidFill>
                       <a:prstDash val="solid"/>
                       <a:round/>
@@ -17523,7 +17683,7 @@
                     </a:lnR>
                     <a:lnT w="9525" cap="flat" cmpd="sng" algn="ctr">
                       <a:solidFill>
-                        <a:srgbClr val="CBD5E1"/>
+                        <a:srgbClr val="D7D7D7"/>
                       </a:solidFill>
                       <a:prstDash val="solid"/>
                       <a:round/>
@@ -17532,7 +17692,7 @@
                     </a:lnT>
                     <a:lnB w="9525" cap="flat" cmpd="sng" algn="ctr">
                       <a:solidFill>
-                        <a:srgbClr val="CBD5E1"/>
+                        <a:srgbClr val="D7D7D7"/>
                       </a:solidFill>
                       <a:prstDash val="solid"/>
                       <a:round/>
@@ -17566,7 +17726,7 @@
                   <a:tcPr marL="91440" marR="91440" marT="54864" marB="54864" anchor="ctr">
                     <a:lnL w="9525" cap="flat" cmpd="sng" algn="ctr">
                       <a:solidFill>
-                        <a:srgbClr val="CBD5E1"/>
+                        <a:srgbClr val="D7D7D7"/>
                       </a:solidFill>
                       <a:prstDash val="solid"/>
                       <a:round/>
@@ -17575,7 +17735,7 @@
                     </a:lnL>
                     <a:lnR w="9525" cap="flat" cmpd="sng" algn="ctr">
                       <a:solidFill>
-                        <a:srgbClr val="CBD5E1"/>
+                        <a:srgbClr val="D7D7D7"/>
                       </a:solidFill>
                       <a:prstDash val="solid"/>
                       <a:round/>
@@ -17584,7 +17744,7 @@
                     </a:lnR>
                     <a:lnT w="9525" cap="flat" cmpd="sng" algn="ctr">
                       <a:solidFill>
-                        <a:srgbClr val="CBD5E1"/>
+                        <a:srgbClr val="D7D7D7"/>
                       </a:solidFill>
                       <a:prstDash val="solid"/>
                       <a:round/>
@@ -17593,7 +17753,7 @@
                     </a:lnT>
                     <a:lnB w="9525" cap="flat" cmpd="sng" algn="ctr">
                       <a:solidFill>
-                        <a:srgbClr val="CBD5E1"/>
+                        <a:srgbClr val="D7D7D7"/>
                       </a:solidFill>
                       <a:prstDash val="solid"/>
                       <a:round/>
@@ -17627,7 +17787,7 @@
                   <a:tcPr marL="91440" marR="91440" marT="54864" marB="54864" anchor="ctr">
                     <a:lnL w="9525" cap="flat" cmpd="sng" algn="ctr">
                       <a:solidFill>
-                        <a:srgbClr val="CBD5E1"/>
+                        <a:srgbClr val="D7D7D7"/>
                       </a:solidFill>
                       <a:prstDash val="solid"/>
                       <a:round/>
@@ -17636,7 +17796,7 @@
                     </a:lnL>
                     <a:lnR w="9525" cap="flat" cmpd="sng" algn="ctr">
                       <a:solidFill>
-                        <a:srgbClr val="CBD5E1"/>
+                        <a:srgbClr val="D7D7D7"/>
                       </a:solidFill>
                       <a:prstDash val="solid"/>
                       <a:round/>
@@ -17645,7 +17805,7 @@
                     </a:lnR>
                     <a:lnT w="9525" cap="flat" cmpd="sng" algn="ctr">
                       <a:solidFill>
-                        <a:srgbClr val="CBD5E1"/>
+                        <a:srgbClr val="D7D7D7"/>
                       </a:solidFill>
                       <a:prstDash val="solid"/>
                       <a:round/>
@@ -17654,7 +17814,7 @@
                     </a:lnT>
                     <a:lnB w="9525" cap="flat" cmpd="sng" algn="ctr">
                       <a:solidFill>
-                        <a:srgbClr val="CBD5E1"/>
+                        <a:srgbClr val="D7D7D7"/>
                       </a:solidFill>
                       <a:prstDash val="solid"/>
                       <a:round/>
@@ -17690,7 +17850,7 @@
                   <a:tcPr marL="91440" marR="91440" marT="54864" marB="54864" anchor="ctr">
                     <a:lnL w="9525" cap="flat" cmpd="sng" algn="ctr">
                       <a:solidFill>
-                        <a:srgbClr val="CBD5E1"/>
+                        <a:srgbClr val="D7D7D7"/>
                       </a:solidFill>
                       <a:prstDash val="solid"/>
                       <a:round/>
@@ -17699,7 +17859,7 @@
                     </a:lnL>
                     <a:lnR w="9525" cap="flat" cmpd="sng" algn="ctr">
                       <a:solidFill>
-                        <a:srgbClr val="CBD5E1"/>
+                        <a:srgbClr val="D7D7D7"/>
                       </a:solidFill>
                       <a:prstDash val="solid"/>
                       <a:round/>
@@ -17708,7 +17868,7 @@
                     </a:lnR>
                     <a:lnT w="9525" cap="flat" cmpd="sng" algn="ctr">
                       <a:solidFill>
-                        <a:srgbClr val="CBD5E1"/>
+                        <a:srgbClr val="D7D7D7"/>
                       </a:solidFill>
                       <a:prstDash val="solid"/>
                       <a:round/>
@@ -17717,7 +17877,7 @@
                     </a:lnT>
                     <a:lnB w="9525" cap="flat" cmpd="sng" algn="ctr">
                       <a:solidFill>
-                        <a:srgbClr val="CBD5E1"/>
+                        <a:srgbClr val="D7D7D7"/>
                       </a:solidFill>
                       <a:prstDash val="solid"/>
                       <a:round/>
@@ -17751,7 +17911,7 @@
                   <a:tcPr marL="91440" marR="91440" marT="54864" marB="54864" anchor="ctr">
                     <a:lnL w="9525" cap="flat" cmpd="sng" algn="ctr">
                       <a:solidFill>
-                        <a:srgbClr val="CBD5E1"/>
+                        <a:srgbClr val="D7D7D7"/>
                       </a:solidFill>
                       <a:prstDash val="solid"/>
                       <a:round/>
@@ -17760,7 +17920,7 @@
                     </a:lnL>
                     <a:lnR w="9525" cap="flat" cmpd="sng" algn="ctr">
                       <a:solidFill>
-                        <a:srgbClr val="CBD5E1"/>
+                        <a:srgbClr val="D7D7D7"/>
                       </a:solidFill>
                       <a:prstDash val="solid"/>
                       <a:round/>
@@ -17769,7 +17929,7 @@
                     </a:lnR>
                     <a:lnT w="9525" cap="flat" cmpd="sng" algn="ctr">
                       <a:solidFill>
-                        <a:srgbClr val="CBD5E1"/>
+                        <a:srgbClr val="D7D7D7"/>
                       </a:solidFill>
                       <a:prstDash val="solid"/>
                       <a:round/>
@@ -17778,7 +17938,7 @@
                     </a:lnT>
                     <a:lnB w="9525" cap="flat" cmpd="sng" algn="ctr">
                       <a:solidFill>
-                        <a:srgbClr val="CBD5E1"/>
+                        <a:srgbClr val="D7D7D7"/>
                       </a:solidFill>
                       <a:prstDash val="solid"/>
                       <a:round/>
@@ -17812,7 +17972,7 @@
                   <a:tcPr marL="91440" marR="91440" marT="54864" marB="54864" anchor="ctr">
                     <a:lnL w="9525" cap="flat" cmpd="sng" algn="ctr">
                       <a:solidFill>
-                        <a:srgbClr val="CBD5E1"/>
+                        <a:srgbClr val="D7D7D7"/>
                       </a:solidFill>
                       <a:prstDash val="solid"/>
                       <a:round/>
@@ -17821,7 +17981,7 @@
                     </a:lnL>
                     <a:lnR w="9525" cap="flat" cmpd="sng" algn="ctr">
                       <a:solidFill>
-                        <a:srgbClr val="CBD5E1"/>
+                        <a:srgbClr val="D7D7D7"/>
                       </a:solidFill>
                       <a:prstDash val="solid"/>
                       <a:round/>
@@ -17830,7 +17990,7 @@
                     </a:lnR>
                     <a:lnT w="9525" cap="flat" cmpd="sng" algn="ctr">
                       <a:solidFill>
-                        <a:srgbClr val="CBD5E1"/>
+                        <a:srgbClr val="D7D7D7"/>
                       </a:solidFill>
                       <a:prstDash val="solid"/>
                       <a:round/>
@@ -17839,7 +17999,7 @@
                     </a:lnT>
                     <a:lnB w="9525" cap="flat" cmpd="sng" algn="ctr">
                       <a:solidFill>
-                        <a:srgbClr val="CBD5E1"/>
+                        <a:srgbClr val="D7D7D7"/>
                       </a:solidFill>
                       <a:prstDash val="solid"/>
                       <a:round/>
@@ -17873,7 +18033,7 @@
                   <a:tcPr marL="91440" marR="91440" marT="54864" marB="54864" anchor="ctr">
                     <a:lnL w="9525" cap="flat" cmpd="sng" algn="ctr">
                       <a:solidFill>
-                        <a:srgbClr val="CBD5E1"/>
+                        <a:srgbClr val="D7D7D7"/>
                       </a:solidFill>
                       <a:prstDash val="solid"/>
                       <a:round/>
@@ -17882,7 +18042,7 @@
                     </a:lnL>
                     <a:lnR w="9525" cap="flat" cmpd="sng" algn="ctr">
                       <a:solidFill>
-                        <a:srgbClr val="CBD5E1"/>
+                        <a:srgbClr val="D7D7D7"/>
                       </a:solidFill>
                       <a:prstDash val="solid"/>
                       <a:round/>
@@ -17891,7 +18051,7 @@
                     </a:lnR>
                     <a:lnT w="9525" cap="flat" cmpd="sng" algn="ctr">
                       <a:solidFill>
-                        <a:srgbClr val="CBD5E1"/>
+                        <a:srgbClr val="D7D7D7"/>
                       </a:solidFill>
                       <a:prstDash val="solid"/>
                       <a:round/>
@@ -17900,7 +18060,7 @@
                     </a:lnT>
                     <a:lnB w="9525" cap="flat" cmpd="sng" algn="ctr">
                       <a:solidFill>
-                        <a:srgbClr val="CBD5E1"/>
+                        <a:srgbClr val="D7D7D7"/>
                       </a:solidFill>
                       <a:prstDash val="solid"/>
                       <a:round/>
@@ -17936,7 +18096,7 @@
                   <a:tcPr marL="91440" marR="91440" marT="54864" marB="54864" anchor="ctr">
                     <a:lnL w="9525" cap="flat" cmpd="sng" algn="ctr">
                       <a:solidFill>
-                        <a:srgbClr val="CBD5E1"/>
+                        <a:srgbClr val="D7D7D7"/>
                       </a:solidFill>
                       <a:prstDash val="solid"/>
                       <a:round/>
@@ -17945,7 +18105,7 @@
                     </a:lnL>
                     <a:lnR w="9525" cap="flat" cmpd="sng" algn="ctr">
                       <a:solidFill>
-                        <a:srgbClr val="CBD5E1"/>
+                        <a:srgbClr val="D7D7D7"/>
                       </a:solidFill>
                       <a:prstDash val="solid"/>
                       <a:round/>
@@ -17954,7 +18114,7 @@
                     </a:lnR>
                     <a:lnT w="9525" cap="flat" cmpd="sng" algn="ctr">
                       <a:solidFill>
-                        <a:srgbClr val="CBD5E1"/>
+                        <a:srgbClr val="D7D7D7"/>
                       </a:solidFill>
                       <a:prstDash val="solid"/>
                       <a:round/>
@@ -17963,7 +18123,7 @@
                     </a:lnT>
                     <a:lnB w="9525" cap="flat" cmpd="sng" algn="ctr">
                       <a:solidFill>
-                        <a:srgbClr val="CBD5E1"/>
+                        <a:srgbClr val="D7D7D7"/>
                       </a:solidFill>
                       <a:prstDash val="solid"/>
                       <a:round/>
@@ -17997,7 +18157,7 @@
                   <a:tcPr marL="91440" marR="91440" marT="54864" marB="54864" anchor="ctr">
                     <a:lnL w="9525" cap="flat" cmpd="sng" algn="ctr">
                       <a:solidFill>
-                        <a:srgbClr val="CBD5E1"/>
+                        <a:srgbClr val="D7D7D7"/>
                       </a:solidFill>
                       <a:prstDash val="solid"/>
                       <a:round/>
@@ -18006,7 +18166,7 @@
                     </a:lnL>
                     <a:lnR w="9525" cap="flat" cmpd="sng" algn="ctr">
                       <a:solidFill>
-                        <a:srgbClr val="CBD5E1"/>
+                        <a:srgbClr val="D7D7D7"/>
                       </a:solidFill>
                       <a:prstDash val="solid"/>
                       <a:round/>
@@ -18015,7 +18175,7 @@
                     </a:lnR>
                     <a:lnT w="9525" cap="flat" cmpd="sng" algn="ctr">
                       <a:solidFill>
-                        <a:srgbClr val="CBD5E1"/>
+                        <a:srgbClr val="D7D7D7"/>
                       </a:solidFill>
                       <a:prstDash val="solid"/>
                       <a:round/>
@@ -18024,7 +18184,7 @@
                     </a:lnT>
                     <a:lnB w="9525" cap="flat" cmpd="sng" algn="ctr">
                       <a:solidFill>
-                        <a:srgbClr val="CBD5E1"/>
+                        <a:srgbClr val="D7D7D7"/>
                       </a:solidFill>
                       <a:prstDash val="solid"/>
                       <a:round/>
@@ -18058,7 +18218,7 @@
                   <a:tcPr marL="91440" marR="91440" marT="54864" marB="54864" anchor="ctr">
                     <a:lnL w="9525" cap="flat" cmpd="sng" algn="ctr">
                       <a:solidFill>
-                        <a:srgbClr val="CBD5E1"/>
+                        <a:srgbClr val="D7D7D7"/>
                       </a:solidFill>
                       <a:prstDash val="solid"/>
                       <a:round/>
@@ -18067,7 +18227,7 @@
                     </a:lnL>
                     <a:lnR w="9525" cap="flat" cmpd="sng" algn="ctr">
                       <a:solidFill>
-                        <a:srgbClr val="CBD5E1"/>
+                        <a:srgbClr val="D7D7D7"/>
                       </a:solidFill>
                       <a:prstDash val="solid"/>
                       <a:round/>
@@ -18076,7 +18236,7 @@
                     </a:lnR>
                     <a:lnT w="9525" cap="flat" cmpd="sng" algn="ctr">
                       <a:solidFill>
-                        <a:srgbClr val="CBD5E1"/>
+                        <a:srgbClr val="D7D7D7"/>
                       </a:solidFill>
                       <a:prstDash val="solid"/>
                       <a:round/>
@@ -18085,7 +18245,7 @@
                     </a:lnT>
                     <a:lnB w="9525" cap="flat" cmpd="sng" algn="ctr">
                       <a:solidFill>
-                        <a:srgbClr val="CBD5E1"/>
+                        <a:srgbClr val="D7D7D7"/>
                       </a:solidFill>
                       <a:prstDash val="solid"/>
                       <a:round/>
@@ -18119,7 +18279,7 @@
                   <a:tcPr marL="91440" marR="91440" marT="54864" marB="54864" anchor="ctr">
                     <a:lnL w="9525" cap="flat" cmpd="sng" algn="ctr">
                       <a:solidFill>
-                        <a:srgbClr val="CBD5E1"/>
+                        <a:srgbClr val="D7D7D7"/>
                       </a:solidFill>
                       <a:prstDash val="solid"/>
                       <a:round/>
@@ -18128,7 +18288,7 @@
                     </a:lnL>
                     <a:lnR w="9525" cap="flat" cmpd="sng" algn="ctr">
                       <a:solidFill>
-                        <a:srgbClr val="CBD5E1"/>
+                        <a:srgbClr val="D7D7D7"/>
                       </a:solidFill>
                       <a:prstDash val="solid"/>
                       <a:round/>
@@ -18137,7 +18297,7 @@
                     </a:lnR>
                     <a:lnT w="9525" cap="flat" cmpd="sng" algn="ctr">
                       <a:solidFill>
-                        <a:srgbClr val="CBD5E1"/>
+                        <a:srgbClr val="D7D7D7"/>
                       </a:solidFill>
                       <a:prstDash val="solid"/>
                       <a:round/>
@@ -18146,7 +18306,7 @@
                     </a:lnT>
                     <a:lnB w="9525" cap="flat" cmpd="sng" algn="ctr">
                       <a:solidFill>
-                        <a:srgbClr val="CBD5E1"/>
+                        <a:srgbClr val="D7D7D7"/>
                       </a:solidFill>
                       <a:prstDash val="solid"/>
                       <a:round/>
@@ -18165,7 +18325,7 @@
       </p:graphicFrame>
       <p:sp>
         <p:nvSpPr>
-          <p:cNvPr id="4" name="text-238"/>
+          <p:cNvPr id="4" name="text-239"/>
           <p:cNvSpPr txBox="1"/>
           <p:nvPr/>
         </p:nvSpPr>
@@ -18296,20 +18456,31 @@
               <a:buNone/>
             </a:pPr>
             <a:r>
-              <a:rPr lang="en-US" sz="2800" b="1" dirty="0">
+              <a:rPr lang="en-US" sz="2600" b="1" dirty="0">
                 <a:solidFill>
                   <a:schemeClr val="tx2"/>
                 </a:solidFill>
               </a:rPr>
-              <a:t>Every answer ships with its own receipts</a:t>
-            </a:r>
-            <a:endParaRPr lang="en-US" sz="2800" dirty="0"/>
-          </a:p>
-        </p:txBody>
-      </p:sp>
-      <p:sp>
-        <p:nvSpPr>
-          <p:cNvPr id="3" name="answer-card-239"/>
+              <a:t>Every answer ships</a:t>
+            </a:r>
+            <a:pPr algn="l" indent="0" marL="0">
+              <a:buNone/>
+            </a:pPr>
+            <a:r>
+              <a:rPr lang="en-US" sz="2600" b="1" dirty="0">
+                <a:solidFill>
+                  <a:srgbClr val="8C8C8C"/>
+                </a:solidFill>
+              </a:rPr>
+              <a:t> with its own receipts</a:t>
+            </a:r>
+            <a:endParaRPr lang="en-US" sz="2600" dirty="0"/>
+          </a:p>
+        </p:txBody>
+      </p:sp>
+      <p:sp>
+        <p:nvSpPr>
+          <p:cNvPr id="3" name="answer-card-240"/>
           <p:cNvSpPr/>
           <p:nvPr/>
         </p:nvSpPr>
@@ -18320,7 +18491,7 @@
           </a:xfrm>
           <a:prstGeom prst="roundRect">
             <a:avLst>
-              <a:gd name="adj" fmla="val 1538"/>
+              <a:gd name="adj" fmla="val 962"/>
             </a:avLst>
           </a:prstGeom>
           <a:solidFill>
@@ -18328,29 +18499,22 @@
           </a:solidFill>
           <a:ln w="12700">
             <a:solidFill>
-              <a:srgbClr val="CBD5E1"/>
+              <a:srgbClr val="D7D7D7"/>
             </a:solidFill>
             <a:prstDash val="solid"/>
           </a:ln>
-          <a:effectLst>
-            <a:outerShdw sx="100000" sy="100000" kx="0" ky="0" algn="bl" rotWithShape="0" blurRad="76200" dist="25400" dir="5400000">
-              <a:srgbClr val="0F172A">
-                <a:alpha val="12000"/>
-              </a:srgbClr>
-            </a:outerShdw>
-          </a:effectLst>
-        </p:spPr>
-      </p:sp>
-      <p:sp>
-        <p:nvSpPr>
-          <p:cNvPr id="4" name="text-240"/>
+        </p:spPr>
+      </p:sp>
+      <p:sp>
+        <p:nvSpPr>
+          <p:cNvPr id="4" name="text-241"/>
           <p:cNvSpPr txBox="1"/>
           <p:nvPr/>
         </p:nvSpPr>
         <p:spPr>
           <a:xfrm>
-            <a:off x="822960" y="1554480"/>
-            <a:ext cx="4846320" cy="365760"/>
+            <a:off x="822960" y="1536192"/>
+            <a:ext cx="4846320" cy="320040"/>
           </a:xfrm>
           <a:prstGeom prst="rect">
             <a:avLst/>
@@ -18366,12 +18530,81 @@
               <a:buNone/>
             </a:pPr>
             <a:r>
-              <a:rPr lang="en-US" sz="1400" i="1" dirty="0">
+              <a:rPr lang="en-US" sz="1200" i="1" dirty="0">
                 <a:solidFill>
                   <a:schemeClr val="accent6"/>
                 </a:solidFill>
               </a:rPr>
-              <a:t>“What were the Q3 board deck revenue figures?”</a:t>
+              <a:t>“What were the Q3 board deck revenue figures?”  ·  John Tan</a:t>
+            </a:r>
+            <a:endParaRPr lang="en-US" sz="1200" dirty="0"/>
+          </a:p>
+        </p:txBody>
+      </p:sp>
+      <p:sp>
+        <p:nvSpPr>
+          <p:cNvPr id="5" name="text-242"/>
+          <p:cNvSpPr txBox="1"/>
+          <p:nvPr/>
+        </p:nvSpPr>
+        <p:spPr>
+          <a:xfrm>
+            <a:off x="822960" y="1901952"/>
+            <a:ext cx="4846320" cy="960120"/>
+          </a:xfrm>
+          <a:prstGeom prst="rect">
+            <a:avLst/>
+          </a:prstGeom>
+          <a:noFill/>
+          <a:ln/>
+        </p:spPr>
+        <p:txBody>
+          <a:bodyPr wrap="square" lIns="0" tIns="0" rIns="0" bIns="0" rtlCol="0" anchor="t"/>
+          <a:lstStyle/>
+          <a:p>
+            <a:pPr algn="l" indent="0" marL="0">
+              <a:buNone/>
+            </a:pPr>
+            <a:r>
+              <a:rPr lang="en-US" sz="1400" dirty="0">
+                <a:solidFill>
+                  <a:schemeClr val="tx1"/>
+                </a:solidFill>
+              </a:rPr>
+              <a:t>Q3 2026 revenue: SGD 48.6 million, up 18% year on year (Q3 2025: SGD 41.2 million). </a:t>
+            </a:r>
+            <a:pPr algn="l" indent="0" marL="0">
+              <a:buNone/>
+            </a:pPr>
+            <a:r>
+              <a:rPr lang="en-US" sz="1400" b="1" dirty="0">
+                <a:solidFill>
+                  <a:schemeClr val="accent1"/>
+                </a:solidFill>
+              </a:rPr>
+              <a:t>[E4]</a:t>
+            </a:r>
+            <a:pPr algn="l" indent="0" marL="0">
+              <a:buNone/>
+            </a:pPr>
+            <a:r>
+              <a:rPr lang="en-US" sz="1400" dirty="0">
+                <a:solidFill>
+                  <a:schemeClr val="tx1"/>
+                </a:solidFill>
+              </a:rPr>
+              <a:t> Q4 2026 revenue guidance: SGD 50 to 52 million. </a:t>
+            </a:r>
+            <a:pPr algn="l" indent="0" marL="0">
+              <a:buNone/>
+            </a:pPr>
+            <a:r>
+              <a:rPr lang="en-US" sz="1400" b="1" dirty="0">
+                <a:solidFill>
+                  <a:schemeClr val="accent1"/>
+                </a:solidFill>
+              </a:rPr>
+              <a:t>[E1]</a:t>
             </a:r>
             <a:endParaRPr lang="en-US" sz="1400" dirty="0"/>
           </a:p>
@@ -18379,98 +18612,112 @@
       </p:sp>
       <p:sp>
         <p:nvSpPr>
-          <p:cNvPr id="5" name="text-241"/>
-          <p:cNvSpPr txBox="1"/>
-          <p:nvPr/>
-        </p:nvSpPr>
-        <p:spPr>
-          <a:xfrm>
-            <a:off x="822960" y="2011680"/>
-            <a:ext cx="4846320" cy="868680"/>
-          </a:xfrm>
-          <a:prstGeom prst="rect">
-            <a:avLst/>
-          </a:prstGeom>
-          <a:noFill/>
-          <a:ln/>
-        </p:spPr>
-        <p:txBody>
-          <a:bodyPr wrap="square" lIns="0" tIns="0" rIns="0" bIns="0" rtlCol="0" anchor="t"/>
-          <a:lstStyle/>
-          <a:p>
-            <a:pPr algn="l" indent="0" marL="0">
-              <a:buNone/>
-            </a:pPr>
-            <a:r>
-              <a:rPr lang="en-US" sz="1600" dirty="0">
-                <a:solidFill>
-                  <a:schemeClr val="tx1"/>
-                </a:solidFill>
-              </a:rPr>
-              <a:t>Q3 2026 revenue was SGD 48.6 million, up 18% year on year </a:t>
-            </a:r>
-            <a:pPr algn="l" indent="0" marL="0">
-              <a:buNone/>
-            </a:pPr>
-            <a:r>
-              <a:rPr lang="en-US" sz="1600" b="1" dirty="0">
-                <a:solidFill>
-                  <a:schemeClr val="accent4"/>
-                </a:solidFill>
-              </a:rPr>
-              <a:t>[1]</a:t>
-            </a:r>
-            <a:pPr algn="l" indent="0" marL="0">
-              <a:buNone/>
-            </a:pPr>
-            <a:r>
-              <a:rPr lang="en-US" sz="1600" dirty="0">
-                <a:solidFill>
-                  <a:schemeClr val="tx1"/>
-                </a:solidFill>
-              </a:rPr>
-              <a:t>. Q4 guidance is SGD 50 to 52 million </a:t>
-            </a:r>
-            <a:pPr algn="l" indent="0" marL="0">
-              <a:buNone/>
-            </a:pPr>
-            <a:r>
-              <a:rPr lang="en-US" sz="1600" b="1" dirty="0">
-                <a:solidFill>
-                  <a:schemeClr val="accent4"/>
-                </a:solidFill>
-              </a:rPr>
-              <a:t>[1]</a:t>
-            </a:r>
-            <a:pPr algn="l" indent="0" marL="0">
-              <a:buNone/>
-            </a:pPr>
-            <a:r>
-              <a:rPr lang="en-US" sz="1600" dirty="0">
-                <a:solidFill>
-                  <a:schemeClr val="tx1"/>
-                </a:solidFill>
-              </a:rPr>
-              <a:t>.</a:t>
-            </a:r>
-            <a:endParaRPr lang="en-US" sz="1600" dirty="0"/>
-          </a:p>
-        </p:txBody>
-      </p:sp>
-      <p:sp>
-        <p:nvSpPr>
-          <p:cNvPr id="6" name="receipt-line-242"/>
+          <p:cNvPr id="6" name="coverage-tile-243"/>
           <p:cNvSpPr/>
           <p:nvPr/>
         </p:nvSpPr>
         <p:spPr>
           <a:xfrm>
-            <a:off x="822960" y="3017520"/>
-            <a:ext cx="4846320" cy="365760"/>
+            <a:off x="822960" y="2971800"/>
+            <a:ext cx="1463040" cy="1143000"/>
           </a:xfrm>
           <a:prstGeom prst="roundRect">
             <a:avLst>
-              <a:gd name="adj" fmla="val 12500"/>
+              <a:gd name="adj" fmla="val 4000"/>
+            </a:avLst>
+          </a:prstGeom>
+          <a:solidFill>
+            <a:srgbClr val="549F58"/>
+          </a:solidFill>
+          <a:ln/>
+        </p:spPr>
+      </p:sp>
+      <p:sp>
+        <p:nvSpPr>
+          <p:cNvPr id="7" name="text-244"/>
+          <p:cNvSpPr txBox="1"/>
+          <p:nvPr/>
+        </p:nvSpPr>
+        <p:spPr>
+          <a:xfrm>
+            <a:off x="932688" y="3035808"/>
+            <a:ext cx="1280160" cy="548640"/>
+          </a:xfrm>
+          <a:prstGeom prst="rect">
+            <a:avLst/>
+          </a:prstGeom>
+          <a:noFill/>
+          <a:ln/>
+        </p:spPr>
+        <p:txBody>
+          <a:bodyPr wrap="square" lIns="0" tIns="0" rIns="0" bIns="0" rtlCol="0" anchor="t"/>
+          <a:lstStyle/>
+          <a:p>
+            <a:pPr algn="l" indent="0" marL="0">
+              <a:buNone/>
+            </a:pPr>
+            <a:r>
+              <a:rPr lang="en-US" sz="3000" b="1" dirty="0">
+                <a:solidFill>
+                  <a:schemeClr val="bg1"/>
+                </a:solidFill>
+              </a:rPr>
+              <a:t>100%</a:t>
+            </a:r>
+            <a:endParaRPr lang="en-US" sz="3000" dirty="0"/>
+          </a:p>
+        </p:txBody>
+      </p:sp>
+      <p:sp>
+        <p:nvSpPr>
+          <p:cNvPr id="8" name="text-245"/>
+          <p:cNvSpPr txBox="1"/>
+          <p:nvPr/>
+        </p:nvSpPr>
+        <p:spPr>
+          <a:xfrm>
+            <a:off x="932688" y="3749040"/>
+            <a:ext cx="1280160" cy="274320"/>
+          </a:xfrm>
+          <a:prstGeom prst="rect">
+            <a:avLst/>
+          </a:prstGeom>
+          <a:noFill/>
+          <a:ln/>
+        </p:spPr>
+        <p:txBody>
+          <a:bodyPr wrap="square" lIns="0" tIns="0" rIns="0" bIns="0" rtlCol="0" anchor="t"/>
+          <a:lstStyle/>
+          <a:p>
+            <a:pPr algn="l" indent="0" marL="0">
+              <a:buNone/>
+            </a:pPr>
+            <a:r>
+              <a:rPr lang="en-US" sz="1000" dirty="0">
+                <a:solidFill>
+                  <a:schemeClr val="bg1"/>
+                </a:solidFill>
+              </a:rPr>
+              <a:t>Claim coverage</a:t>
+            </a:r>
+            <a:endParaRPr lang="en-US" sz="1000" dirty="0"/>
+          </a:p>
+        </p:txBody>
+      </p:sp>
+      <p:sp>
+        <p:nvSpPr>
+          <p:cNvPr id="9" name="stat-tile-246"/>
+          <p:cNvSpPr/>
+          <p:nvPr/>
+        </p:nvSpPr>
+        <p:spPr>
+          <a:xfrm>
+            <a:off x="2377440" y="2971800"/>
+            <a:ext cx="1024128" cy="1143000"/>
+          </a:xfrm>
+          <a:prstGeom prst="roundRect">
+            <a:avLst>
+              <a:gd name="adj" fmla="val 4464"/>
             </a:avLst>
           </a:prstGeom>
           <a:solidFill>
@@ -18481,14 +18728,14 @@
       </p:sp>
       <p:sp>
         <p:nvSpPr>
-          <p:cNvPr id="7" name="text-243"/>
+          <p:cNvPr id="10" name="text-247"/>
           <p:cNvSpPr txBox="1"/>
           <p:nvPr/>
         </p:nvSpPr>
         <p:spPr>
           <a:xfrm>
-            <a:off x="960120" y="3017520"/>
-            <a:ext cx="4663440" cy="365760"/>
+            <a:off x="2487168" y="3035808"/>
+            <a:ext cx="822960" cy="548640"/>
           </a:xfrm>
           <a:prstGeom prst="rect">
             <a:avLst/>
@@ -18497,38 +18744,74 @@
           <a:ln/>
         </p:spPr>
         <p:txBody>
-          <a:bodyPr wrap="square" lIns="0" tIns="0" rIns="0" bIns="0" rtlCol="0" anchor="ctr"/>
+          <a:bodyPr wrap="square" lIns="0" tIns="0" rIns="0" bIns="0" rtlCol="0" anchor="t"/>
           <a:lstStyle/>
           <a:p>
             <a:pPr algn="l" indent="0" marL="0">
               <a:buNone/>
             </a:pPr>
             <a:r>
-              <a:rPr lang="en-US" sz="1200" b="1" dirty="0">
-                <a:solidFill>
-                  <a:schemeClr val="accent4"/>
-                </a:solidFill>
-              </a:rPr>
-              <a:t>[1]  Board deck Q3 · Google Drive · supported</a:t>
-            </a:r>
-            <a:endParaRPr lang="en-US" sz="1200" dirty="0"/>
-          </a:p>
-        </p:txBody>
-      </p:sp>
-      <p:sp>
-        <p:nvSpPr>
-          <p:cNvPr id="8" name="receipt-line-244"/>
+              <a:rPr lang="en-US" sz="2600" b="1" dirty="0">
+                <a:solidFill>
+                  <a:schemeClr val="tx2"/>
+                </a:solidFill>
+              </a:rPr>
+              <a:t>8</a:t>
+            </a:r>
+            <a:endParaRPr lang="en-US" sz="2600" dirty="0"/>
+          </a:p>
+        </p:txBody>
+      </p:sp>
+      <p:sp>
+        <p:nvSpPr>
+          <p:cNvPr id="11" name="text-248"/>
+          <p:cNvSpPr txBox="1"/>
+          <p:nvPr/>
+        </p:nvSpPr>
+        <p:spPr>
+          <a:xfrm>
+            <a:off x="2487168" y="3749040"/>
+            <a:ext cx="868680" cy="274320"/>
+          </a:xfrm>
+          <a:prstGeom prst="rect">
+            <a:avLst/>
+          </a:prstGeom>
+          <a:noFill/>
+          <a:ln/>
+        </p:spPr>
+        <p:txBody>
+          <a:bodyPr wrap="square" lIns="0" tIns="0" rIns="0" bIns="0" rtlCol="0" anchor="t"/>
+          <a:lstStyle/>
+          <a:p>
+            <a:pPr algn="l" indent="0" marL="0">
+              <a:buNone/>
+            </a:pPr>
+            <a:r>
+              <a:rPr lang="en-US" sz="1000" dirty="0">
+                <a:solidFill>
+                  <a:schemeClr val="accent6"/>
+                </a:solidFill>
+              </a:rPr>
+              <a:t>claims</a:t>
+            </a:r>
+            <a:endParaRPr lang="en-US" sz="1000" dirty="0"/>
+          </a:p>
+        </p:txBody>
+      </p:sp>
+      <p:sp>
+        <p:nvSpPr>
+          <p:cNvPr id="12" name="stat-tile-249"/>
           <p:cNvSpPr/>
           <p:nvPr/>
         </p:nvSpPr>
         <p:spPr>
           <a:xfrm>
-            <a:off x="822960" y="3474720"/>
-            <a:ext cx="4846320" cy="365760"/>
+            <a:off x="3493008" y="2971800"/>
+            <a:ext cx="1024128" cy="1143000"/>
           </a:xfrm>
           <a:prstGeom prst="roundRect">
             <a:avLst>
-              <a:gd name="adj" fmla="val 12500"/>
+              <a:gd name="adj" fmla="val 4464"/>
             </a:avLst>
           </a:prstGeom>
           <a:solidFill>
@@ -18539,14 +18822,14 @@
       </p:sp>
       <p:sp>
         <p:nvSpPr>
-          <p:cNvPr id="9" name="text-245"/>
+          <p:cNvPr id="13" name="text-250"/>
           <p:cNvSpPr txBox="1"/>
           <p:nvPr/>
         </p:nvSpPr>
         <p:spPr>
           <a:xfrm>
-            <a:off x="960120" y="3474720"/>
-            <a:ext cx="4663440" cy="365760"/>
+            <a:off x="3602736" y="3035808"/>
+            <a:ext cx="822960" cy="548640"/>
           </a:xfrm>
           <a:prstGeom prst="rect">
             <a:avLst/>
@@ -18555,38 +18838,74 @@
           <a:ln/>
         </p:spPr>
         <p:txBody>
-          <a:bodyPr wrap="square" lIns="0" tIns="0" rIns="0" bIns="0" rtlCol="0" anchor="ctr"/>
+          <a:bodyPr wrap="square" lIns="0" tIns="0" rIns="0" bIns="0" rtlCol="0" anchor="t"/>
           <a:lstStyle/>
           <a:p>
             <a:pPr algn="l" indent="0" marL="0">
               <a:buNone/>
             </a:pPr>
             <a:r>
-              <a:rPr lang="en-US" sz="1200" b="1" dirty="0">
-                <a:solidFill>
-                  <a:schemeClr val="accent3"/>
-                </a:solidFill>
-              </a:rPr>
-              <a:t>Freshness: fresh · verified at source</a:t>
-            </a:r>
-            <a:endParaRPr lang="en-US" sz="1200" dirty="0"/>
-          </a:p>
-        </p:txBody>
-      </p:sp>
-      <p:sp>
-        <p:nvSpPr>
-          <p:cNvPr id="10" name="receipt-line-246"/>
+              <a:rPr lang="en-US" sz="2600" b="1" dirty="0">
+                <a:solidFill>
+                  <a:schemeClr val="tx2"/>
+                </a:solidFill>
+              </a:rPr>
+              <a:t>8</a:t>
+            </a:r>
+            <a:endParaRPr lang="en-US" sz="2600" dirty="0"/>
+          </a:p>
+        </p:txBody>
+      </p:sp>
+      <p:sp>
+        <p:nvSpPr>
+          <p:cNvPr id="14" name="text-251"/>
+          <p:cNvSpPr txBox="1"/>
+          <p:nvPr/>
+        </p:nvSpPr>
+        <p:spPr>
+          <a:xfrm>
+            <a:off x="3602736" y="3749040"/>
+            <a:ext cx="868680" cy="274320"/>
+          </a:xfrm>
+          <a:prstGeom prst="rect">
+            <a:avLst/>
+          </a:prstGeom>
+          <a:noFill/>
+          <a:ln/>
+        </p:spPr>
+        <p:txBody>
+          <a:bodyPr wrap="square" lIns="0" tIns="0" rIns="0" bIns="0" rtlCol="0" anchor="t"/>
+          <a:lstStyle/>
+          <a:p>
+            <a:pPr algn="l" indent="0" marL="0">
+              <a:buNone/>
+            </a:pPr>
+            <a:r>
+              <a:rPr lang="en-US" sz="1000" dirty="0">
+                <a:solidFill>
+                  <a:schemeClr val="accent6"/>
+                </a:solidFill>
+              </a:rPr>
+              <a:t>supported</a:t>
+            </a:r>
+            <a:endParaRPr lang="en-US" sz="1000" dirty="0"/>
+          </a:p>
+        </p:txBody>
+      </p:sp>
+      <p:sp>
+        <p:nvSpPr>
+          <p:cNvPr id="15" name="stat-tile-252"/>
           <p:cNvSpPr/>
           <p:nvPr/>
         </p:nvSpPr>
         <p:spPr>
           <a:xfrm>
-            <a:off x="822960" y="3931920"/>
-            <a:ext cx="4846320" cy="365760"/>
+            <a:off x="4608576" y="2971800"/>
+            <a:ext cx="1024128" cy="1143000"/>
           </a:xfrm>
           <a:prstGeom prst="roundRect">
             <a:avLst>
-              <a:gd name="adj" fmla="val 12500"/>
+              <a:gd name="adj" fmla="val 4464"/>
             </a:avLst>
           </a:prstGeom>
           <a:solidFill>
@@ -18597,14 +18916,14 @@
       </p:sp>
       <p:sp>
         <p:nvSpPr>
-          <p:cNvPr id="11" name="text-247"/>
+          <p:cNvPr id="16" name="text-253"/>
           <p:cNvSpPr txBox="1"/>
           <p:nvPr/>
         </p:nvSpPr>
         <p:spPr>
           <a:xfrm>
-            <a:off x="960120" y="3931920"/>
-            <a:ext cx="4663440" cy="365760"/>
+            <a:off x="4718304" y="3035808"/>
+            <a:ext cx="822960" cy="548640"/>
           </a:xfrm>
           <a:prstGeom prst="rect">
             <a:avLst/>
@@ -18613,56 +18932,97 @@
           <a:ln/>
         </p:spPr>
         <p:txBody>
-          <a:bodyPr wrap="square" lIns="0" tIns="0" rIns="0" bIns="0" rtlCol="0" anchor="ctr"/>
+          <a:bodyPr wrap="square" lIns="0" tIns="0" rIns="0" bIns="0" rtlCol="0" anchor="t"/>
           <a:lstStyle/>
           <a:p>
             <a:pPr algn="l" indent="0" marL="0">
               <a:buNone/>
             </a:pPr>
             <a:r>
-              <a:rPr lang="en-US" sz="1200" b="1" dirty="0">
-                <a:solidFill>
-                  <a:schemeClr val="accent1"/>
-                </a:solidFill>
-              </a:rPr>
-              <a:t>Grounded: 2/2 claims supported</a:t>
-            </a:r>
-            <a:endParaRPr lang="en-US" sz="1200" dirty="0"/>
-          </a:p>
-        </p:txBody>
-      </p:sp>
-      <p:sp>
-        <p:nvSpPr>
-          <p:cNvPr id="12" name="receipt-line-248"/>
+              <a:rPr lang="en-US" sz="2600" b="1" dirty="0">
+                <a:solidFill>
+                  <a:schemeClr val="accent2"/>
+                </a:solidFill>
+              </a:rPr>
+              <a:t>2</a:t>
+            </a:r>
+            <a:endParaRPr lang="en-US" sz="2600" dirty="0"/>
+          </a:p>
+        </p:txBody>
+      </p:sp>
+      <p:sp>
+        <p:nvSpPr>
+          <p:cNvPr id="17" name="text-254"/>
+          <p:cNvSpPr txBox="1"/>
+          <p:nvPr/>
+        </p:nvSpPr>
+        <p:spPr>
+          <a:xfrm>
+            <a:off x="4718304" y="3749040"/>
+            <a:ext cx="868680" cy="274320"/>
+          </a:xfrm>
+          <a:prstGeom prst="rect">
+            <a:avLst/>
+          </a:prstGeom>
+          <a:noFill/>
+          <a:ln/>
+        </p:spPr>
+        <p:txBody>
+          <a:bodyPr wrap="square" lIns="0" tIns="0" rIns="0" bIns="0" rtlCol="0" anchor="t"/>
+          <a:lstStyle/>
+          <a:p>
+            <a:pPr algn="l" indent="0" marL="0">
+              <a:buNone/>
+            </a:pPr>
+            <a:r>
+              <a:rPr lang="en-US" sz="1000" dirty="0">
+                <a:solidFill>
+                  <a:schemeClr val="accent6"/>
+                </a:solidFill>
+              </a:rPr>
+              <a:t>injection flags</a:t>
+            </a:r>
+            <a:endParaRPr lang="en-US" sz="1000" dirty="0"/>
+          </a:p>
+        </p:txBody>
+      </p:sp>
+      <p:sp>
+        <p:nvSpPr>
+          <p:cNvPr id="18" name="receipt-line-255"/>
           <p:cNvSpPr/>
           <p:nvPr/>
         </p:nvSpPr>
         <p:spPr>
           <a:xfrm>
-            <a:off x="822960" y="4389120"/>
-            <a:ext cx="4846320" cy="365760"/>
+            <a:off x="822960" y="4279392"/>
+            <a:ext cx="4846320" cy="310896"/>
           </a:xfrm>
           <a:prstGeom prst="roundRect">
             <a:avLst>
-              <a:gd name="adj" fmla="val 12500"/>
+              <a:gd name="adj" fmla="val 50000"/>
             </a:avLst>
           </a:prstGeom>
           <a:solidFill>
-            <a:schemeClr val="bg2"/>
+            <a:schemeClr val="bg1"/>
           </a:solidFill>
-          <a:ln/>
-        </p:spPr>
-      </p:sp>
-      <p:sp>
-        <p:nvSpPr>
-          <p:cNvPr id="13" name="text-249"/>
+          <a:ln w="12700">
+            <a:solidFill>
+              <a:srgbClr val="D7D7D7"/>
+            </a:solidFill>
+            <a:prstDash val="solid"/>
+          </a:ln>
+        </p:spPr>
+      </p:sp>
+      <p:sp>
+        <p:nvSpPr>
+          <p:cNvPr id="19" name="text-256"/>
           <p:cNvSpPr txBox="1"/>
           <p:nvPr/>
         </p:nvSpPr>
         <p:spPr>
           <a:xfrm>
-            <a:off x="960120" y="4389120"/>
-            <a:ext cx="4663440" cy="365760"/>
+            <a:off x="987552" y="4279392"/>
+            <a:ext cx="4572000" cy="310896"/>
           </a:xfrm>
           <a:prstGeom prst="rect">
             <a:avLst/>
@@ -18678,49 +19038,54 @@
               <a:buNone/>
             </a:pPr>
             <a:r>
-              <a:rPr lang="en-US" sz="1200" b="1" dirty="0">
-                <a:solidFill>
-                  <a:schemeClr val="accent1"/>
-                </a:solidFill>
-              </a:rPr>
-              <a:t>Access: allowed count only, no denials shown</a:t>
-            </a:r>
-            <a:endParaRPr lang="en-US" sz="1200" dirty="0"/>
-          </a:p>
-        </p:txBody>
-      </p:sp>
-      <p:sp>
-        <p:nvSpPr>
-          <p:cNvPr id="14" name="receipt-line-250"/>
+              <a:rPr lang="en-US" sz="1100" b="1" dirty="0">
+                <a:solidFill>
+                  <a:schemeClr val="tx2"/>
+                </a:solidFill>
+              </a:rPr>
+              <a:t>[E4]  Q3 2026 Board Deck · Google Drive · supported</a:t>
+            </a:r>
+            <a:endParaRPr lang="en-US" sz="1100" dirty="0"/>
+          </a:p>
+        </p:txBody>
+      </p:sp>
+      <p:sp>
+        <p:nvSpPr>
+          <p:cNvPr id="20" name="receipt-line-257"/>
           <p:cNvSpPr/>
           <p:nvPr/>
         </p:nvSpPr>
         <p:spPr>
           <a:xfrm>
-            <a:off x="822960" y="4846320"/>
-            <a:ext cx="4846320" cy="365760"/>
+            <a:off x="822960" y="4663440"/>
+            <a:ext cx="4846320" cy="310896"/>
           </a:xfrm>
           <a:prstGeom prst="roundRect">
             <a:avLst>
-              <a:gd name="adj" fmla="val 12500"/>
+              <a:gd name="adj" fmla="val 50000"/>
             </a:avLst>
           </a:prstGeom>
           <a:solidFill>
-            <a:schemeClr val="bg2"/>
+            <a:schemeClr val="bg1"/>
           </a:solidFill>
-          <a:ln/>
-        </p:spPr>
-      </p:sp>
-      <p:sp>
-        <p:nvSpPr>
-          <p:cNvPr id="15" name="text-251"/>
+          <a:ln w="12700">
+            <a:solidFill>
+              <a:srgbClr val="D7D7D7"/>
+            </a:solidFill>
+            <a:prstDash val="solid"/>
+          </a:ln>
+        </p:spPr>
+      </p:sp>
+      <p:sp>
+        <p:nvSpPr>
+          <p:cNvPr id="21" name="text-258"/>
           <p:cNvSpPr txBox="1"/>
           <p:nvPr/>
         </p:nvSpPr>
         <p:spPr>
           <a:xfrm>
-            <a:off x="960120" y="4846320"/>
-            <a:ext cx="4663440" cy="365760"/>
+            <a:off x="987552" y="4663440"/>
+            <a:ext cx="4572000" cy="310896"/>
           </a:xfrm>
           <a:prstGeom prst="rect">
             <a:avLst/>
@@ -18736,27 +19101,54 @@
               <a:buNone/>
             </a:pPr>
             <a:r>
-              <a:rPr lang="en-US" sz="1200" b="1" dirty="0">
-                <a:solidFill>
-                  <a:schemeClr val="accent5"/>
-                </a:solidFill>
-              </a:rPr>
-              <a:t>Audit event a3f9…  ·  chain verified  ·  answer by reveal only</a:t>
-            </a:r>
-            <a:endParaRPr lang="en-US" sz="1200" dirty="0"/>
-          </a:p>
-        </p:txBody>
-      </p:sp>
-      <p:sp>
-        <p:nvSpPr>
-          <p:cNvPr id="16" name="text-252"/>
+              <a:rPr lang="en-US" sz="1100" b="1" dirty="0">
+                <a:solidFill>
+                  <a:schemeClr val="accent3"/>
+                </a:solidFill>
+              </a:rPr>
+              <a:t>Freshness: mixed · stale failover runbook omitted</a:t>
+            </a:r>
+            <a:endParaRPr lang="en-US" sz="1100" dirty="0"/>
+          </a:p>
+        </p:txBody>
+      </p:sp>
+      <p:sp>
+        <p:nvSpPr>
+          <p:cNvPr id="22" name="receipt-line-259"/>
+          <p:cNvSpPr/>
+          <p:nvPr/>
+        </p:nvSpPr>
+        <p:spPr>
+          <a:xfrm>
+            <a:off x="822960" y="5047488"/>
+            <a:ext cx="4846320" cy="310896"/>
+          </a:xfrm>
+          <a:prstGeom prst="roundRect">
+            <a:avLst>
+              <a:gd name="adj" fmla="val 50000"/>
+            </a:avLst>
+          </a:prstGeom>
+          <a:solidFill>
+            <a:schemeClr val="bg1"/>
+          </a:solidFill>
+          <a:ln w="12700">
+            <a:solidFill>
+              <a:srgbClr val="D7D7D7"/>
+            </a:solidFill>
+            <a:prstDash val="solid"/>
+          </a:ln>
+        </p:spPr>
+      </p:sp>
+      <p:sp>
+        <p:nvSpPr>
+          <p:cNvPr id="23" name="text-260"/>
           <p:cNvSpPr txBox="1"/>
           <p:nvPr/>
         </p:nvSpPr>
         <p:spPr>
           <a:xfrm>
-            <a:off x="822960" y="5669280"/>
-            <a:ext cx="4846320" cy="274320"/>
+            <a:off x="987552" y="5047488"/>
+            <a:ext cx="4572000" cy="310896"/>
           </a:xfrm>
           <a:prstGeom prst="rect">
             <a:avLst/>
@@ -18765,6 +19157,105 @@
           <a:ln/>
         </p:spPr>
         <p:txBody>
+          <a:bodyPr wrap="square" lIns="0" tIns="0" rIns="0" bIns="0" rtlCol="0" anchor="ctr"/>
+          <a:lstStyle/>
+          <a:p>
+            <a:pPr algn="l" indent="0" marL="0">
+              <a:buNone/>
+            </a:pPr>
+            <a:r>
+              <a:rPr lang="en-US" sz="1100" b="1" dirty="0">
+                <a:solidFill>
+                  <a:schemeClr val="accent1"/>
+                </a:solidFill>
+              </a:rPr>
+              <a:t>Access: 11 documents allowed · policy ac-v2</a:t>
+            </a:r>
+            <a:endParaRPr lang="en-US" sz="1100" dirty="0"/>
+          </a:p>
+        </p:txBody>
+      </p:sp>
+      <p:sp>
+        <p:nvSpPr>
+          <p:cNvPr id="24" name="receipt-line-261"/>
+          <p:cNvSpPr/>
+          <p:nvPr/>
+        </p:nvSpPr>
+        <p:spPr>
+          <a:xfrm>
+            <a:off x="822960" y="5431536"/>
+            <a:ext cx="4846320" cy="310896"/>
+          </a:xfrm>
+          <a:prstGeom prst="roundRect">
+            <a:avLst>
+              <a:gd name="adj" fmla="val 50000"/>
+            </a:avLst>
+          </a:prstGeom>
+          <a:solidFill>
+            <a:schemeClr val="bg1"/>
+          </a:solidFill>
+          <a:ln w="12700">
+            <a:solidFill>
+              <a:srgbClr val="D7D7D7"/>
+            </a:solidFill>
+            <a:prstDash val="solid"/>
+          </a:ln>
+        </p:spPr>
+      </p:sp>
+      <p:sp>
+        <p:nvSpPr>
+          <p:cNvPr id="25" name="text-262"/>
+          <p:cNvSpPr txBox="1"/>
+          <p:nvPr/>
+        </p:nvSpPr>
+        <p:spPr>
+          <a:xfrm>
+            <a:off x="987552" y="5431536"/>
+            <a:ext cx="4572000" cy="310896"/>
+          </a:xfrm>
+          <a:prstGeom prst="rect">
+            <a:avLst/>
+          </a:prstGeom>
+          <a:noFill/>
+          <a:ln/>
+        </p:spPr>
+        <p:txBody>
+          <a:bodyPr wrap="square" lIns="0" tIns="0" rIns="0" bIns="0" rtlCol="0" anchor="ctr"/>
+          <a:lstStyle/>
+          <a:p>
+            <a:pPr algn="l" indent="0" marL="0">
+              <a:buNone/>
+            </a:pPr>
+            <a:r>
+              <a:rPr lang="en-US" sz="1100" b="1" dirty="0">
+                <a:solidFill>
+                  <a:schemeClr val="tx2"/>
+                </a:solidFill>
+              </a:rPr>
+              <a:t>Audit #f40c83b6 · hash chain verified</a:t>
+            </a:r>
+            <a:endParaRPr lang="en-US" sz="1100" dirty="0"/>
+          </a:p>
+        </p:txBody>
+      </p:sp>
+      <p:sp>
+        <p:nvSpPr>
+          <p:cNvPr id="26" name="text-263"/>
+          <p:cNvSpPr txBox="1"/>
+          <p:nvPr/>
+        </p:nvSpPr>
+        <p:spPr>
+          <a:xfrm>
+            <a:off x="822960" y="5833872"/>
+            <a:ext cx="4846320" cy="237744"/>
+          </a:xfrm>
+          <a:prstGeom prst="rect">
+            <a:avLst/>
+          </a:prstGeom>
+          <a:noFill/>
+          <a:ln/>
+        </p:spPr>
+        <p:txBody>
           <a:bodyPr wrap="square" lIns="0" tIns="0" rIns="0" bIns="0" rtlCol="0" anchor="t"/>
           <a:lstStyle/>
           <a:p>
@@ -18772,20 +19263,20 @@
               <a:buNone/>
             </a:pPr>
             <a:r>
-              <a:rPr lang="en-US" sz="1000" i="1" dirty="0">
+              <a:rPr lang="en-US" sz="950" i="1" dirty="0">
                 <a:solidFill>
                   <a:schemeClr val="accent6"/>
                 </a:solidFill>
               </a:rPr>
-              <a:t>Illustrative layout; values from the synthetic demo corpus.</a:t>
-            </a:r>
-            <a:endParaRPr lang="en-US" sz="1000" dirty="0"/>
-          </a:p>
-        </p:txBody>
-      </p:sp>
-      <p:sp>
-        <p:nvSpPr>
-          <p:cNvPr id="17" name="num-253"/>
+              <a:t>Real output on main (demo corpus, mock model), 16 Oct 2026.</a:t>
+            </a:r>
+            <a:endParaRPr lang="en-US" sz="950" dirty="0"/>
+          </a:p>
+        </p:txBody>
+      </p:sp>
+      <p:sp>
+        <p:nvSpPr>
+          <p:cNvPr id="27" name="num-264"/>
           <p:cNvSpPr txBox="1"/>
           <p:nvPr/>
         </p:nvSpPr>
@@ -18798,9 +19289,13 @@
             <a:avLst/>
           </a:prstGeom>
           <a:solidFill>
-            <a:schemeClr val="accent4"/>
+            <a:schemeClr val="bg1"/>
           </a:solidFill>
-          <a:ln/>
+          <a:ln w="12700">
+            <a:solidFill>
+              <a:srgbClr val="D7D7D7"/>
+            </a:solidFill>
+          </a:ln>
         </p:spPr>
         <p:txBody>
           <a:bodyPr wrap="square" lIns="0" tIns="0" rIns="0" bIns="0" rtlCol="0" anchor="ctr"/>
@@ -18810,20 +19305,20 @@
               <a:buNone/>
             </a:pPr>
             <a:r>
-              <a:rPr lang="en-US" sz="1600" b="1" dirty="0">
-                <a:solidFill>
-                  <a:schemeClr val="bg1"/>
-                </a:solidFill>
-              </a:rPr>
-              <a:t>1</a:t>
-            </a:r>
-            <a:endParaRPr lang="en-US" sz="1600" dirty="0"/>
-          </a:p>
-        </p:txBody>
-      </p:sp>
-      <p:sp>
-        <p:nvSpPr>
-          <p:cNvPr id="18" name="text-254"/>
+              <a:rPr lang="en-US" sz="1400" b="1" dirty="0">
+                <a:solidFill>
+                  <a:schemeClr val="tx2"/>
+                </a:solidFill>
+              </a:rPr>
+              <a:t>01</a:t>
+            </a:r>
+            <a:endParaRPr lang="en-US" sz="1400" dirty="0"/>
+          </a:p>
+        </p:txBody>
+      </p:sp>
+      <p:sp>
+        <p:nvSpPr>
+          <p:cNvPr id="28" name="text-265"/>
           <p:cNvSpPr txBox="1"/>
           <p:nvPr/>
         </p:nvSpPr>
@@ -18859,7 +19354,7 @@
       </p:sp>
       <p:sp>
         <p:nvSpPr>
-          <p:cNvPr id="19" name="text-255"/>
+          <p:cNvPr id="29" name="text-266"/>
           <p:cNvSpPr txBox="1"/>
           <p:nvPr/>
         </p:nvSpPr>
@@ -18895,7 +19390,7 @@
       </p:sp>
       <p:sp>
         <p:nvSpPr>
-          <p:cNvPr id="20" name="num-256"/>
+          <p:cNvPr id="30" name="num-267"/>
           <p:cNvSpPr txBox="1"/>
           <p:nvPr/>
         </p:nvSpPr>
@@ -18908,9 +19403,13 @@
             <a:avLst/>
           </a:prstGeom>
           <a:solidFill>
-            <a:schemeClr val="accent3"/>
+            <a:schemeClr val="bg1"/>
           </a:solidFill>
-          <a:ln/>
+          <a:ln w="12700">
+            <a:solidFill>
+              <a:srgbClr val="D7D7D7"/>
+            </a:solidFill>
+          </a:ln>
         </p:spPr>
         <p:txBody>
           <a:bodyPr wrap="square" lIns="0" tIns="0" rIns="0" bIns="0" rtlCol="0" anchor="ctr"/>
@@ -18920,20 +19419,20 @@
               <a:buNone/>
             </a:pPr>
             <a:r>
-              <a:rPr lang="en-US" sz="1600" b="1" dirty="0">
-                <a:solidFill>
-                  <a:schemeClr val="bg1"/>
-                </a:solidFill>
-              </a:rPr>
-              <a:t>2</a:t>
-            </a:r>
-            <a:endParaRPr lang="en-US" sz="1600" dirty="0"/>
-          </a:p>
-        </p:txBody>
-      </p:sp>
-      <p:sp>
-        <p:nvSpPr>
-          <p:cNvPr id="21" name="text-257"/>
+              <a:rPr lang="en-US" sz="1400" b="1" dirty="0">
+                <a:solidFill>
+                  <a:schemeClr val="tx2"/>
+                </a:solidFill>
+              </a:rPr>
+              <a:t>02</a:t>
+            </a:r>
+            <a:endParaRPr lang="en-US" sz="1400" dirty="0"/>
+          </a:p>
+        </p:txBody>
+      </p:sp>
+      <p:sp>
+        <p:nvSpPr>
+          <p:cNvPr id="31" name="text-268"/>
           <p:cNvSpPr txBox="1"/>
           <p:nvPr/>
         </p:nvSpPr>
@@ -18969,7 +19468,7 @@
       </p:sp>
       <p:sp>
         <p:nvSpPr>
-          <p:cNvPr id="22" name="text-258"/>
+          <p:cNvPr id="32" name="text-269"/>
           <p:cNvSpPr txBox="1"/>
           <p:nvPr/>
         </p:nvSpPr>
@@ -19005,7 +19504,7 @@
       </p:sp>
       <p:sp>
         <p:nvSpPr>
-          <p:cNvPr id="23" name="num-259"/>
+          <p:cNvPr id="33" name="num-270"/>
           <p:cNvSpPr txBox="1"/>
           <p:nvPr/>
         </p:nvSpPr>
@@ -19030,20 +19529,20 @@
               <a:buNone/>
             </a:pPr>
             <a:r>
-              <a:rPr lang="en-US" sz="1600" b="1" dirty="0">
+              <a:rPr lang="en-US" sz="1400" b="1" dirty="0">
                 <a:solidFill>
                   <a:schemeClr val="bg1"/>
                 </a:solidFill>
               </a:rPr>
-              <a:t>3</a:t>
-            </a:r>
-            <a:endParaRPr lang="en-US" sz="1600" dirty="0"/>
-          </a:p>
-        </p:txBody>
-      </p:sp>
-      <p:sp>
-        <p:nvSpPr>
-          <p:cNvPr id="24" name="text-260"/>
+              <a:t>03</a:t>
+            </a:r>
+            <a:endParaRPr lang="en-US" sz="1400" dirty="0"/>
+          </a:p>
+        </p:txBody>
+      </p:sp>
+      <p:sp>
+        <p:nvSpPr>
+          <p:cNvPr id="34" name="text-271"/>
           <p:cNvSpPr txBox="1"/>
           <p:nvPr/>
         </p:nvSpPr>
@@ -19079,7 +19578,7 @@
       </p:sp>
       <p:sp>
         <p:nvSpPr>
-          <p:cNvPr id="25" name="text-261"/>
+          <p:cNvPr id="35" name="text-272"/>
           <p:cNvSpPr txBox="1"/>
           <p:nvPr/>
         </p:nvSpPr>
@@ -19115,7 +19614,7 @@
       </p:sp>
       <p:sp>
         <p:nvSpPr>
-          <p:cNvPr id="26" name="num-262"/>
+          <p:cNvPr id="36" name="num-273"/>
           <p:cNvSpPr txBox="1"/>
           <p:nvPr/>
         </p:nvSpPr>
@@ -19140,20 +19639,20 @@
               <a:buNone/>
             </a:pPr>
             <a:r>
-              <a:rPr lang="en-US" sz="1600" b="1" dirty="0">
+              <a:rPr lang="en-US" sz="1400" b="1" dirty="0">
                 <a:solidFill>
                   <a:schemeClr val="bg1"/>
                 </a:solidFill>
               </a:rPr>
-              <a:t>4</a:t>
-            </a:r>
-            <a:endParaRPr lang="en-US" sz="1600" dirty="0"/>
-          </a:p>
-        </p:txBody>
-      </p:sp>
-      <p:sp>
-        <p:nvSpPr>
-          <p:cNvPr id="27" name="text-263"/>
+              <a:t>04</a:t>
+            </a:r>
+            <a:endParaRPr lang="en-US" sz="1400" dirty="0"/>
+          </a:p>
+        </p:txBody>
+      </p:sp>
+      <p:sp>
+        <p:nvSpPr>
+          <p:cNvPr id="37" name="text-274"/>
           <p:cNvSpPr txBox="1"/>
           <p:nvPr/>
         </p:nvSpPr>
@@ -19189,7 +19688,7 @@
       </p:sp>
       <p:sp>
         <p:nvSpPr>
-          <p:cNvPr id="28" name="text-264"/>
+          <p:cNvPr id="38" name="text-275"/>
           <p:cNvSpPr txBox="1"/>
           <p:nvPr/>
         </p:nvSpPr>
@@ -19225,7 +19724,7 @@
       </p:sp>
       <p:sp>
         <p:nvSpPr>
-          <p:cNvPr id="29" name="num-265"/>
+          <p:cNvPr id="39" name="num-276"/>
           <p:cNvSpPr txBox="1"/>
           <p:nvPr/>
         </p:nvSpPr>
@@ -19238,9 +19737,13 @@
             <a:avLst/>
           </a:prstGeom>
           <a:solidFill>
-            <a:schemeClr val="accent5"/>
+            <a:schemeClr val="bg1"/>
           </a:solidFill>
-          <a:ln/>
+          <a:ln w="12700">
+            <a:solidFill>
+              <a:srgbClr val="D7D7D7"/>
+            </a:solidFill>
+          </a:ln>
         </p:spPr>
         <p:txBody>
           <a:bodyPr wrap="square" lIns="0" tIns="0" rIns="0" bIns="0" rtlCol="0" anchor="ctr"/>
@@ -19250,20 +19753,20 @@
               <a:buNone/>
             </a:pPr>
             <a:r>
-              <a:rPr lang="en-US" sz="1600" b="1" dirty="0">
-                <a:solidFill>
-                  <a:schemeClr val="bg1"/>
-                </a:solidFill>
-              </a:rPr>
-              <a:t>5</a:t>
-            </a:r>
-            <a:endParaRPr lang="en-US" sz="1600" dirty="0"/>
-          </a:p>
-        </p:txBody>
-      </p:sp>
-      <p:sp>
-        <p:nvSpPr>
-          <p:cNvPr id="30" name="text-266"/>
+              <a:rPr lang="en-US" sz="1400" b="1" dirty="0">
+                <a:solidFill>
+                  <a:schemeClr val="tx2"/>
+                </a:solidFill>
+              </a:rPr>
+              <a:t>05</a:t>
+            </a:r>
+            <a:endParaRPr lang="en-US" sz="1400" dirty="0"/>
+          </a:p>
+        </p:txBody>
+      </p:sp>
+      <p:sp>
+        <p:nvSpPr>
+          <p:cNvPr id="40" name="text-277"/>
           <p:cNvSpPr txBox="1"/>
           <p:nvPr/>
         </p:nvSpPr>
@@ -19299,7 +19802,7 @@
       </p:sp>
       <p:sp>
         <p:nvSpPr>
-          <p:cNvPr id="31" name="text-267"/>
+          <p:cNvPr id="41" name="text-278"/>
           <p:cNvSpPr txBox="1"/>
           <p:nvPr/>
         </p:nvSpPr>
@@ -19391,45 +19894,45 @@
   <a:themeElements>
     <a:clrScheme name="Brain Sauce">
       <a:dk1>
-        <a:srgbClr val="0F172A"/>
+        <a:srgbClr val="1D1D1D"/>
       </a:dk1>
       <a:lt1>
         <a:srgbClr val="FFFFFF"/>
       </a:lt1>
       <a:dk2>
-        <a:srgbClr val="0B2545"/>
+        <a:srgbClr val="1D1D1D"/>
       </a:dk2>
       <a:lt2>
-        <a:srgbClr val="EEF3F8"/>
+        <a:srgbClr val="F5F5F5"/>
       </a:lt2>
       <a:accent1>
-        <a:srgbClr val="0E9F8E"/>
+        <a:srgbClr val="3F8243"/>
       </a:accent1>
       <a:accent2>
-        <a:srgbClr val="E5484D"/>
+        <a:srgbClr val="D9433B"/>
       </a:accent2>
       <a:accent3>
-        <a:srgbClr val="E9A23B"/>
+        <a:srgbClr val="C77A0A"/>
       </a:accent3>
       <a:accent4>
-        <a:srgbClr val="2F6FDB"/>
+        <a:srgbClr val="8C8C8C"/>
       </a:accent4>
       <a:accent5>
-        <a:srgbClr val="7C5CD6"/>
+        <a:srgbClr val="666666"/>
       </a:accent5>
       <a:accent6>
-        <a:srgbClr val="64748B"/>
+        <a:srgbClr val="737373"/>
       </a:accent6>
       <a:hlink>
-        <a:srgbClr val="2F6FDB"/>
+        <a:srgbClr val="8C8C8C"/>
       </a:hlink>
       <a:folHlink>
-        <a:srgbClr val="7C5CD6"/>
+        <a:srgbClr val="666666"/>
       </a:folHlink>
     </a:clrScheme>
     <a:fontScheme name="Brain Sauce">
       <a:majorFont>
-        <a:latin typeface="Calibri"/>
+        <a:latin typeface="Arial"/>
         <a:ea typeface=""/>
         <a:cs typeface=""/>
         <a:font script="Jpan" typeface="游ゴシック Light"/>
@@ -19481,7 +19984,7 @@
         <a:font script="Tfng" typeface="Ebrima"/>
       </a:majorFont>
       <a:minorFont>
-        <a:latin typeface="Calibri"/>
+        <a:latin typeface="Arial"/>
         <a:ea typeface=""/>
         <a:cs typeface=""/>
         <a:font script="Jpan" typeface="游ゴシック"/>

--- a/docs/presentations/internal-brain-architecture-submission.pptx
+++ b/docs/presentations/internal-brain-architecture-submission.pptx
@@ -8287,7 +8287,7 @@
                   <a:schemeClr val="accent1"/>
                 </a:solidFill>
               </a:rPr>
-              <a:t>676</a:t>
+              <a:t>686</a:t>
             </a:r>
             <a:endParaRPr lang="en-US" sz="4800" dirty="0"/>
           </a:p>

--- a/docs/presentations/internal-brain-architecture-submission.pptx
+++ b/docs/presentations/internal-brain-architecture-submission.pptx
@@ -120,21 +120,21 @@
   <p:extLst>
     <p:ext uri="{521415D9-36F7-43E2-AB2F-B90AF26B5E84}">
       <p14:sectionLst xmlns:p14="http://schemas.microsoft.com/office/powerpoint/2010/main">
-        <p14:section name="Story" id="{1e71f93e-90c2-e0a9-612b-62b38a7a010a}">
+        <p14:section name="Story" id="{f3581d2c-f071-5ee3-f40d-7fba3bd089e6}">
           <p14:sldIdLst>
             <p14:sldId id="256"/>
             <p14:sldId id="257"/>
             <p14:sldId id="258"/>
           </p14:sldIdLst>
         </p14:section>
-        <p14:section name="Architecture" id="{137edd0d-3154-915a-fd71-3d58a1a63343}">
+        <p14:section name="Architecture" id="{2ec63568-ed19-f3d7-73ff-81b065201ccf}">
           <p14:sldIdLst>
             <p14:sldId id="259"/>
             <p14:sldId id="260"/>
             <p14:sldId id="261"/>
           </p14:sldIdLst>
         </p14:section>
-        <p14:section name="Proof" id="{146d3468-f03c-2e23-de42-699628e2df36}">
+        <p14:section name="Proof" id="{aafb7d34-8775-524a-3300-b0db38075808}">
           <p14:sldIdLst>
             <p14:sldId id="262"/>
             <p14:sldId id="263"/>
@@ -16599,7 +16599,7 @@
                   <a:schemeClr val="accent6"/>
                 </a:solidFill>
               </a:rPr>
-              <a:t>The saved answer is withheld too</a:t>
+              <a:t>Saved answer withheld; John's line leaves the access map</a:t>
             </a:r>
             <a:endParaRPr lang="en-US" sz="1300" dirty="0"/>
           </a:p>
@@ -16698,7 +16698,7 @@
                   <a:schemeClr val="accent6"/>
                 </a:solidFill>
               </a:rPr>
-              <a:t>Synthetic company and figures. Each scene is an automated test: test_ask_pipeline.py, test_permission_freshness.py and test_query_history_access.py.</a:t>
+              <a:t>Synthetic company and figures. Each scene is an automated test: test_ask_pipeline.py, test_permission_freshness.py, test_query_history_access.py and test_access_map.py.</a:t>
             </a:r>
             <a:endParaRPr lang="en-US" sz="1000" dirty="0"/>
           </a:p>

--- a/docs/presentations/internal-brain-architecture-submission.pptx
+++ b/docs/presentations/internal-brain-architecture-submission.pptx
@@ -120,21 +120,21 @@
   <p:extLst>
     <p:ext uri="{521415D9-36F7-43E2-AB2F-B90AF26B5E84}">
       <p14:sectionLst xmlns:p14="http://schemas.microsoft.com/office/powerpoint/2010/main">
-        <p14:section name="Story" id="{f3581d2c-f071-5ee3-f40d-7fba3bd089e6}">
+        <p14:section name="Story" id="{a132602a-7d26-2f69-59e5-80f0d432bef6}">
           <p14:sldIdLst>
             <p14:sldId id="256"/>
             <p14:sldId id="257"/>
             <p14:sldId id="258"/>
           </p14:sldIdLst>
         </p14:section>
-        <p14:section name="Architecture" id="{2ec63568-ed19-f3d7-73ff-81b065201ccf}">
+        <p14:section name="Architecture" id="{092b3cbe-1720-0b7b-68e7-afb15b4d3135}">
           <p14:sldIdLst>
             <p14:sldId id="259"/>
             <p14:sldId id="260"/>
             <p14:sldId id="261"/>
           </p14:sldIdLst>
         </p14:section>
-        <p14:section name="Proof" id="{aafb7d34-8775-524a-3300-b0db38075808}">
+        <p14:section name="Proof" id="{bc2af1c4-466d-3b41-ad5d-03e9b7d03fbe}">
           <p14:sldIdLst>
             <p14:sldId id="262"/>
             <p14:sldId id="263"/>
@@ -8287,7 +8287,7 @@
                   <a:schemeClr val="accent1"/>
                 </a:solidFill>
               </a:rPr>
-              <a:t>676</a:t>
+              <a:t>683</a:t>
             </a:r>
             <a:endParaRPr lang="en-US" sz="4800" dirty="0"/>
           </a:p>

--- a/docs/presentations/internal-brain-architecture-submission.pptx
+++ b/docs/presentations/internal-brain-architecture-submission.pptx
@@ -8287,7 +8287,7 @@
                   <a:schemeClr val="accent1"/>
                 </a:solidFill>
               </a:rPr>
-              <a:t>686</a:t>
+              <a:t>711</a:t>
             </a:r>
             <a:endParaRPr lang="en-US" sz="4800" dirty="0"/>
           </a:p>
